--- a/LectureSlides/03a_ReviewOfProbability.pptx
+++ b/LectureSlides/03a_ReviewOfProbability.pptx
@@ -4,6 +4,9 @@
   <p:sldMasterIdLst>
     <p:sldMasterId id="2147483648" r:id="rId1"/>
   </p:sldMasterIdLst>
+  <p:notesMasterIdLst>
+    <p:notesMasterId r:id="rId49"/>
+  </p:notesMasterIdLst>
   <p:sldIdLst>
     <p:sldId id="299" r:id="rId2"/>
     <p:sldId id="257" r:id="rId3"/>
@@ -167,6 +170,439 @@
     </p:ext>
   </p:extLst>
 </p:presentation>
+</file>
+
+<file path=ppt/notesMasters/notesMaster1.xml><?xml version="1.0" encoding="utf-8"?>
+<p:notesMaster xmlns:a="http://schemas.openxmlformats.org/drawingml/2006/main" xmlns:r="http://schemas.openxmlformats.org/officeDocument/2006/relationships" xmlns:p="http://schemas.openxmlformats.org/presentationml/2006/main">
+  <p:cSld>
+    <p:bg>
+      <p:bgRef idx="1001">
+        <a:schemeClr val="bg1"/>
+      </p:bgRef>
+    </p:bg>
+    <p:spTree>
+      <p:nvGrpSpPr>
+        <p:cNvPr id="1" name=""/>
+        <p:cNvGrpSpPr/>
+        <p:nvPr/>
+      </p:nvGrpSpPr>
+      <p:grpSpPr>
+        <a:xfrm>
+          <a:off x="0" y="0"/>
+          <a:ext cx="0" cy="0"/>
+          <a:chOff x="0" y="0"/>
+          <a:chExt cx="0" cy="0"/>
+        </a:xfrm>
+      </p:grpSpPr>
+      <p:sp>
+        <p:nvSpPr>
+          <p:cNvPr id="2" name="Header Placeholder 1"/>
+          <p:cNvSpPr>
+            <a:spLocks noGrp="1"/>
+          </p:cNvSpPr>
+          <p:nvPr>
+            <p:ph type="hdr" sz="quarter"/>
+          </p:nvPr>
+        </p:nvSpPr>
+        <p:spPr>
+          <a:xfrm>
+            <a:off x="0" y="0"/>
+            <a:ext cx="2971800" cy="458788"/>
+          </a:xfrm>
+          <a:prstGeom prst="rect">
+            <a:avLst/>
+          </a:prstGeom>
+        </p:spPr>
+        <p:txBody>
+          <a:bodyPr vert="horz" lIns="91440" tIns="45720" rIns="91440" bIns="45720" rtlCol="0"/>
+          <a:lstStyle>
+            <a:lvl1pPr algn="l">
+              <a:defRPr sz="1200"/>
+            </a:lvl1pPr>
+          </a:lstStyle>
+          <a:p>
+            <a:endParaRPr lang="en-US"/>
+          </a:p>
+        </p:txBody>
+      </p:sp>
+      <p:sp>
+        <p:nvSpPr>
+          <p:cNvPr id="3" name="Date Placeholder 2"/>
+          <p:cNvSpPr>
+            <a:spLocks noGrp="1"/>
+          </p:cNvSpPr>
+          <p:nvPr>
+            <p:ph type="dt" idx="1"/>
+          </p:nvPr>
+        </p:nvSpPr>
+        <p:spPr>
+          <a:xfrm>
+            <a:off x="3884613" y="0"/>
+            <a:ext cx="2971800" cy="458788"/>
+          </a:xfrm>
+          <a:prstGeom prst="rect">
+            <a:avLst/>
+          </a:prstGeom>
+        </p:spPr>
+        <p:txBody>
+          <a:bodyPr vert="horz" lIns="91440" tIns="45720" rIns="91440" bIns="45720" rtlCol="0"/>
+          <a:lstStyle>
+            <a:lvl1pPr algn="r">
+              <a:defRPr sz="1200"/>
+            </a:lvl1pPr>
+          </a:lstStyle>
+          <a:p>
+            <a:fld id="{68C00587-1FB2-4AD6-90E2-FCB188A5CAEA}" type="datetimeFigureOut">
+              <a:rPr lang="en-US" smtClean="0"/>
+              <a:t>9/14/2026</a:t>
+            </a:fld>
+            <a:endParaRPr lang="en-US"/>
+          </a:p>
+        </p:txBody>
+      </p:sp>
+      <p:sp>
+        <p:nvSpPr>
+          <p:cNvPr id="4" name="Slide Image Placeholder 3"/>
+          <p:cNvSpPr>
+            <a:spLocks noGrp="1" noRot="1" noChangeAspect="1"/>
+          </p:cNvSpPr>
+          <p:nvPr>
+            <p:ph type="sldImg" idx="2"/>
+          </p:nvPr>
+        </p:nvSpPr>
+        <p:spPr>
+          <a:xfrm>
+            <a:off x="685800" y="1143000"/>
+            <a:ext cx="5486400" cy="3086100"/>
+          </a:xfrm>
+          <a:prstGeom prst="rect">
+            <a:avLst/>
+          </a:prstGeom>
+          <a:noFill/>
+          <a:ln w="12700">
+            <a:solidFill>
+              <a:prstClr val="black"/>
+            </a:solidFill>
+          </a:ln>
+        </p:spPr>
+        <p:txBody>
+          <a:bodyPr vert="horz" lIns="91440" tIns="45720" rIns="91440" bIns="45720" rtlCol="0" anchor="ctr"/>
+          <a:lstStyle/>
+          <a:p>
+            <a:endParaRPr lang="en-US"/>
+          </a:p>
+        </p:txBody>
+      </p:sp>
+      <p:sp>
+        <p:nvSpPr>
+          <p:cNvPr id="5" name="Notes Placeholder 4"/>
+          <p:cNvSpPr>
+            <a:spLocks noGrp="1"/>
+          </p:cNvSpPr>
+          <p:nvPr>
+            <p:ph type="body" sz="quarter" idx="3"/>
+          </p:nvPr>
+        </p:nvSpPr>
+        <p:spPr>
+          <a:xfrm>
+            <a:off x="685800" y="4400550"/>
+            <a:ext cx="5486400" cy="3600450"/>
+          </a:xfrm>
+          <a:prstGeom prst="rect">
+            <a:avLst/>
+          </a:prstGeom>
+        </p:spPr>
+        <p:txBody>
+          <a:bodyPr vert="horz" lIns="91440" tIns="45720" rIns="91440" bIns="45720" rtlCol="0"/>
+          <a:lstStyle/>
+          <a:p>
+            <a:pPr lvl="0"/>
+            <a:r>
+              <a:rPr lang="en-US"/>
+              <a:t>Click to edit Master text styles</a:t>
+            </a:r>
+          </a:p>
+          <a:p>
+            <a:pPr lvl="1"/>
+            <a:r>
+              <a:rPr lang="en-US"/>
+              <a:t>Second level</a:t>
+            </a:r>
+          </a:p>
+          <a:p>
+            <a:pPr lvl="2"/>
+            <a:r>
+              <a:rPr lang="en-US"/>
+              <a:t>Third level</a:t>
+            </a:r>
+          </a:p>
+          <a:p>
+            <a:pPr lvl="3"/>
+            <a:r>
+              <a:rPr lang="en-US"/>
+              <a:t>Fourth level</a:t>
+            </a:r>
+          </a:p>
+          <a:p>
+            <a:pPr lvl="4"/>
+            <a:r>
+              <a:rPr lang="en-US"/>
+              <a:t>Fifth level</a:t>
+            </a:r>
+          </a:p>
+        </p:txBody>
+      </p:sp>
+      <p:sp>
+        <p:nvSpPr>
+          <p:cNvPr id="6" name="Footer Placeholder 5"/>
+          <p:cNvSpPr>
+            <a:spLocks noGrp="1"/>
+          </p:cNvSpPr>
+          <p:nvPr>
+            <p:ph type="ftr" sz="quarter" idx="4"/>
+          </p:nvPr>
+        </p:nvSpPr>
+        <p:spPr>
+          <a:xfrm>
+            <a:off x="0" y="8685213"/>
+            <a:ext cx="2971800" cy="458787"/>
+          </a:xfrm>
+          <a:prstGeom prst="rect">
+            <a:avLst/>
+          </a:prstGeom>
+        </p:spPr>
+        <p:txBody>
+          <a:bodyPr vert="horz" lIns="91440" tIns="45720" rIns="91440" bIns="45720" rtlCol="0" anchor="b"/>
+          <a:lstStyle>
+            <a:lvl1pPr algn="l">
+              <a:defRPr sz="1200"/>
+            </a:lvl1pPr>
+          </a:lstStyle>
+          <a:p>
+            <a:endParaRPr lang="en-US"/>
+          </a:p>
+        </p:txBody>
+      </p:sp>
+      <p:sp>
+        <p:nvSpPr>
+          <p:cNvPr id="7" name="Slide Number Placeholder 6"/>
+          <p:cNvSpPr>
+            <a:spLocks noGrp="1"/>
+          </p:cNvSpPr>
+          <p:nvPr>
+            <p:ph type="sldNum" sz="quarter" idx="5"/>
+          </p:nvPr>
+        </p:nvSpPr>
+        <p:spPr>
+          <a:xfrm>
+            <a:off x="3884613" y="8685213"/>
+            <a:ext cx="2971800" cy="458787"/>
+          </a:xfrm>
+          <a:prstGeom prst="rect">
+            <a:avLst/>
+          </a:prstGeom>
+        </p:spPr>
+        <p:txBody>
+          <a:bodyPr vert="horz" lIns="91440" tIns="45720" rIns="91440" bIns="45720" rtlCol="0" anchor="b"/>
+          <a:lstStyle>
+            <a:lvl1pPr algn="r">
+              <a:defRPr sz="1200"/>
+            </a:lvl1pPr>
+          </a:lstStyle>
+          <a:p>
+            <a:fld id="{33A9C15B-938B-40F4-9DEF-1E866F21062B}" type="slidenum">
+              <a:rPr lang="en-US" smtClean="0"/>
+              <a:t>‹#›</a:t>
+            </a:fld>
+            <a:endParaRPr lang="en-US"/>
+          </a:p>
+        </p:txBody>
+      </p:sp>
+    </p:spTree>
+    <p:extLst>
+      <p:ext uri="{BB962C8B-B14F-4D97-AF65-F5344CB8AC3E}">
+        <p14:creationId xmlns:p14="http://schemas.microsoft.com/office/powerpoint/2010/main" val="3542438081"/>
+      </p:ext>
+    </p:extLst>
+  </p:cSld>
+  <p:clrMap bg1="lt1" tx1="dk1" bg2="lt2" tx2="dk2" accent1="accent1" accent2="accent2" accent3="accent3" accent4="accent4" accent5="accent5" accent6="accent6" hlink="hlink" folHlink="folHlink"/>
+  <p:notesStyle>
+    <a:lvl1pPr marL="0" algn="l" defTabSz="914400" rtl="0" eaLnBrk="1" latinLnBrk="0" hangingPunct="1">
+      <a:defRPr sz="1200" kern="1200">
+        <a:solidFill>
+          <a:schemeClr val="tx1"/>
+        </a:solidFill>
+        <a:latin typeface="+mn-lt"/>
+        <a:ea typeface="+mn-ea"/>
+        <a:cs typeface="+mn-cs"/>
+      </a:defRPr>
+    </a:lvl1pPr>
+    <a:lvl2pPr marL="457200" algn="l" defTabSz="914400" rtl="0" eaLnBrk="1" latinLnBrk="0" hangingPunct="1">
+      <a:defRPr sz="1200" kern="1200">
+        <a:solidFill>
+          <a:schemeClr val="tx1"/>
+        </a:solidFill>
+        <a:latin typeface="+mn-lt"/>
+        <a:ea typeface="+mn-ea"/>
+        <a:cs typeface="+mn-cs"/>
+      </a:defRPr>
+    </a:lvl2pPr>
+    <a:lvl3pPr marL="914400" algn="l" defTabSz="914400" rtl="0" eaLnBrk="1" latinLnBrk="0" hangingPunct="1">
+      <a:defRPr sz="1200" kern="1200">
+        <a:solidFill>
+          <a:schemeClr val="tx1"/>
+        </a:solidFill>
+        <a:latin typeface="+mn-lt"/>
+        <a:ea typeface="+mn-ea"/>
+        <a:cs typeface="+mn-cs"/>
+      </a:defRPr>
+    </a:lvl3pPr>
+    <a:lvl4pPr marL="1371600" algn="l" defTabSz="914400" rtl="0" eaLnBrk="1" latinLnBrk="0" hangingPunct="1">
+      <a:defRPr sz="1200" kern="1200">
+        <a:solidFill>
+          <a:schemeClr val="tx1"/>
+        </a:solidFill>
+        <a:latin typeface="+mn-lt"/>
+        <a:ea typeface="+mn-ea"/>
+        <a:cs typeface="+mn-cs"/>
+      </a:defRPr>
+    </a:lvl4pPr>
+    <a:lvl5pPr marL="1828800" algn="l" defTabSz="914400" rtl="0" eaLnBrk="1" latinLnBrk="0" hangingPunct="1">
+      <a:defRPr sz="1200" kern="1200">
+        <a:solidFill>
+          <a:schemeClr val="tx1"/>
+        </a:solidFill>
+        <a:latin typeface="+mn-lt"/>
+        <a:ea typeface="+mn-ea"/>
+        <a:cs typeface="+mn-cs"/>
+      </a:defRPr>
+    </a:lvl5pPr>
+    <a:lvl6pPr marL="2286000" algn="l" defTabSz="914400" rtl="0" eaLnBrk="1" latinLnBrk="0" hangingPunct="1">
+      <a:defRPr sz="1200" kern="1200">
+        <a:solidFill>
+          <a:schemeClr val="tx1"/>
+        </a:solidFill>
+        <a:latin typeface="+mn-lt"/>
+        <a:ea typeface="+mn-ea"/>
+        <a:cs typeface="+mn-cs"/>
+      </a:defRPr>
+    </a:lvl6pPr>
+    <a:lvl7pPr marL="2743200" algn="l" defTabSz="914400" rtl="0" eaLnBrk="1" latinLnBrk="0" hangingPunct="1">
+      <a:defRPr sz="1200" kern="1200">
+        <a:solidFill>
+          <a:schemeClr val="tx1"/>
+        </a:solidFill>
+        <a:latin typeface="+mn-lt"/>
+        <a:ea typeface="+mn-ea"/>
+        <a:cs typeface="+mn-cs"/>
+      </a:defRPr>
+    </a:lvl7pPr>
+    <a:lvl8pPr marL="3200400" algn="l" defTabSz="914400" rtl="0" eaLnBrk="1" latinLnBrk="0" hangingPunct="1">
+      <a:defRPr sz="1200" kern="1200">
+        <a:solidFill>
+          <a:schemeClr val="tx1"/>
+        </a:solidFill>
+        <a:latin typeface="+mn-lt"/>
+        <a:ea typeface="+mn-ea"/>
+        <a:cs typeface="+mn-cs"/>
+      </a:defRPr>
+    </a:lvl8pPr>
+    <a:lvl9pPr marL="3657600" algn="l" defTabSz="914400" rtl="0" eaLnBrk="1" latinLnBrk="0" hangingPunct="1">
+      <a:defRPr sz="1200" kern="1200">
+        <a:solidFill>
+          <a:schemeClr val="tx1"/>
+        </a:solidFill>
+        <a:latin typeface="+mn-lt"/>
+        <a:ea typeface="+mn-ea"/>
+        <a:cs typeface="+mn-cs"/>
+      </a:defRPr>
+    </a:lvl9pPr>
+  </p:notesStyle>
+</p:notesMaster>
+</file>
+
+<file path=ppt/notesSlides/notesSlide1.xml><?xml version="1.0" encoding="utf-8"?>
+<p:notes xmlns:a="http://schemas.openxmlformats.org/drawingml/2006/main" xmlns:r="http://schemas.openxmlformats.org/officeDocument/2006/relationships" xmlns:p="http://schemas.openxmlformats.org/presentationml/2006/main">
+  <p:cSld>
+    <p:spTree>
+      <p:nvGrpSpPr>
+        <p:cNvPr id="1" name=""/>
+        <p:cNvGrpSpPr/>
+        <p:nvPr/>
+      </p:nvGrpSpPr>
+      <p:grpSpPr>
+        <a:xfrm>
+          <a:off x="0" y="0"/>
+          <a:ext cx="0" cy="0"/>
+          <a:chOff x="0" y="0"/>
+          <a:chExt cx="0" cy="0"/>
+        </a:xfrm>
+      </p:grpSpPr>
+      <p:sp>
+        <p:nvSpPr>
+          <p:cNvPr id="2" name="Slide Image Placeholder 1"/>
+          <p:cNvSpPr>
+            <a:spLocks noGrp="1" noRot="1" noChangeAspect="1"/>
+          </p:cNvSpPr>
+          <p:nvPr>
+            <p:ph type="sldImg"/>
+          </p:nvPr>
+        </p:nvSpPr>
+        <p:spPr/>
+      </p:sp>
+      <p:sp>
+        <p:nvSpPr>
+          <p:cNvPr id="3" name="Notes Placeholder 2"/>
+          <p:cNvSpPr>
+            <a:spLocks noGrp="1"/>
+          </p:cNvSpPr>
+          <p:nvPr>
+            <p:ph type="body" idx="1"/>
+          </p:nvPr>
+        </p:nvSpPr>
+        <p:spPr/>
+        <p:txBody>
+          <a:bodyPr/>
+          <a:lstStyle/>
+          <a:p>
+            <a:endParaRPr lang="en-US" dirty="0"/>
+          </a:p>
+        </p:txBody>
+      </p:sp>
+      <p:sp>
+        <p:nvSpPr>
+          <p:cNvPr id="4" name="Slide Number Placeholder 3"/>
+          <p:cNvSpPr>
+            <a:spLocks noGrp="1"/>
+          </p:cNvSpPr>
+          <p:nvPr>
+            <p:ph type="sldNum" sz="quarter" idx="5"/>
+          </p:nvPr>
+        </p:nvSpPr>
+        <p:spPr/>
+        <p:txBody>
+          <a:bodyPr/>
+          <a:lstStyle/>
+          <a:p>
+            <a:fld id="{33A9C15B-938B-40F4-9DEF-1E866F21062B}" type="slidenum">
+              <a:rPr lang="en-US" smtClean="0"/>
+              <a:t>17</a:t>
+            </a:fld>
+            <a:endParaRPr lang="en-US"/>
+          </a:p>
+        </p:txBody>
+      </p:sp>
+    </p:spTree>
+    <p:extLst>
+      <p:ext uri="{BB962C8B-B14F-4D97-AF65-F5344CB8AC3E}">
+        <p14:creationId xmlns:p14="http://schemas.microsoft.com/office/powerpoint/2010/main" val="1819986718"/>
+      </p:ext>
+    </p:extLst>
+  </p:cSld>
+  <p:clrMapOvr>
+    <a:masterClrMapping/>
+  </p:clrMapOvr>
+</p:notes>
 </file>
 
 <file path=ppt/slideLayouts/slideLayout1.xml><?xml version="1.0" encoding="utf-8"?>
@@ -348,7 +784,7 @@
           <a:p>
             <a:fld id="{241EB5C9-1307-BA42-ABA2-0BC069CD8E7F}" type="datetimeFigureOut">
               <a:rPr lang="en-US" smtClean="0"/>
-              <a:t>9/16/2025</a:t>
+              <a:t>9/14/2026</a:t>
             </a:fld>
             <a:endParaRPr lang="en-US"/>
           </a:p>
@@ -516,7 +952,7 @@
           <a:p>
             <a:fld id="{241EB5C9-1307-BA42-ABA2-0BC069CD8E7F}" type="datetimeFigureOut">
               <a:rPr lang="en-US" smtClean="0"/>
-              <a:t>9/16/2025</a:t>
+              <a:t>9/14/2026</a:t>
             </a:fld>
             <a:endParaRPr lang="en-US"/>
           </a:p>
@@ -694,7 +1130,7 @@
           <a:p>
             <a:fld id="{241EB5C9-1307-BA42-ABA2-0BC069CD8E7F}" type="datetimeFigureOut">
               <a:rPr lang="en-US" smtClean="0"/>
-              <a:t>9/16/2025</a:t>
+              <a:t>9/14/2026</a:t>
             </a:fld>
             <a:endParaRPr lang="en-US"/>
           </a:p>
@@ -862,7 +1298,7 @@
           <a:p>
             <a:fld id="{241EB5C9-1307-BA42-ABA2-0BC069CD8E7F}" type="datetimeFigureOut">
               <a:rPr lang="en-US" smtClean="0"/>
-              <a:t>9/16/2025</a:t>
+              <a:t>9/14/2026</a:t>
             </a:fld>
             <a:endParaRPr lang="en-US"/>
           </a:p>
@@ -1107,7 +1543,7 @@
           <a:p>
             <a:fld id="{241EB5C9-1307-BA42-ABA2-0BC069CD8E7F}" type="datetimeFigureOut">
               <a:rPr lang="en-US" smtClean="0"/>
-              <a:t>9/16/2025</a:t>
+              <a:t>9/14/2026</a:t>
             </a:fld>
             <a:endParaRPr lang="en-US"/>
           </a:p>
@@ -1392,7 +1828,7 @@
           <a:p>
             <a:fld id="{241EB5C9-1307-BA42-ABA2-0BC069CD8E7F}" type="datetimeFigureOut">
               <a:rPr lang="en-US" smtClean="0"/>
-              <a:t>9/16/2025</a:t>
+              <a:t>9/14/2026</a:t>
             </a:fld>
             <a:endParaRPr lang="en-US"/>
           </a:p>
@@ -1811,7 +2247,7 @@
           <a:p>
             <a:fld id="{241EB5C9-1307-BA42-ABA2-0BC069CD8E7F}" type="datetimeFigureOut">
               <a:rPr lang="en-US" smtClean="0"/>
-              <a:t>9/16/2025</a:t>
+              <a:t>9/14/2026</a:t>
             </a:fld>
             <a:endParaRPr lang="en-US"/>
           </a:p>
@@ -1928,7 +2364,7 @@
           <a:p>
             <a:fld id="{241EB5C9-1307-BA42-ABA2-0BC069CD8E7F}" type="datetimeFigureOut">
               <a:rPr lang="en-US" smtClean="0"/>
-              <a:t>9/16/2025</a:t>
+              <a:t>9/14/2026</a:t>
             </a:fld>
             <a:endParaRPr lang="en-US"/>
           </a:p>
@@ -2023,7 +2459,7 @@
           <a:p>
             <a:fld id="{241EB5C9-1307-BA42-ABA2-0BC069CD8E7F}" type="datetimeFigureOut">
               <a:rPr lang="en-US" smtClean="0"/>
-              <a:t>9/16/2025</a:t>
+              <a:t>9/14/2026</a:t>
             </a:fld>
             <a:endParaRPr lang="en-US"/>
           </a:p>
@@ -2298,7 +2734,7 @@
           <a:p>
             <a:fld id="{241EB5C9-1307-BA42-ABA2-0BC069CD8E7F}" type="datetimeFigureOut">
               <a:rPr lang="en-US" smtClean="0"/>
-              <a:t>9/16/2025</a:t>
+              <a:t>9/14/2026</a:t>
             </a:fld>
             <a:endParaRPr lang="en-US"/>
           </a:p>
@@ -2550,7 +2986,7 @@
           <a:p>
             <a:fld id="{241EB5C9-1307-BA42-ABA2-0BC069CD8E7F}" type="datetimeFigureOut">
               <a:rPr lang="en-US" smtClean="0"/>
-              <a:t>9/16/2025</a:t>
+              <a:t>9/14/2026</a:t>
             </a:fld>
             <a:endParaRPr lang="en-US"/>
           </a:p>
@@ -2761,7 +3197,7 @@
           <a:p>
             <a:fld id="{241EB5C9-1307-BA42-ABA2-0BC069CD8E7F}" type="datetimeFigureOut">
               <a:rPr lang="en-US" smtClean="0"/>
-              <a:t>9/16/2025</a:t>
+              <a:t>9/14/2026</a:t>
             </a:fld>
             <a:endParaRPr lang="en-US"/>
           </a:p>
@@ -3406,7 +3842,7 @@
                     <m:d>
                       <m:dPr>
                         <m:ctrlPr>
-                          <a:rPr i="1">
+                          <a:rPr>
                             <a:latin typeface="Cambria Math" panose="02040503050406030204" pitchFamily="18" charset="0"/>
                           </a:rPr>
                         </m:ctrlPr>
@@ -3474,7 +3910,7 @@
                     <m:oMathParaPr>
                       <m:jc m:val="center"/>
                     </m:oMathParaPr>
-                    <m:oMath xmlns:m="http://schemas.openxmlformats.org/officeDocument/2006/math">
+                    <m:oMath>
                       <m:r>
                         <m:rPr>
                           <m:sty m:val="p"/>
@@ -3489,7 +3925,7 @@
                           <m:begChr m:val="["/>
                           <m:endChr m:val="]"/>
                           <m:ctrlPr>
-                            <a:rPr i="1">
+                            <a:rPr>
                               <a:latin typeface="Cambria Math" panose="02040503050406030204" pitchFamily="18" charset="0"/>
                             </a:rPr>
                           </m:ctrlPr>
@@ -3513,7 +3949,7 @@
                         <m:naryPr>
                           <m:limLoc m:val="subSup"/>
                           <m:ctrlPr>
-                            <a:rPr i="1">
+                            <a:rPr>
                               <a:latin typeface="Cambria Math" panose="02040503050406030204" pitchFamily="18" charset="0"/>
                             </a:rPr>
                           </m:ctrlPr>
@@ -3558,7 +3994,7 @@
                       <m:d>
                         <m:dPr>
                           <m:ctrlPr>
-                            <a:rPr i="1">
+                            <a:rPr>
                               <a:latin typeface="Cambria Math" panose="02040503050406030204" pitchFamily="18" charset="0"/>
                             </a:rPr>
                           </m:ctrlPr>
@@ -3774,31 +4210,7 @@
                       <a:rPr lang="en-US">
                         <a:latin typeface="Cambria Math" panose="02040503050406030204" pitchFamily="18" charset="0"/>
                       </a:rPr>
-                      <m:t>{</m:t>
-                    </m:r>
-                    <m:r>
-                      <a:rPr lang="en-US">
-                        <a:latin typeface="Cambria Math" panose="02040503050406030204" pitchFamily="18" charset="0"/>
-                      </a:rPr>
-                      <m:t>0</m:t>
-                    </m:r>
-                    <m:r>
-                      <a:rPr lang="en-US">
-                        <a:latin typeface="Cambria Math" panose="02040503050406030204" pitchFamily="18" charset="0"/>
-                      </a:rPr>
-                      <m:t>,</m:t>
-                    </m:r>
-                    <m:r>
-                      <a:rPr lang="en-US">
-                        <a:latin typeface="Cambria Math" panose="02040503050406030204" pitchFamily="18" charset="0"/>
-                      </a:rPr>
-                      <m:t>1</m:t>
-                    </m:r>
-                    <m:r>
-                      <a:rPr lang="en-US">
-                        <a:latin typeface="Cambria Math" panose="02040503050406030204" pitchFamily="18" charset="0"/>
-                      </a:rPr>
-                      <m:t>}</m:t>
+                      <m:t>{0,1}</m:t>
                     </m:r>
                   </m:oMath>
                 </a14:m>
@@ -3865,10 +4277,7 @@
                 </a:pPr>
                 <a14:m>
                   <m:oMathPara xmlns:m="http://schemas.openxmlformats.org/officeDocument/2006/math">
-                    <m:oMathParaPr>
-                      <m:jc m:val="centerGroup"/>
-                    </m:oMathParaPr>
-                    <m:oMath xmlns:m="http://schemas.openxmlformats.org/officeDocument/2006/math">
+                    <m:oMath>
                       <m:r>
                         <a:rPr lang="en-US" b="0" i="1" smtClean="0">
                           <a:latin typeface="Cambria Math" panose="02040503050406030204" pitchFamily="18" charset="0"/>
@@ -3952,13 +4361,7 @@
                                 <a:rPr lang="en-US" b="0" i="1" smtClean="0">
                                   <a:latin typeface="Cambria Math" panose="02040503050406030204" pitchFamily="18" charset="0"/>
                                 </a:rPr>
-                                <m:t>=</m:t>
-                              </m:r>
-                              <m:r>
-                                <a:rPr lang="en-US" b="0" i="1" smtClean="0">
-                                  <a:latin typeface="Cambria Math" panose="02040503050406030204" pitchFamily="18" charset="0"/>
-                                </a:rPr>
-                                <m:t>1</m:t>
+                                <m:t>=1</m:t>
                               </m:r>
                             </m:e>
                             <m:e>
@@ -3966,13 +4369,7 @@
                                 <a:rPr lang="en-US" b="0" i="1" smtClean="0">
                                   <a:latin typeface="Cambria Math" panose="02040503050406030204" pitchFamily="18" charset="0"/>
                                 </a:rPr>
-                                <m:t>1</m:t>
-                              </m:r>
-                              <m:r>
-                                <a:rPr lang="en-US" b="0" i="1" smtClean="0">
-                                  <a:latin typeface="Cambria Math" panose="02040503050406030204" pitchFamily="18" charset="0"/>
-                                </a:rPr>
-                                <m:t>−</m:t>
+                                <m:t>1−</m:t>
                               </m:r>
                               <m:r>
                                 <a:rPr lang="en-US" b="0" i="1" smtClean="0">
@@ -3996,13 +4393,7 @@
                                 <a:rPr lang="en-US" b="0" i="1" smtClean="0">
                                   <a:latin typeface="Cambria Math" panose="02040503050406030204" pitchFamily="18" charset="0"/>
                                 </a:rPr>
-                                <m:t>=</m:t>
-                              </m:r>
-                              <m:r>
-                                <a:rPr lang="en-US" b="0" i="1" smtClean="0">
-                                  <a:latin typeface="Cambria Math" panose="02040503050406030204" pitchFamily="18" charset="0"/>
-                                </a:rPr>
-                                <m:t>0</m:t>
+                                <m:t>=0</m:t>
                               </m:r>
                             </m:e>
                           </m:eqArr>
@@ -4028,10 +4419,7 @@
                 </a:pPr>
                 <a14:m>
                   <m:oMathPara xmlns:m="http://schemas.openxmlformats.org/officeDocument/2006/math">
-                    <m:oMathParaPr>
-                      <m:jc m:val="centerGroup"/>
-                    </m:oMathParaPr>
-                    <m:oMath xmlns:m="http://schemas.openxmlformats.org/officeDocument/2006/math">
+                    <m:oMath>
                       <m:r>
                         <a:rPr lang="en-US" i="1">
                           <a:latin typeface="Cambria Math" panose="02040503050406030204" pitchFamily="18" charset="0"/>
@@ -4076,7 +4464,7 @@
                       <m:sSup>
                         <m:sSupPr>
                           <m:ctrlPr>
-                            <a:rPr lang="en-US" i="1" smtClean="0">
+                            <a:rPr lang="en-US" b="0" i="1" smtClean="0">
                               <a:latin typeface="Cambria Math" panose="02040503050406030204" pitchFamily="18" charset="0"/>
                             </a:rPr>
                           </m:ctrlPr>
@@ -4110,7 +4498,7 @@
                           <m:d>
                             <m:dPr>
                               <m:ctrlPr>
-                                <a:rPr lang="en-US" i="1" smtClean="0">
+                                <a:rPr lang="en-US" b="0" i="1" smtClean="0">
                                   <a:latin typeface="Cambria Math" panose="02040503050406030204" pitchFamily="18" charset="0"/>
                                 </a:rPr>
                               </m:ctrlPr>
@@ -4120,13 +4508,7 @@
                                 <a:rPr lang="en-US" b="0" i="1" smtClean="0">
                                   <a:latin typeface="Cambria Math" panose="02040503050406030204" pitchFamily="18" charset="0"/>
                                 </a:rPr>
-                                <m:t>1</m:t>
-                              </m:r>
-                              <m:r>
-                                <a:rPr lang="en-US" b="0" i="1" smtClean="0">
-                                  <a:latin typeface="Cambria Math" panose="02040503050406030204" pitchFamily="18" charset="0"/>
-                                </a:rPr>
-                                <m:t>−</m:t>
+                                <m:t>1−</m:t>
                               </m:r>
                               <m:r>
                                 <a:rPr lang="en-US" b="0" i="1" smtClean="0">
@@ -4142,13 +4524,7 @@
                             <a:rPr lang="en-US" b="0" i="1" smtClean="0">
                               <a:latin typeface="Cambria Math" panose="02040503050406030204" pitchFamily="18" charset="0"/>
                             </a:rPr>
-                            <m:t>1</m:t>
-                          </m:r>
-                          <m:r>
-                            <a:rPr lang="en-US" b="0" i="1" smtClean="0">
-                              <a:latin typeface="Cambria Math" panose="02040503050406030204" pitchFamily="18" charset="0"/>
-                            </a:rPr>
-                            <m:t>−</m:t>
+                            <m:t>1−</m:t>
                           </m:r>
                           <m:r>
                             <a:rPr lang="en-US" b="0" i="1" smtClean="0">
@@ -4194,21 +4570,7 @@
                               <a:latin typeface="Cambria Math" panose="02040503050406030204" pitchFamily="18" charset="0"/>
                               <a:ea typeface="Cambria Math" panose="02040503050406030204" pitchFamily="18" charset="0"/>
                             </a:rPr>
-                            <m:t>0</m:t>
-                          </m:r>
-                          <m:r>
-                            <a:rPr lang="en-US" b="0" i="1" smtClean="0">
-                              <a:latin typeface="Cambria Math" panose="02040503050406030204" pitchFamily="18" charset="0"/>
-                              <a:ea typeface="Cambria Math" panose="02040503050406030204" pitchFamily="18" charset="0"/>
-                            </a:rPr>
-                            <m:t>,</m:t>
-                          </m:r>
-                          <m:r>
-                            <a:rPr lang="en-US" b="0" i="1" smtClean="0">
-                              <a:latin typeface="Cambria Math" panose="02040503050406030204" pitchFamily="18" charset="0"/>
-                              <a:ea typeface="Cambria Math" panose="02040503050406030204" pitchFamily="18" charset="0"/>
-                            </a:rPr>
-                            <m:t>1</m:t>
+                            <m:t>0,1</m:t>
                           </m:r>
                         </m:e>
                       </m:d>
@@ -4390,7 +4752,7 @@
                     <m:oMathParaPr>
                       <m:jc m:val="center"/>
                     </m:oMathParaPr>
-                    <m:oMath xmlns:m="http://schemas.openxmlformats.org/officeDocument/2006/math">
+                    <m:oMath>
                       <m:r>
                         <a:rPr lang="en-US">
                           <a:latin typeface="Cambria Math" panose="02040503050406030204" pitchFamily="18" charset="0"/>
@@ -4400,7 +4762,7 @@
                       <m:d>
                         <m:dPr>
                           <m:ctrlPr>
-                            <a:rPr lang="ar-AE" i="1">
+                            <a:rPr lang="ar-AE">
                               <a:latin typeface="Cambria Math" panose="02040503050406030204" pitchFamily="18" charset="0"/>
                             </a:rPr>
                           </m:ctrlPr>
@@ -4457,7 +4819,7 @@
                             <m:fPr>
                               <m:type m:val="noBar"/>
                               <m:ctrlPr>
-                                <a:rPr lang="ar-AE" i="1">
+                                <a:rPr lang="ar-AE">
                                   <a:latin typeface="Cambria Math" panose="02040503050406030204" pitchFamily="18" charset="0"/>
                                 </a:rPr>
                               </m:ctrlPr>
@@ -4484,7 +4846,7 @@
                       <m:sSup>
                         <m:sSupPr>
                           <m:ctrlPr>
-                            <a:rPr lang="ar-AE" i="1">
+                            <a:rPr lang="ar-AE">
                               <a:latin typeface="Cambria Math" panose="02040503050406030204" pitchFamily="18" charset="0"/>
                             </a:rPr>
                           </m:ctrlPr>
@@ -4518,7 +4880,7 @@
                           <m:d>
                             <m:dPr>
                               <m:ctrlPr>
-                                <a:rPr lang="ar-AE" i="1">
+                                <a:rPr lang="ar-AE">
                                   <a:latin typeface="Cambria Math" panose="02040503050406030204" pitchFamily="18" charset="0"/>
                                 </a:rPr>
                               </m:ctrlPr>
@@ -4528,13 +4890,7 @@
                                 <a:rPr lang="ar-AE">
                                   <a:latin typeface="Cambria Math" panose="02040503050406030204" pitchFamily="18" charset="0"/>
                                 </a:rPr>
-                                <m:t>1</m:t>
-                              </m:r>
-                              <m:r>
-                                <a:rPr lang="ar-AE">
-                                  <a:latin typeface="Cambria Math" panose="02040503050406030204" pitchFamily="18" charset="0"/>
-                                </a:rPr>
-                                <m:t>−</m:t>
+                                <m:t>1−</m:t>
                               </m:r>
                               <m:r>
                                 <a:rPr lang="ar-AE">
@@ -4549,7 +4905,7 @@
                           <m:d>
                             <m:dPr>
                               <m:ctrlPr>
-                                <a:rPr lang="ar-AE" i="1">
+                                <a:rPr lang="ar-AE">
                                   <a:latin typeface="Cambria Math" panose="02040503050406030204" pitchFamily="18" charset="0"/>
                                 </a:rPr>
                               </m:ctrlPr>
@@ -4601,10 +4957,7 @@
                 </a:pPr>
                 <a14:m>
                   <m:oMathPara xmlns:m="http://schemas.openxmlformats.org/officeDocument/2006/math">
-                    <m:oMathParaPr>
-                      <m:jc m:val="centerGroup"/>
-                    </m:oMathParaPr>
-                    <m:oMath xmlns:m="http://schemas.openxmlformats.org/officeDocument/2006/math">
+                    <m:oMath>
                       <m:d>
                         <m:dPr>
                           <m:ctrlPr>
@@ -4618,7 +4971,7 @@
                             <m:fPr>
                               <m:type m:val="noBar"/>
                               <m:ctrlPr>
-                                <a:rPr lang="ar-AE" i="1">
+                                <a:rPr lang="ar-AE">
                                   <a:latin typeface="Cambria Math" panose="02040503050406030204" pitchFamily="18" charset="0"/>
                                 </a:rPr>
                               </m:ctrlPr>
@@ -4777,7 +5130,7 @@
                     <m:oMathParaPr>
                       <m:jc m:val="center"/>
                     </m:oMathParaPr>
-                    <m:oMath xmlns:m="http://schemas.openxmlformats.org/officeDocument/2006/math">
+                    <m:oMath>
                       <m:r>
                         <a:rPr lang="en-US">
                           <a:latin typeface="Cambria Math" panose="02040503050406030204" pitchFamily="18" charset="0"/>
@@ -5086,7 +5439,7 @@
                         <m:sSub>
                           <m:sSubPr>
                             <m:ctrlPr>
-                              <a:rPr i="1">
+                              <a:rPr>
                                 <a:latin typeface="Cambria Math" panose="02040503050406030204" pitchFamily="18" charset="0"/>
                               </a:rPr>
                             </m:ctrlPr>
@@ -5117,7 +5470,7 @@
                         <m:sSub>
                           <m:sSubPr>
                             <m:ctrlPr>
-                              <a:rPr i="1">
+                              <a:rPr>
                                 <a:latin typeface="Cambria Math" panose="02040503050406030204" pitchFamily="18" charset="0"/>
                               </a:rPr>
                             </m:ctrlPr>
@@ -5148,7 +5501,7 @@
                         <m:sSub>
                           <m:sSubPr>
                             <m:ctrlPr>
-                              <a:rPr i="1">
+                              <a:rPr>
                                 <a:latin typeface="Cambria Math" panose="02040503050406030204" pitchFamily="18" charset="0"/>
                               </a:rPr>
                             </m:ctrlPr>
@@ -5212,11 +5565,11 @@
                     <m:oMathParaPr>
                       <m:jc m:val="center"/>
                     </m:oMathParaPr>
-                    <m:oMath xmlns:m="http://schemas.openxmlformats.org/officeDocument/2006/math">
+                    <m:oMath>
                       <m:sSub>
                         <m:sSubPr>
                           <m:ctrlPr>
-                            <a:rPr i="1">
+                            <a:rPr>
                               <a:latin typeface="Cambria Math" panose="02040503050406030204" pitchFamily="18" charset="0"/>
                             </a:rPr>
                           </m:ctrlPr>
@@ -5247,7 +5600,7 @@
                       <m:d>
                         <m:dPr>
                           <m:ctrlPr>
-                            <a:rPr i="1">
+                            <a:rPr>
                               <a:latin typeface="Cambria Math" panose="02040503050406030204" pitchFamily="18" charset="0"/>
                             </a:rPr>
                           </m:ctrlPr>
@@ -5257,43 +5610,7 @@
                             <a:rPr>
                               <a:latin typeface="Cambria Math" panose="02040503050406030204" pitchFamily="18" charset="0"/>
                             </a:rPr>
-                            <m:t>0</m:t>
-                          </m:r>
-                          <m:r>
-                            <a:rPr>
-                              <a:latin typeface="Cambria Math" panose="02040503050406030204" pitchFamily="18" charset="0"/>
-                            </a:rPr>
-                            <m:t>,</m:t>
-                          </m:r>
-                          <m:r>
-                            <a:rPr>
-                              <a:latin typeface="Cambria Math" panose="02040503050406030204" pitchFamily="18" charset="0"/>
-                            </a:rPr>
-                            <m:t>0</m:t>
-                          </m:r>
-                          <m:r>
-                            <a:rPr>
-                              <a:latin typeface="Cambria Math" panose="02040503050406030204" pitchFamily="18" charset="0"/>
-                            </a:rPr>
-                            <m:t>,…,</m:t>
-                          </m:r>
-                          <m:r>
-                            <a:rPr>
-                              <a:latin typeface="Cambria Math" panose="02040503050406030204" pitchFamily="18" charset="0"/>
-                            </a:rPr>
-                            <m:t>1</m:t>
-                          </m:r>
-                          <m:r>
-                            <a:rPr>
-                              <a:latin typeface="Cambria Math" panose="02040503050406030204" pitchFamily="18" charset="0"/>
-                            </a:rPr>
-                            <m:t>,…,</m:t>
-                          </m:r>
-                          <m:r>
-                            <a:rPr>
-                              <a:latin typeface="Cambria Math" panose="02040503050406030204" pitchFamily="18" charset="0"/>
-                            </a:rPr>
-                            <m:t>0</m:t>
+                            <m:t>0,0,…,1,…,0</m:t>
                           </m:r>
                         </m:e>
                       </m:d>
@@ -5325,7 +5642,7 @@
                     <m:sSub>
                       <m:sSubPr>
                         <m:ctrlPr>
-                          <a:rPr i="1">
+                          <a:rPr>
                             <a:latin typeface="Cambria Math" panose="02040503050406030204" pitchFamily="18" charset="0"/>
                           </a:rPr>
                         </m:ctrlPr>
@@ -5547,7 +5864,7 @@
                         <m:sSub>
                           <m:sSubPr>
                             <m:ctrlPr>
-                              <a:rPr lang="ar-AE" i="1">
+                              <a:rPr lang="ar-AE">
                                 <a:latin typeface="Cambria Math" panose="02040503050406030204" pitchFamily="18" charset="0"/>
                               </a:rPr>
                             </m:ctrlPr>
@@ -5578,7 +5895,7 @@
                         <m:sSub>
                           <m:sSubPr>
                             <m:ctrlPr>
-                              <a:rPr lang="ar-AE" i="1">
+                              <a:rPr lang="ar-AE">
                                 <a:latin typeface="Cambria Math" panose="02040503050406030204" pitchFamily="18" charset="0"/>
                               </a:rPr>
                             </m:ctrlPr>
@@ -5609,7 +5926,7 @@
                         <m:sSub>
                           <m:sSubPr>
                             <m:ctrlPr>
-                              <a:rPr lang="ar-AE" i="1">
+                              <a:rPr lang="ar-AE">
                                 <a:latin typeface="Cambria Math" panose="02040503050406030204" pitchFamily="18" charset="0"/>
                               </a:rPr>
                             </m:ctrlPr>
@@ -5677,11 +5994,11 @@
                     <m:oMathParaPr>
                       <m:jc m:val="center"/>
                     </m:oMathParaPr>
-                    <m:oMath xmlns:m="http://schemas.openxmlformats.org/officeDocument/2006/math">
+                    <m:oMath>
                       <m:sSub>
                         <m:sSubPr>
                           <m:ctrlPr>
-                            <a:rPr lang="ar-AE" i="1">
+                            <a:rPr lang="ar-AE">
                               <a:latin typeface="Cambria Math" panose="02040503050406030204" pitchFamily="18" charset="0"/>
                             </a:rPr>
                           </m:ctrlPr>
@@ -5712,7 +6029,7 @@
                       <m:d>
                         <m:dPr>
                           <m:ctrlPr>
-                            <a:rPr lang="ar-AE" i="1">
+                            <a:rPr lang="ar-AE">
                               <a:latin typeface="Cambria Math" panose="02040503050406030204" pitchFamily="18" charset="0"/>
                             </a:rPr>
                           </m:ctrlPr>
@@ -5722,43 +6039,7 @@
                             <a:rPr lang="ar-AE">
                               <a:latin typeface="Cambria Math" panose="02040503050406030204" pitchFamily="18" charset="0"/>
                             </a:rPr>
-                            <m:t>0</m:t>
-                          </m:r>
-                          <m:r>
-                            <a:rPr lang="ar-AE">
-                              <a:latin typeface="Cambria Math" panose="02040503050406030204" pitchFamily="18" charset="0"/>
-                            </a:rPr>
-                            <m:t>,</m:t>
-                          </m:r>
-                          <m:r>
-                            <a:rPr lang="ar-AE">
-                              <a:latin typeface="Cambria Math" panose="02040503050406030204" pitchFamily="18" charset="0"/>
-                            </a:rPr>
-                            <m:t>0</m:t>
-                          </m:r>
-                          <m:r>
-                            <a:rPr lang="ar-AE">
-                              <a:latin typeface="Cambria Math" panose="02040503050406030204" pitchFamily="18" charset="0"/>
-                            </a:rPr>
-                            <m:t>,…,</m:t>
-                          </m:r>
-                          <m:r>
-                            <a:rPr lang="ar-AE">
-                              <a:latin typeface="Cambria Math" panose="02040503050406030204" pitchFamily="18" charset="0"/>
-                            </a:rPr>
-                            <m:t>1</m:t>
-                          </m:r>
-                          <m:r>
-                            <a:rPr lang="ar-AE">
-                              <a:latin typeface="Cambria Math" panose="02040503050406030204" pitchFamily="18" charset="0"/>
-                            </a:rPr>
-                            <m:t>,…,</m:t>
-                          </m:r>
-                          <m:r>
-                            <a:rPr lang="ar-AE">
-                              <a:latin typeface="Cambria Math" panose="02040503050406030204" pitchFamily="18" charset="0"/>
-                            </a:rPr>
-                            <m:t>0</m:t>
+                            <m:t>0,0,…,1,…,0</m:t>
                           </m:r>
                         </m:e>
                       </m:d>
@@ -5792,7 +6073,7 @@
                     <m:sSub>
                       <m:sSubPr>
                         <m:ctrlPr>
-                          <a:rPr lang="ar-AE" i="1">
+                          <a:rPr lang="ar-AE">
                             <a:latin typeface="Cambria Math" panose="02040503050406030204" pitchFamily="18" charset="0"/>
                           </a:rPr>
                         </m:ctrlPr>
@@ -5870,10 +6151,7 @@
                 </a:pPr>
                 <a14:m>
                   <m:oMathPara xmlns:m="http://schemas.openxmlformats.org/officeDocument/2006/math">
-                    <m:oMathParaPr>
-                      <m:jc m:val="centerGroup"/>
-                    </m:oMathParaPr>
-                    <m:oMath xmlns:m="http://schemas.openxmlformats.org/officeDocument/2006/math">
+                    <m:oMath>
                       <m:r>
                         <m:rPr>
                           <m:sty m:val="p"/>
@@ -6103,14 +6381,7 @@
                           <a:latin typeface="Cambria Math" panose="02040503050406030204" pitchFamily="18" charset="0"/>
                           <a:ea typeface="Cambria Math" panose="02040503050406030204" pitchFamily="18" charset="0"/>
                         </a:rPr>
-                        <m:t>=</m:t>
-                      </m:r>
-                      <m:r>
-                        <a:rPr lang="en-US" b="0" i="1" smtClean="0">
-                          <a:latin typeface="Cambria Math" panose="02040503050406030204" pitchFamily="18" charset="0"/>
-                          <a:ea typeface="Cambria Math" panose="02040503050406030204" pitchFamily="18" charset="0"/>
-                        </a:rPr>
-                        <m:t>1</m:t>
+                        <m:t>=1</m:t>
                       </m:r>
                     </m:oMath>
                   </m:oMathPara>
@@ -6254,7 +6525,7 @@
                     <m:oMathParaPr>
                       <m:jc m:val="center"/>
                     </m:oMathParaPr>
-                    <m:oMath xmlns:m="http://schemas.openxmlformats.org/officeDocument/2006/math">
+                    <m:oMath>
                       <m:r>
                         <a:rPr>
                           <a:latin typeface="Cambria Math" panose="02040503050406030204" pitchFamily="18" charset="0"/>
@@ -6273,7 +6544,7 @@
                           <m:sSub>
                             <m:sSubPr>
                               <m:ctrlPr>
-                                <a:rPr i="1">
+                                <a:rPr>
                                   <a:latin typeface="Cambria Math" panose="02040503050406030204" pitchFamily="18" charset="0"/>
                                 </a:rPr>
                               </m:ctrlPr>
@@ -6318,7 +6589,7 @@
                       <m:sSub>
                         <m:sSubPr>
                           <m:ctrlPr>
-                            <a:rPr i="1">
+                            <a:rPr>
                               <a:latin typeface="Cambria Math" panose="02040503050406030204" pitchFamily="18" charset="0"/>
                             </a:rPr>
                           </m:ctrlPr>
@@ -6385,7 +6656,7 @@
                         <m:sSub>
                           <m:sSubPr>
                             <m:ctrlPr>
-                              <a:rPr i="1">
+                              <a:rPr>
                                 <a:latin typeface="Cambria Math" panose="02040503050406030204" pitchFamily="18" charset="0"/>
                               </a:rPr>
                             </m:ctrlPr>
@@ -6416,7 +6687,7 @@
                         <m:sSub>
                           <m:sSubPr>
                             <m:ctrlPr>
-                              <a:rPr i="1">
+                              <a:rPr>
                                 <a:latin typeface="Cambria Math" panose="02040503050406030204" pitchFamily="18" charset="0"/>
                               </a:rPr>
                             </m:ctrlPr>
@@ -6447,7 +6718,7 @@
                         <m:sSub>
                           <m:sSubPr>
                             <m:ctrlPr>
-                              <a:rPr i="1">
+                              <a:rPr>
                                 <a:latin typeface="Cambria Math" panose="02040503050406030204" pitchFamily="18" charset="0"/>
                               </a:rPr>
                             </m:ctrlPr>
@@ -6487,11 +6758,11 @@
                     <m:oMathParaPr>
                       <m:jc m:val="center"/>
                     </m:oMathParaPr>
-                    <m:oMath xmlns:m="http://schemas.openxmlformats.org/officeDocument/2006/math">
+                    <m:oMath>
                       <m:sSub>
                         <m:sSubPr>
                           <m:ctrlPr>
-                            <a:rPr i="1">
+                            <a:rPr>
                               <a:latin typeface="Cambria Math" panose="02040503050406030204" pitchFamily="18" charset="0"/>
                             </a:rPr>
                           </m:ctrlPr>
@@ -6522,7 +6793,7 @@
                       <m:f>
                         <m:fPr>
                           <m:ctrlPr>
-                            <a:rPr i="1">
+                            <a:rPr>
                               <a:latin typeface="Cambria Math" panose="02040503050406030204" pitchFamily="18" charset="0"/>
                             </a:rPr>
                           </m:ctrlPr>
@@ -6537,7 +6808,7 @@
                           <m:sSub>
                             <m:sSubPr>
                               <m:ctrlPr>
-                                <a:rPr i="1">
+                                <a:rPr>
                                   <a:latin typeface="Cambria Math" panose="02040503050406030204" pitchFamily="18" charset="0"/>
                                 </a:rPr>
                               </m:ctrlPr>
@@ -6593,7 +6864,7 @@
                     <m:sSub>
                       <m:sSubPr>
                         <m:ctrlPr>
-                          <a:rPr i="1">
+                          <a:rPr>
                             <a:latin typeface="Cambria Math" panose="02040503050406030204" pitchFamily="18" charset="0"/>
                           </a:rPr>
                         </m:ctrlPr>
@@ -6626,7 +6897,7 @@
                     <m:sSub>
                       <m:sSubPr>
                         <m:ctrlPr>
-                          <a:rPr i="1">
+                          <a:rPr>
                             <a:latin typeface="Cambria Math" panose="02040503050406030204" pitchFamily="18" charset="0"/>
                           </a:rPr>
                         </m:ctrlPr>
@@ -6684,7 +6955,7 @@
                     <m:sSub>
                       <m:sSubPr>
                         <m:ctrlPr>
-                          <a:rPr i="1">
+                          <a:rPr>
                             <a:latin typeface="Cambria Math" panose="02040503050406030204" pitchFamily="18" charset="0"/>
                           </a:rPr>
                         </m:ctrlPr>
@@ -6736,7 +7007,7 @@
                     <m:oMathParaPr>
                       <m:jc m:val="center"/>
                     </m:oMathParaPr>
-                    <m:oMath xmlns:m="http://schemas.openxmlformats.org/officeDocument/2006/math">
+                    <m:oMath>
                       <m:r>
                         <a:rPr>
                           <a:latin typeface="Cambria Math" panose="02040503050406030204" pitchFamily="18" charset="0"/>
@@ -6746,7 +7017,7 @@
                       <m:sSub>
                         <m:sSubPr>
                           <m:ctrlPr>
-                            <a:rPr i="1">
+                            <a:rPr>
                               <a:latin typeface="Cambria Math" panose="02040503050406030204" pitchFamily="18" charset="0"/>
                             </a:rPr>
                           </m:ctrlPr>
@@ -6777,7 +7048,7 @@
                       <m:sSub>
                         <m:sSubPr>
                           <m:ctrlPr>
-                            <a:rPr i="1">
+                            <a:rPr>
                               <a:latin typeface="Cambria Math" panose="02040503050406030204" pitchFamily="18" charset="0"/>
                             </a:rPr>
                           </m:ctrlPr>
@@ -6918,7 +7189,7 @@
           <p:nvPr/>
         </p:nvPicPr>
         <p:blipFill>
-          <a:blip r:embed="rId2"/>
+          <a:blip r:embed="rId3"/>
           <a:stretch>
             <a:fillRect/>
           </a:stretch>
@@ -6950,7 +7221,7 @@
             <p:spPr>
               <a:xfrm>
                 <a:off x="582592" y="1359234"/>
-                <a:ext cx="4188913" cy="3314049"/>
+                <a:ext cx="4750094" cy="2492990"/>
               </a:xfrm>
               <a:prstGeom prst="rect">
                 <a:avLst/>
@@ -6979,13 +7250,7 @@
                       <a:rPr lang="en-US" sz="2200" b="0" i="1" smtClean="0">
                         <a:latin typeface="Cambria Math" panose="02040503050406030204" pitchFamily="18" charset="0"/>
                       </a:rPr>
-                      <m:t>=</m:t>
-                    </m:r>
-                    <m:r>
-                      <a:rPr lang="en-US" sz="2200" b="0" i="1" smtClean="0">
-                        <a:latin typeface="Cambria Math" panose="02040503050406030204" pitchFamily="18" charset="0"/>
-                      </a:rPr>
-                      <m:t>3</m:t>
+                      <m:t>=3</m:t>
                     </m:r>
                   </m:oMath>
                 </a14:m>
@@ -7019,14 +7284,20 @@
                 </a:pPr>
                 <a:r>
                   <a:rPr lang="en-US" sz="2200" dirty="0"/>
-                  <a:t>The expected outcomes are </a:t>
-                </a:r>
+                  <a:t>The expected outcomes are</a:t>
+                </a:r>
+              </a:p>
+              <a:p>
+                <a:pPr marL="285750" indent="-285750">
+                  <a:buFont typeface="Arial" panose="020B0604020202020204" pitchFamily="34" charset="0"/>
+                  <a:buChar char="•"/>
+                </a:pPr>
                 <a14:m>
                   <m:oMath xmlns:m="http://schemas.openxmlformats.org/officeDocument/2006/math">
                     <m:d>
                       <m:dPr>
                         <m:ctrlPr>
-                          <a:rPr lang="el-GR" sz="2800" b="0" i="1" smtClean="0">
+                          <a:rPr lang="el-GR" sz="2400" i="1">
                             <a:latin typeface="Cambria Math" panose="02040503050406030204" pitchFamily="18" charset="0"/>
                             <a:ea typeface="Cambria Math" panose="02040503050406030204" pitchFamily="18" charset="0"/>
                           </a:rPr>
@@ -7036,7 +7307,7 @@
                         <m:sSub>
                           <m:sSubPr>
                             <m:ctrlPr>
-                              <a:rPr lang="el-GR" sz="2800" i="1">
+                              <a:rPr lang="en-US" sz="2400" i="1">
                                 <a:latin typeface="Cambria Math" panose="02040503050406030204" pitchFamily="18" charset="0"/>
                                 <a:ea typeface="Cambria Math" panose="02040503050406030204" pitchFamily="18" charset="0"/>
                               </a:rPr>
@@ -7044,7 +7315,7 @@
                           </m:sSubPr>
                           <m:e>
                             <m:r>
-                              <a:rPr lang="en-US" sz="2800" i="1">
+                              <a:rPr lang="en-US" sz="2400" i="1">
                                 <a:latin typeface="Cambria Math" panose="02040503050406030204" pitchFamily="18" charset="0"/>
                                 <a:ea typeface="Cambria Math" panose="02040503050406030204" pitchFamily="18" charset="0"/>
                               </a:rPr>
@@ -7053,7 +7324,7 @@
                           </m:e>
                           <m:sub>
                             <m:r>
-                              <a:rPr lang="en-US" sz="2800" i="1">
+                              <a:rPr lang="en-US" sz="2400" i="1">
                                 <a:latin typeface="Cambria Math" panose="02040503050406030204" pitchFamily="18" charset="0"/>
                                 <a:ea typeface="Cambria Math" panose="02040503050406030204" pitchFamily="18" charset="0"/>
                               </a:rPr>
@@ -7062,7 +7333,7 @@
                           </m:sub>
                         </m:sSub>
                         <m:r>
-                          <a:rPr lang="en-US" sz="2800" b="0" i="1" smtClean="0">
+                          <a:rPr lang="en-US" sz="2400" b="0" i="1" smtClean="0">
                             <a:latin typeface="Cambria Math" panose="02040503050406030204" pitchFamily="18" charset="0"/>
                             <a:ea typeface="Cambria Math" panose="02040503050406030204" pitchFamily="18" charset="0"/>
                           </a:rPr>
@@ -7071,7 +7342,7 @@
                         <m:sSub>
                           <m:sSubPr>
                             <m:ctrlPr>
-                              <a:rPr lang="el-GR" sz="2800" b="0" i="1" smtClean="0">
+                              <a:rPr lang="el-GR" sz="2400" b="0" i="1" smtClean="0">
                                 <a:latin typeface="Cambria Math" panose="02040503050406030204" pitchFamily="18" charset="0"/>
                                 <a:ea typeface="Cambria Math" panose="02040503050406030204" pitchFamily="18" charset="0"/>
                               </a:rPr>
@@ -7079,7 +7350,7 @@
                           </m:sSubPr>
                           <m:e>
                             <m:r>
-                              <a:rPr lang="el-GR" sz="2800" b="0" i="1" smtClean="0">
+                              <a:rPr lang="el-GR" sz="2400" b="0" i="1" smtClean="0">
                                 <a:latin typeface="Cambria Math" panose="02040503050406030204" pitchFamily="18" charset="0"/>
                                 <a:ea typeface="Cambria Math" panose="02040503050406030204" pitchFamily="18" charset="0"/>
                               </a:rPr>
@@ -7088,7 +7359,7 @@
                           </m:e>
                           <m:sub>
                             <m:r>
-                              <a:rPr lang="en-US" sz="2800" b="0" i="1" smtClean="0">
+                              <a:rPr lang="en-US" sz="2400" b="0" i="1" smtClean="0">
                                 <a:latin typeface="Cambria Math" panose="02040503050406030204" pitchFamily="18" charset="0"/>
                                 <a:ea typeface="Cambria Math" panose="02040503050406030204" pitchFamily="18" charset="0"/>
                               </a:rPr>
@@ -7097,14 +7368,14 @@
                           </m:sub>
                         </m:sSub>
                         <m:r>
-                          <a:rPr lang="en-US" sz="2800" b="0" i="1" smtClean="0">
+                          <a:rPr lang="en-US" sz="2400" b="0" i="1" smtClean="0">
                             <a:latin typeface="Cambria Math" panose="02040503050406030204" pitchFamily="18" charset="0"/>
                             <a:ea typeface="Cambria Math" panose="02040503050406030204" pitchFamily="18" charset="0"/>
                           </a:rPr>
                           <m:t>𝑁</m:t>
                         </m:r>
                         <m:r>
-                          <a:rPr lang="en-US" sz="2800" b="0" i="1" smtClean="0">
+                          <a:rPr lang="en-US" sz="2400" b="0" i="1" smtClean="0">
                             <a:latin typeface="Cambria Math" panose="02040503050406030204" pitchFamily="18" charset="0"/>
                             <a:ea typeface="Cambria Math" panose="02040503050406030204" pitchFamily="18" charset="0"/>
                           </a:rPr>
@@ -7113,7 +7384,7 @@
                         <m:sSub>
                           <m:sSubPr>
                             <m:ctrlPr>
-                              <a:rPr lang="el-GR" sz="2800" i="1">
+                              <a:rPr lang="el-GR" sz="2400" i="1">
                                 <a:latin typeface="Cambria Math" panose="02040503050406030204" pitchFamily="18" charset="0"/>
                                 <a:ea typeface="Cambria Math" panose="02040503050406030204" pitchFamily="18" charset="0"/>
                               </a:rPr>
@@ -7123,7 +7394,7 @@
                             <m:sSub>
                               <m:sSubPr>
                                 <m:ctrlPr>
-                                  <a:rPr lang="el-GR" sz="2800" i="1">
+                                  <a:rPr lang="en-US" sz="2400" b="0" i="1" smtClean="0">
                                     <a:latin typeface="Cambria Math" panose="02040503050406030204" pitchFamily="18" charset="0"/>
                                     <a:ea typeface="Cambria Math" panose="02040503050406030204" pitchFamily="18" charset="0"/>
                                   </a:rPr>
@@ -7131,7 +7402,14 @@
                               </m:sSubPr>
                               <m:e>
                                 <m:r>
-                                  <a:rPr lang="en-US" sz="2800" i="1">
+                                  <a:rPr lang="en-US" sz="2400" b="0" i="1" smtClean="0">
+                                    <a:latin typeface="Cambria Math" panose="02040503050406030204" pitchFamily="18" charset="0"/>
+                                    <a:ea typeface="Cambria Math" panose="02040503050406030204" pitchFamily="18" charset="0"/>
+                                  </a:rPr>
+                                  <m:t> </m:t>
+                                </m:r>
+                                <m:r>
+                                  <a:rPr lang="en-US" sz="2400" i="1">
                                     <a:latin typeface="Cambria Math" panose="02040503050406030204" pitchFamily="18" charset="0"/>
                                     <a:ea typeface="Cambria Math" panose="02040503050406030204" pitchFamily="18" charset="0"/>
                                   </a:rPr>
@@ -7140,7 +7418,7 @@
                               </m:e>
                               <m:sub>
                                 <m:r>
-                                  <a:rPr lang="en-US" sz="2800" b="0" i="1" smtClean="0">
+                                  <a:rPr lang="en-US" sz="2400" b="0" i="1" smtClean="0">
                                     <a:latin typeface="Cambria Math" panose="02040503050406030204" pitchFamily="18" charset="0"/>
                                     <a:ea typeface="Cambria Math" panose="02040503050406030204" pitchFamily="18" charset="0"/>
                                   </a:rPr>
@@ -7149,14 +7427,14 @@
                               </m:sub>
                             </m:sSub>
                             <m:r>
-                              <a:rPr lang="en-US" sz="2800" b="0" i="1" smtClean="0">
+                              <a:rPr lang="en-US" sz="2400" b="0" i="1" smtClean="0">
                                 <a:latin typeface="Cambria Math" panose="02040503050406030204" pitchFamily="18" charset="0"/>
                                 <a:ea typeface="Cambria Math" panose="02040503050406030204" pitchFamily="18" charset="0"/>
                               </a:rPr>
                               <m:t>=</m:t>
                             </m:r>
                             <m:r>
-                              <a:rPr lang="el-GR" sz="2800" i="1">
+                              <a:rPr lang="el-GR" sz="2400" i="1">
                                 <a:latin typeface="Cambria Math" panose="02040503050406030204" pitchFamily="18" charset="0"/>
                                 <a:ea typeface="Cambria Math" panose="02040503050406030204" pitchFamily="18" charset="0"/>
                               </a:rPr>
@@ -7165,7 +7443,7 @@
                           </m:e>
                           <m:sub>
                             <m:r>
-                              <a:rPr lang="en-US" sz="2800" b="0" i="1" smtClean="0">
+                              <a:rPr lang="en-US" sz="2400" b="0" i="1" smtClean="0">
                                 <a:latin typeface="Cambria Math" panose="02040503050406030204" pitchFamily="18" charset="0"/>
                                 <a:ea typeface="Cambria Math" panose="02040503050406030204" pitchFamily="18" charset="0"/>
                               </a:rPr>
@@ -7174,14 +7452,14 @@
                           </m:sub>
                         </m:sSub>
                         <m:r>
-                          <a:rPr lang="en-US" sz="2800" b="0" i="1" smtClean="0">
+                          <a:rPr lang="en-US" sz="2400" b="0" i="1" smtClean="0">
                             <a:latin typeface="Cambria Math" panose="02040503050406030204" pitchFamily="18" charset="0"/>
                             <a:ea typeface="Cambria Math" panose="02040503050406030204" pitchFamily="18" charset="0"/>
                           </a:rPr>
                           <m:t>𝑁</m:t>
                         </m:r>
                         <m:r>
-                          <a:rPr lang="en-US" sz="2800" b="0" i="1" smtClean="0">
+                          <a:rPr lang="en-US" sz="2400" b="0" i="1" smtClean="0">
                             <a:latin typeface="Cambria Math" panose="02040503050406030204" pitchFamily="18" charset="0"/>
                             <a:ea typeface="Cambria Math" panose="02040503050406030204" pitchFamily="18" charset="0"/>
                           </a:rPr>
@@ -7190,7 +7468,7 @@
                         <m:sSub>
                           <m:sSubPr>
                             <m:ctrlPr>
-                              <a:rPr lang="el-GR" sz="2800" i="1">
+                              <a:rPr lang="en-US" sz="2400" b="0" i="1" smtClean="0">
                                 <a:latin typeface="Cambria Math" panose="02040503050406030204" pitchFamily="18" charset="0"/>
                                 <a:ea typeface="Cambria Math" panose="02040503050406030204" pitchFamily="18" charset="0"/>
                               </a:rPr>
@@ -7198,14 +7476,14 @@
                           </m:sSubPr>
                           <m:e>
                             <m:r>
-                              <a:rPr lang="en-US" sz="2800" b="0" i="1" smtClean="0">
+                              <a:rPr lang="en-US" sz="2400" b="0" i="1" smtClean="0">
                                 <a:latin typeface="Cambria Math" panose="02040503050406030204" pitchFamily="18" charset="0"/>
                                 <a:ea typeface="Cambria Math" panose="02040503050406030204" pitchFamily="18" charset="0"/>
                               </a:rPr>
                               <m:t> </m:t>
                             </m:r>
                             <m:r>
-                              <a:rPr lang="en-US" sz="2800" i="1">
+                              <a:rPr lang="en-US" sz="2400" i="1">
                                 <a:latin typeface="Cambria Math" panose="02040503050406030204" pitchFamily="18" charset="0"/>
                                 <a:ea typeface="Cambria Math" panose="02040503050406030204" pitchFamily="18" charset="0"/>
                               </a:rPr>
@@ -7214,7 +7492,7 @@
                           </m:e>
                           <m:sub>
                             <m:r>
-                              <a:rPr lang="en-US" sz="2800" b="0" i="1" smtClean="0">
+                              <a:rPr lang="en-US" sz="2400" b="0" i="1" smtClean="0">
                                 <a:latin typeface="Cambria Math" panose="02040503050406030204" pitchFamily="18" charset="0"/>
                                 <a:ea typeface="Cambria Math" panose="02040503050406030204" pitchFamily="18" charset="0"/>
                               </a:rPr>
@@ -7223,7 +7501,7 @@
                           </m:sub>
                         </m:sSub>
                         <m:r>
-                          <a:rPr lang="en-US" sz="2800" b="0" i="1" smtClean="0">
+                          <a:rPr lang="en-US" sz="2400" b="0" i="1" smtClean="0">
                             <a:latin typeface="Cambria Math" panose="02040503050406030204" pitchFamily="18" charset="0"/>
                             <a:ea typeface="Cambria Math" panose="02040503050406030204" pitchFamily="18" charset="0"/>
                           </a:rPr>
@@ -7232,7 +7510,7 @@
                         <m:sSub>
                           <m:sSubPr>
                             <m:ctrlPr>
-                              <a:rPr lang="el-GR" sz="2800" i="1">
+                              <a:rPr lang="el-GR" sz="2400" i="1">
                                 <a:latin typeface="Cambria Math" panose="02040503050406030204" pitchFamily="18" charset="0"/>
                                 <a:ea typeface="Cambria Math" panose="02040503050406030204" pitchFamily="18" charset="0"/>
                               </a:rPr>
@@ -7240,7 +7518,7 @@
                           </m:sSubPr>
                           <m:e>
                             <m:r>
-                              <a:rPr lang="el-GR" sz="2800" i="1">
+                              <a:rPr lang="el-GR" sz="2400" i="1">
                                 <a:latin typeface="Cambria Math" panose="02040503050406030204" pitchFamily="18" charset="0"/>
                                 <a:ea typeface="Cambria Math" panose="02040503050406030204" pitchFamily="18" charset="0"/>
                               </a:rPr>
@@ -7249,7 +7527,7 @@
                           </m:e>
                           <m:sub>
                             <m:r>
-                              <a:rPr lang="en-US" sz="2800" b="0" i="1" smtClean="0">
+                              <a:rPr lang="en-US" sz="2400" b="0" i="1" smtClean="0">
                                 <a:latin typeface="Cambria Math" panose="02040503050406030204" pitchFamily="18" charset="0"/>
                                 <a:ea typeface="Cambria Math" panose="02040503050406030204" pitchFamily="18" charset="0"/>
                               </a:rPr>
@@ -7258,7 +7536,7 @@
                           </m:sub>
                         </m:sSub>
                         <m:r>
-                          <a:rPr lang="en-US" sz="2800" b="0" i="1" smtClean="0">
+                          <a:rPr lang="en-US" sz="2400" b="0" i="1" smtClean="0">
                             <a:latin typeface="Cambria Math" panose="02040503050406030204" pitchFamily="18" charset="0"/>
                             <a:ea typeface="Cambria Math" panose="02040503050406030204" pitchFamily="18" charset="0"/>
                           </a:rPr>
@@ -7268,7 +7546,7 @@
                     </m:d>
                   </m:oMath>
                 </a14:m>
-                <a:endParaRPr lang="en-US" sz="2800" dirty="0"/>
+                <a:endParaRPr lang="en-US" sz="2400" dirty="0"/>
               </a:p>
             </p:txBody>
           </p:sp>
@@ -7291,15 +7569,15 @@
             <p:spPr>
               <a:xfrm>
                 <a:off x="582592" y="1359234"/>
-                <a:ext cx="4188913" cy="3314049"/>
+                <a:ext cx="4750094" cy="2492990"/>
               </a:xfrm>
               <a:prstGeom prst="rect">
                 <a:avLst/>
               </a:prstGeom>
               <a:blipFill>
-                <a:blip r:embed="rId3"/>
+                <a:blip r:embed="rId4"/>
                 <a:stretch>
-                  <a:fillRect l="-1892" t="-1287" r="-582"/>
+                  <a:fillRect l="-1797" t="-1711" b="-3667"/>
                 </a:stretch>
               </a:blipFill>
             </p:spPr>
@@ -7478,7 +7756,7 @@
                     <m:oMathParaPr>
                       <m:jc m:val="center"/>
                     </m:oMathParaPr>
-                    <m:oMath xmlns:m="http://schemas.openxmlformats.org/officeDocument/2006/math">
+                    <m:oMath>
                       <m:r>
                         <a:rPr lang="en-US">
                           <a:latin typeface="Cambria Math" panose="02040503050406030204" pitchFamily="18" charset="0"/>
@@ -7488,7 +7766,7 @@
                       <m:d>
                         <m:dPr>
                           <m:ctrlPr>
-                            <a:rPr lang="ar-AE" i="1">
+                            <a:rPr lang="ar-AE">
                               <a:latin typeface="Cambria Math" panose="02040503050406030204" pitchFamily="18" charset="0"/>
                             </a:rPr>
                           </m:ctrlPr>
@@ -7532,7 +7810,7 @@
                           <m:sSup>
                             <m:sSupPr>
                               <m:ctrlPr>
-                                <a:rPr lang="ar-AE" i="1">
+                                <a:rPr lang="ar-AE">
                                   <a:latin typeface="Cambria Math" panose="02040503050406030204" pitchFamily="18" charset="0"/>
                                 </a:rPr>
                               </m:ctrlPr>
@@ -7573,7 +7851,7 @@
                       <m:sSup>
                         <m:sSupPr>
                           <m:ctrlPr>
-                            <a:rPr lang="ar-AE" i="1">
+                            <a:rPr lang="en-US">
                               <a:latin typeface="Cambria Math" panose="02040503050406030204" pitchFamily="18" charset="0"/>
                             </a:rPr>
                           </m:ctrlPr>
@@ -7635,10 +7913,7 @@
                 </a:pPr>
                 <a14:m>
                   <m:oMathPara xmlns:m="http://schemas.openxmlformats.org/officeDocument/2006/math">
-                    <m:oMathParaPr>
-                      <m:jc m:val="centerGroup"/>
-                    </m:oMathParaPr>
-                    <m:oMath xmlns:m="http://schemas.openxmlformats.org/officeDocument/2006/math">
+                    <m:oMath>
                       <m:r>
                         <a:rPr lang="en-US" b="0" i="1" smtClean="0">
                           <a:latin typeface="Cambria Math" panose="02040503050406030204" pitchFamily="18" charset="0"/>
@@ -7671,10 +7946,7 @@
                 </a:pPr>
                 <a14:m>
                   <m:oMathPara xmlns:m="http://schemas.openxmlformats.org/officeDocument/2006/math">
-                    <m:oMathParaPr>
-                      <m:jc m:val="centerGroup"/>
-                    </m:oMathParaPr>
-                    <m:oMath xmlns:m="http://schemas.openxmlformats.org/officeDocument/2006/math">
+                    <m:oMath>
                       <m:r>
                         <a:rPr lang="en-US" b="0" i="1" smtClean="0">
                           <a:latin typeface="Cambria Math" panose="02040503050406030204" pitchFamily="18" charset="0"/>
@@ -8240,7 +8512,7 @@
                     <m:oMathParaPr>
                       <m:jc m:val="center"/>
                     </m:oMathParaPr>
-                    <m:oMath xmlns:m="http://schemas.openxmlformats.org/officeDocument/2006/math">
+                    <m:oMath>
                       <m:r>
                         <a:rPr lang="en-US">
                           <a:latin typeface="Cambria Math" panose="02040503050406030204" pitchFamily="18" charset="0"/>
@@ -8250,7 +8522,7 @@
                       <m:d>
                         <m:dPr>
                           <m:ctrlPr>
-                            <a:rPr lang="ar-AE" i="1">
+                            <a:rPr lang="ar-AE">
                               <a:latin typeface="Cambria Math" panose="02040503050406030204" pitchFamily="18" charset="0"/>
                             </a:rPr>
                           </m:ctrlPr>
@@ -8323,7 +8595,7 @@
                               <m:f>
                                 <m:fPr>
                                   <m:ctrlPr>
-                                    <a:rPr lang="ar-AE" i="1">
+                                    <a:rPr lang="ar-AE">
                                       <a:latin typeface="Cambria Math" panose="02040503050406030204" pitchFamily="18" charset="0"/>
                                     </a:rPr>
                                   </m:ctrlPr>
@@ -8340,7 +8612,7 @@
                                   <m:d>
                                     <m:dPr>
                                       <m:ctrlPr>
-                                        <a:rPr lang="ar-AE" i="1">
+                                        <a:rPr lang="ar-AE">
                                           <a:latin typeface="Cambria Math" panose="02040503050406030204" pitchFamily="18" charset="0"/>
                                         </a:rPr>
                                       </m:ctrlPr>
@@ -8434,13 +8706,7 @@
                                 <a:rPr lang="en-US" b="0" i="1" smtClean="0">
                                   <a:latin typeface="Cambria Math" panose="02040503050406030204" pitchFamily="18" charset="0"/>
                                 </a:rPr>
-                                <m:t> </m:t>
-                              </m:r>
-                              <m:r>
-                                <a:rPr lang="en-US" b="0" i="1" smtClean="0">
-                                  <a:latin typeface="Cambria Math" panose="02040503050406030204" pitchFamily="18" charset="0"/>
-                                </a:rPr>
-                                <m:t>0</m:t>
+                                <m:t> 0</m:t>
                               </m:r>
                             </m:e>
                           </m:eqArr>
@@ -8463,10 +8729,7 @@
                 </a:pPr>
                 <a14:m>
                   <m:oMathPara xmlns:m="http://schemas.openxmlformats.org/officeDocument/2006/math">
-                    <m:oMathParaPr>
-                      <m:jc m:val="centerGroup"/>
-                    </m:oMathParaPr>
-                    <m:oMath xmlns:m="http://schemas.openxmlformats.org/officeDocument/2006/math">
+                    <m:oMath>
                       <m:r>
                         <a:rPr lang="en-US" b="0" i="1" smtClean="0">
                           <a:latin typeface="Cambria Math" panose="02040503050406030204" pitchFamily="18" charset="0"/>
@@ -8527,10 +8790,7 @@
                 </a:pPr>
                 <a14:m>
                   <m:oMathPara xmlns:m="http://schemas.openxmlformats.org/officeDocument/2006/math">
-                    <m:oMathParaPr>
-                      <m:jc m:val="centerGroup"/>
-                    </m:oMathParaPr>
-                    <m:oMath xmlns:m="http://schemas.openxmlformats.org/officeDocument/2006/math">
+                    <m:oMath>
                       <m:r>
                         <a:rPr lang="en-US" b="0" i="1" smtClean="0">
                           <a:latin typeface="Cambria Math" panose="02040503050406030204" pitchFamily="18" charset="0"/>
@@ -8541,25 +8801,7 @@
                         <a:rPr lang="en-US" b="0" i="1" smtClean="0">
                           <a:latin typeface="Cambria Math" panose="02040503050406030204" pitchFamily="18" charset="0"/>
                         </a:rPr>
-                        <m:t>=</m:t>
-                      </m:r>
-                      <m:r>
-                        <a:rPr lang="en-US" b="0" i="1" smtClean="0">
-                          <a:latin typeface="Cambria Math" panose="02040503050406030204" pitchFamily="18" charset="0"/>
-                        </a:rPr>
-                        <m:t>1</m:t>
-                      </m:r>
-                      <m:r>
-                        <a:rPr lang="en-US" b="0" i="1" smtClean="0">
-                          <a:latin typeface="Cambria Math" panose="02040503050406030204" pitchFamily="18" charset="0"/>
-                        </a:rPr>
-                        <m:t>/</m:t>
-                      </m:r>
-                      <m:r>
-                        <a:rPr lang="en-US" b="0" i="1" smtClean="0">
-                          <a:latin typeface="Cambria Math" panose="02040503050406030204" pitchFamily="18" charset="0"/>
-                        </a:rPr>
-                        <m:t>12</m:t>
+                        <m:t>=1/12</m:t>
                       </m:r>
                       <m:sSup>
                         <m:sSupPr>
@@ -8716,8 +8958,8 @@
           </a:p>
         </p:txBody>
       </p:sp>
-      <mc:AlternateContent xmlns:mc="http://schemas.openxmlformats.org/markup-compatibility/2006">
-        <mc:Choice xmlns:a14="http://schemas.microsoft.com/office/drawing/2010/main" Requires="a14">
+      <mc:AlternateContent xmlns:mc="http://schemas.openxmlformats.org/markup-compatibility/2006" xmlns:a14="http://schemas.microsoft.com/office/drawing/2010/main">
+        <mc:Choice Requires="a14">
           <p:sp>
             <p:nvSpPr>
               <p:cNvPr id="3" name="Content Placeholder 2"/>
@@ -8787,15 +9029,13 @@
                 </a:pPr>
                 <a14:m>
                   <m:oMathPara xmlns:m="http://schemas.openxmlformats.org/officeDocument/2006/math">
-                    <m:oMathParaPr>
-                      <m:jc m:val="centerGroup"/>
-                    </m:oMathParaPr>
-                    <m:oMath xmlns:m="http://schemas.openxmlformats.org/officeDocument/2006/math">
+                    <m:oMath>
                       <m:sSub>
                         <m:sSubPr>
                           <m:ctrlPr>
-                            <a:rPr lang="ar-AE" i="1" smtClean="0">
-                              <a:latin typeface="Cambria Math" panose="02040503050406030204" pitchFamily="18" charset="0"/>
+                            <a:rPr lang="ar-AE" b="0" i="1" smtClean="0">
+                              <a:latin typeface="Cambria Math" panose="02040503050406030204" pitchFamily="18" charset="0"/>
+                              <a:ea typeface="Cambria Math" panose="02040503050406030204" pitchFamily="18" charset="0"/>
                             </a:rPr>
                           </m:ctrlPr>
                         </m:sSubPr>
@@ -8832,7 +9072,7 @@
                       <m:d>
                         <m:dPr>
                           <m:ctrlPr>
-                            <a:rPr lang="ar-AE" i="1" smtClean="0">
+                            <a:rPr lang="en-US" b="0" i="1" smtClean="0">
                               <a:latin typeface="Cambria Math" panose="02040503050406030204" pitchFamily="18" charset="0"/>
                             </a:rPr>
                           </m:ctrlPr>
@@ -8940,10 +9180,7 @@
                 </a:pPr>
                 <a14:m>
                   <m:oMathPara xmlns:m="http://schemas.openxmlformats.org/officeDocument/2006/math">
-                    <m:oMathParaPr>
-                      <m:jc m:val="centerGroup"/>
-                    </m:oMathParaPr>
-                    <m:oMath xmlns:m="http://schemas.openxmlformats.org/officeDocument/2006/math">
+                    <m:oMath>
                       <m:r>
                         <a:rPr lang="en-US" b="0" i="1" smtClean="0">
                           <a:latin typeface="Cambria Math" panose="02040503050406030204" pitchFamily="18" charset="0"/>
@@ -8953,7 +9190,7 @@
                       <m:f>
                         <m:fPr>
                           <m:ctrlPr>
-                            <a:rPr lang="ar-AE" i="1">
+                            <a:rPr lang="ar-AE">
                               <a:latin typeface="Cambria Math" panose="02040503050406030204" pitchFamily="18" charset="0"/>
                             </a:rPr>
                           </m:ctrlPr>
@@ -8970,7 +9207,7 @@
                           <m:d>
                             <m:dPr>
                               <m:ctrlPr>
-                                <a:rPr lang="ar-AE" i="1">
+                                <a:rPr lang="ar-AE">
                                   <a:latin typeface="Cambria Math" panose="02040503050406030204" pitchFamily="18" charset="0"/>
                                 </a:rPr>
                               </m:ctrlPr>
@@ -9057,10 +9294,7 @@
                 </a:pPr>
                 <a14:m>
                   <m:oMathPara xmlns:m="http://schemas.openxmlformats.org/officeDocument/2006/math">
-                    <m:oMathParaPr>
-                      <m:jc m:val="centerGroup"/>
-                    </m:oMathParaPr>
-                    <m:oMath xmlns:m="http://schemas.openxmlformats.org/officeDocument/2006/math">
+                    <m:oMath>
                       <m:r>
                         <a:rPr lang="en-US" b="0" i="1" smtClean="0">
                           <a:latin typeface="Cambria Math" panose="02040503050406030204" pitchFamily="18" charset="0"/>
@@ -9070,7 +9304,7 @@
                       <m:f>
                         <m:fPr>
                           <m:ctrlPr>
-                            <a:rPr lang="ar-AE" i="1">
+                            <a:rPr lang="ar-AE">
                               <a:latin typeface="Cambria Math" panose="02040503050406030204" pitchFamily="18" charset="0"/>
                             </a:rPr>
                           </m:ctrlPr>
@@ -9087,7 +9321,7 @@
                           <m:d>
                             <m:dPr>
                               <m:ctrlPr>
-                                <a:rPr lang="ar-AE" i="1">
+                                <a:rPr lang="ar-AE">
                                   <a:latin typeface="Cambria Math" panose="02040503050406030204" pitchFamily="18" charset="0"/>
                                 </a:rPr>
                               </m:ctrlPr>
@@ -9203,10 +9437,7 @@
                 </a:pPr>
                 <a14:m>
                   <m:oMathPara xmlns:m="http://schemas.openxmlformats.org/officeDocument/2006/math">
-                    <m:oMathParaPr>
-                      <m:jc m:val="centerGroup"/>
-                    </m:oMathParaPr>
-                    <m:oMath xmlns:m="http://schemas.openxmlformats.org/officeDocument/2006/math">
+                    <m:oMath>
                       <m:r>
                         <a:rPr lang="en-US" b="0" i="1" smtClean="0">
                           <a:latin typeface="Cambria Math" panose="02040503050406030204" pitchFamily="18" charset="0"/>
@@ -9268,7 +9499,7 @@
             </p:txBody>
           </p:sp>
         </mc:Choice>
-        <mc:Fallback>
+        <mc:Fallback xmlns="">
           <p:sp>
             <p:nvSpPr>
               <p:cNvPr id="3" name="Content Placeholder 2"/>
@@ -9460,8 +9691,8 @@
           </a:p>
         </p:txBody>
       </p:sp>
-      <mc:AlternateContent xmlns:mc="http://schemas.openxmlformats.org/markup-compatibility/2006">
-        <mc:Choice xmlns:a14="http://schemas.microsoft.com/office/drawing/2010/main" Requires="a14">
+      <mc:AlternateContent xmlns:mc="http://schemas.openxmlformats.org/markup-compatibility/2006" xmlns:a14="http://schemas.microsoft.com/office/drawing/2010/main">
+        <mc:Choice Requires="a14">
           <p:sp>
             <p:nvSpPr>
               <p:cNvPr id="3" name="Content Placeholder 2"/>
@@ -9494,7 +9725,7 @@
                     <m:oMathParaPr>
                       <m:jc m:val="center"/>
                     </m:oMathParaPr>
-                    <m:oMath xmlns:m="http://schemas.openxmlformats.org/officeDocument/2006/math">
+                    <m:oMath>
                       <m:r>
                         <a:rPr lang="en-US">
                           <a:latin typeface="Cambria Math" panose="02040503050406030204" pitchFamily="18" charset="0"/>
@@ -9504,7 +9735,7 @@
                       <m:d>
                         <m:dPr>
                           <m:ctrlPr>
-                            <a:rPr lang="ar-AE" i="1">
+                            <a:rPr lang="ar-AE">
                               <a:latin typeface="Cambria Math" panose="02040503050406030204" pitchFamily="18" charset="0"/>
                             </a:rPr>
                           </m:ctrlPr>
@@ -9527,7 +9758,7 @@
                       <m:f>
                         <m:fPr>
                           <m:ctrlPr>
-                            <a:rPr lang="ar-AE" i="1">
+                            <a:rPr lang="ar-AE">
                               <a:latin typeface="Cambria Math" panose="02040503050406030204" pitchFamily="18" charset="0"/>
                             </a:rPr>
                           </m:ctrlPr>
@@ -9544,7 +9775,7 @@
                           <m:rad>
                             <m:radPr>
                               <m:ctrlPr>
-                                <a:rPr lang="ar-AE" i="1">
+                                <a:rPr lang="en-US" b="0" i="1" smtClean="0">
                                   <a:latin typeface="Cambria Math" panose="02040503050406030204" pitchFamily="18" charset="0"/>
                                 </a:rPr>
                               </m:ctrlPr>
@@ -9576,7 +9807,7 @@
                               <m:sSup>
                                 <m:sSupPr>
                                   <m:ctrlPr>
-                                    <a:rPr lang="ar-AE" i="1">
+                                    <a:rPr lang="ar-AE">
                                       <a:latin typeface="Cambria Math" panose="02040503050406030204" pitchFamily="18" charset="0"/>
                                     </a:rPr>
                                   </m:ctrlPr>
@@ -9614,7 +9845,7 @@
                       <m:f>
                         <m:fPr>
                           <m:ctrlPr>
-                            <a:rPr lang="ar-AE" i="1">
+                            <a:rPr lang="ar-AE">
                               <a:latin typeface="Cambria Math" panose="02040503050406030204" pitchFamily="18" charset="0"/>
                             </a:rPr>
                           </m:ctrlPr>
@@ -9638,7 +9869,7 @@
                               <m:d>
                                 <m:dPr>
                                   <m:ctrlPr>
-                                    <a:rPr lang="ar-AE" i="1">
+                                    <a:rPr lang="ar-AE">
                                       <a:latin typeface="Cambria Math" panose="02040503050406030204" pitchFamily="18" charset="0"/>
                                     </a:rPr>
                                   </m:ctrlPr>
@@ -9685,7 +9916,7 @@
                           <m:sSup>
                             <m:sSupPr>
                               <m:ctrlPr>
-                                <a:rPr lang="ar-AE" i="1">
+                                <a:rPr lang="ar-AE">
                                   <a:latin typeface="Cambria Math" panose="02040503050406030204" pitchFamily="18" charset="0"/>
                                 </a:rPr>
                               </m:ctrlPr>
@@ -9729,10 +9960,7 @@
                 </a:pPr>
                 <a14:m>
                   <m:oMathPara xmlns:m="http://schemas.openxmlformats.org/officeDocument/2006/math">
-                    <m:oMathParaPr>
-                      <m:jc m:val="centerGroup"/>
-                    </m:oMathParaPr>
-                    <m:oMath xmlns:m="http://schemas.openxmlformats.org/officeDocument/2006/math">
+                    <m:oMath>
                       <m:r>
                         <a:rPr lang="en-US" i="1" smtClean="0">
                           <a:latin typeface="Cambria Math" panose="02040503050406030204" pitchFamily="18" charset="0"/>
@@ -9795,10 +10023,7 @@
                 </a:pPr>
                 <a14:m>
                   <m:oMathPara xmlns:m="http://schemas.openxmlformats.org/officeDocument/2006/math">
-                    <m:oMathParaPr>
-                      <m:jc m:val="centerGroup"/>
-                    </m:oMathParaPr>
-                    <m:oMath xmlns:m="http://schemas.openxmlformats.org/officeDocument/2006/math">
+                    <m:oMath>
                       <m:r>
                         <a:rPr lang="en-US" i="1" smtClean="0">
                           <a:latin typeface="Cambria Math" panose="02040503050406030204" pitchFamily="18" charset="0"/>
@@ -9861,15 +10086,13 @@
                 </a:pPr>
                 <a14:m>
                   <m:oMathPara xmlns:m="http://schemas.openxmlformats.org/officeDocument/2006/math">
-                    <m:oMathParaPr>
-                      <m:jc m:val="centerGroup"/>
-                    </m:oMathParaPr>
-                    <m:oMath xmlns:m="http://schemas.openxmlformats.org/officeDocument/2006/math">
+                    <m:oMath>
                       <m:sSup>
                         <m:sSupPr>
                           <m:ctrlPr>
                             <a:rPr lang="en-US" i="1" smtClean="0">
                               <a:latin typeface="Cambria Math" panose="02040503050406030204" pitchFamily="18" charset="0"/>
+                              <a:ea typeface="Cambria Math" panose="02040503050406030204" pitchFamily="18" charset="0"/>
                             </a:rPr>
                           </m:ctrlPr>
                         </m:sSupPr>
@@ -9917,7 +10140,7 @@
             </p:txBody>
           </p:sp>
         </mc:Choice>
-        <mc:Fallback>
+        <mc:Fallback xmlns="">
           <p:sp>
             <p:nvSpPr>
               <p:cNvPr id="3" name="Content Placeholder 2"/>
@@ -10168,7 +10391,7 @@
                     <m:sSup>
                       <m:sSupPr>
                         <m:ctrlPr>
-                          <a:rPr lang="ar-AE" i="1">
+                          <a:rPr lang="ar-AE">
                             <a:latin typeface="Cambria Math" panose="02040503050406030204" pitchFamily="18" charset="0"/>
                           </a:rPr>
                         </m:ctrlPr>
@@ -10238,7 +10461,7 @@
                       <m:accPr>
                         <m:chr m:val="⃗"/>
                         <m:ctrlPr>
-                          <a:rPr lang="ar-AE" i="1">
+                          <a:rPr lang="ar-AE">
                             <a:latin typeface="Cambria Math" panose="02040503050406030204" pitchFamily="18" charset="0"/>
                           </a:rPr>
                         </m:ctrlPr>
@@ -10324,7 +10547,7 @@
                     <m:sSup>
                       <m:sSupPr>
                         <m:ctrlPr>
-                          <a:rPr lang="ar-AE" i="1">
+                          <a:rPr lang="ar-AE">
                             <a:latin typeface="Cambria Math" panose="02040503050406030204" pitchFamily="18" charset="0"/>
                           </a:rPr>
                         </m:ctrlPr>
@@ -10359,7 +10582,7 @@
                     <m:oMathParaPr>
                       <m:jc m:val="center"/>
                     </m:oMathParaPr>
-                    <m:oMath xmlns:m="http://schemas.openxmlformats.org/officeDocument/2006/math">
+                    <m:oMath>
                       <m:r>
                         <a:rPr lang="ar-AE">
                           <a:latin typeface="Cambria Math" panose="02040503050406030204" pitchFamily="18" charset="0"/>
@@ -10379,7 +10602,7 @@
                             <m:accPr>
                               <m:chr m:val="⃗"/>
                               <m:ctrlPr>
-                                <a:rPr lang="ar-AE" i="1">
+                                <a:rPr lang="ar-AE">
                                   <a:latin typeface="Cambria Math" panose="02040503050406030204" pitchFamily="18" charset="0"/>
                                 </a:rPr>
                               </m:ctrlPr>
@@ -10404,7 +10627,7 @@
                       <m:f>
                         <m:fPr>
                           <m:ctrlPr>
-                            <a:rPr lang="ar-AE" i="1">
+                            <a:rPr lang="ar-AE">
                               <a:latin typeface="Cambria Math" panose="02040503050406030204" pitchFamily="18" charset="0"/>
                             </a:rPr>
                           </m:ctrlPr>
@@ -10421,7 +10644,7 @@
                           <m:rad>
                             <m:radPr>
                               <m:ctrlPr>
-                                <a:rPr lang="ar-AE" i="1">
+                                <a:rPr lang="ar-AE" b="0" i="1" smtClean="0">
                                   <a:latin typeface="Cambria Math" panose="02040503050406030204" pitchFamily="18" charset="0"/>
                                 </a:rPr>
                               </m:ctrlPr>
@@ -10450,7 +10673,7 @@
                                   <m:d>
                                     <m:dPr>
                                       <m:ctrlPr>
-                                        <a:rPr lang="ar-AE" i="1">
+                                        <a:rPr lang="ar-AE">
                                           <a:latin typeface="Cambria Math" panose="02040503050406030204" pitchFamily="18" charset="0"/>
                                         </a:rPr>
                                       </m:ctrlPr>
@@ -10485,7 +10708,7 @@
                                   <m:begChr m:val="|"/>
                                   <m:endChr m:val="|"/>
                                   <m:ctrlPr>
-                                    <a:rPr lang="ar-AE" i="1">
+                                    <a:rPr lang="ar-AE">
                                       <a:latin typeface="Cambria Math" panose="02040503050406030204" pitchFamily="18" charset="0"/>
                                     </a:rPr>
                                   </m:ctrlPr>
@@ -10521,7 +10744,7 @@
                           <m:f>
                             <m:fPr>
                               <m:ctrlPr>
-                                <a:rPr lang="ar-AE" i="1">
+                                <a:rPr lang="ar-AE">
                                   <a:latin typeface="Cambria Math" panose="02040503050406030204" pitchFamily="18" charset="0"/>
                                 </a:rPr>
                               </m:ctrlPr>
@@ -10565,7 +10788,7 @@
                                     <m:accPr>
                                       <m:chr m:val="⃗"/>
                                       <m:ctrlPr>
-                                        <a:rPr lang="ar-AE" i="1">
+                                        <a:rPr lang="ar-AE">
                                           <a:latin typeface="Cambria Math" panose="02040503050406030204" pitchFamily="18" charset="0"/>
                                         </a:rPr>
                                       </m:ctrlPr>
@@ -10589,7 +10812,7 @@
                                     <m:accPr>
                                       <m:chr m:val="⃗"/>
                                       <m:ctrlPr>
-                                        <a:rPr lang="ar-AE" i="1">
+                                        <a:rPr lang="ar-AE">
                                           <a:latin typeface="Cambria Math" panose="02040503050406030204" pitchFamily="18" charset="0"/>
                                         </a:rPr>
                                       </m:ctrlPr>
@@ -10618,8 +10841,9 @@
                           <m:sSup>
                             <m:sSupPr>
                               <m:ctrlPr>
-                                <a:rPr lang="ar-AE" i="1" smtClean="0">
+                                <a:rPr lang="el-GR" i="1" smtClean="0">
                                   <a:latin typeface="Cambria Math" panose="02040503050406030204" pitchFamily="18" charset="0"/>
+                                  <a:ea typeface="Cambria Math" panose="02040503050406030204" pitchFamily="18" charset="0"/>
                                 </a:rPr>
                               </m:ctrlPr>
                             </m:sSupPr>
@@ -10640,13 +10864,7 @@
                                 <a:rPr lang="en-US" b="0" i="1" smtClean="0">
                                   <a:latin typeface="Cambria Math" panose="02040503050406030204" pitchFamily="18" charset="0"/>
                                 </a:rPr>
-                                <m:t>−</m:t>
-                              </m:r>
-                              <m:r>
-                                <a:rPr lang="en-US" b="0" i="1" smtClean="0">
-                                  <a:latin typeface="Cambria Math" panose="02040503050406030204" pitchFamily="18" charset="0"/>
-                                </a:rPr>
-                                <m:t>1</m:t>
+                                <m:t>−1</m:t>
                               </m:r>
                             </m:sup>
                           </m:sSup>
@@ -10663,7 +10881,7 @@
                                 <m:accPr>
                                   <m:chr m:val="⃗"/>
                                   <m:ctrlPr>
-                                    <a:rPr lang="ar-AE" i="1">
+                                    <a:rPr lang="ar-AE">
                                       <a:latin typeface="Cambria Math" panose="02040503050406030204" pitchFamily="18" charset="0"/>
                                     </a:rPr>
                                   </m:ctrlPr>
@@ -10687,7 +10905,7 @@
                                 <m:accPr>
                                   <m:chr m:val="⃗"/>
                                   <m:ctrlPr>
-                                    <a:rPr lang="ar-AE" i="1">
+                                    <a:rPr lang="ar-AE">
                                       <a:latin typeface="Cambria Math" panose="02040503050406030204" pitchFamily="18" charset="0"/>
                                     </a:rPr>
                                   </m:ctrlPr>
@@ -10719,7 +10937,7 @@
                         <m:begChr m:val="|"/>
                         <m:endChr m:val="|"/>
                         <m:ctrlPr>
-                          <a:rPr lang="ar-AE" i="1">
+                          <a:rPr lang="ar-AE">
                             <a:latin typeface="Cambria Math" panose="02040503050406030204" pitchFamily="18" charset="0"/>
                           </a:rPr>
                         </m:ctrlPr>
@@ -10783,7 +11001,7 @@
                     <m:sSub>
                       <m:sSubPr>
                         <m:ctrlPr>
-                          <a:rPr lang="ar-AE" i="1">
+                          <a:rPr lang="ar-AE">
                             <a:latin typeface="Cambria Math" panose="02040503050406030204" pitchFamily="18" charset="0"/>
                           </a:rPr>
                         </m:ctrlPr>
@@ -10977,7 +11195,7 @@
                     <m:oMathParaPr>
                       <m:jc m:val="center"/>
                     </m:oMathParaPr>
-                    <m:oMath xmlns:m="http://schemas.openxmlformats.org/officeDocument/2006/math">
+                    <m:oMath>
                       <m:r>
                         <a:rPr lang="en-US">
                           <a:latin typeface="Cambria Math" panose="02040503050406030204" pitchFamily="18" charset="0"/>
@@ -11022,7 +11240,7 @@
                                 <m:sSub>
                                   <m:sSubPr>
                                     <m:ctrlPr>
-                                      <a:rPr lang="ar-AE" i="1">
+                                      <a:rPr lang="ar-AE">
                                         <a:latin typeface="Cambria Math" panose="02040503050406030204" pitchFamily="18" charset="0"/>
                                       </a:rPr>
                                     </m:ctrlPr>
@@ -11040,19 +11258,7 @@
                                       <a:rPr lang="ar-AE">
                                         <a:latin typeface="Cambria Math" panose="02040503050406030204" pitchFamily="18" charset="0"/>
                                       </a:rPr>
-                                      <m:t>1</m:t>
-                                    </m:r>
-                                    <m:r>
-                                      <a:rPr lang="ar-AE">
-                                        <a:latin typeface="Cambria Math" panose="02040503050406030204" pitchFamily="18" charset="0"/>
-                                      </a:rPr>
-                                      <m:t>,</m:t>
-                                    </m:r>
-                                    <m:r>
-                                      <a:rPr lang="ar-AE">
-                                        <a:latin typeface="Cambria Math" panose="02040503050406030204" pitchFamily="18" charset="0"/>
-                                      </a:rPr>
-                                      <m:t>1</m:t>
+                                      <m:t>1,1</m:t>
                                     </m:r>
                                   </m:sub>
                                 </m:sSub>
@@ -11061,7 +11267,7 @@
                                 <m:sSub>
                                   <m:sSubPr>
                                     <m:ctrlPr>
-                                      <a:rPr lang="ar-AE" i="1">
+                                      <a:rPr lang="ar-AE">
                                         <a:latin typeface="Cambria Math" panose="02040503050406030204" pitchFamily="18" charset="0"/>
                                       </a:rPr>
                                     </m:ctrlPr>
@@ -11079,19 +11285,7 @@
                                       <a:rPr lang="ar-AE">
                                         <a:latin typeface="Cambria Math" panose="02040503050406030204" pitchFamily="18" charset="0"/>
                                       </a:rPr>
-                                      <m:t>1</m:t>
-                                    </m:r>
-                                    <m:r>
-                                      <a:rPr lang="ar-AE">
-                                        <a:latin typeface="Cambria Math" panose="02040503050406030204" pitchFamily="18" charset="0"/>
-                                      </a:rPr>
-                                      <m:t>,</m:t>
-                                    </m:r>
-                                    <m:r>
-                                      <a:rPr lang="ar-AE">
-                                        <a:latin typeface="Cambria Math" panose="02040503050406030204" pitchFamily="18" charset="0"/>
-                                      </a:rPr>
-                                      <m:t>2</m:t>
+                                      <m:t>1,2</m:t>
                                     </m:r>
                                   </m:sub>
                                 </m:sSub>
@@ -11108,7 +11302,7 @@
                                 <m:sSub>
                                   <m:sSubPr>
                                     <m:ctrlPr>
-                                      <a:rPr lang="ar-AE" i="1">
+                                      <a:rPr lang="ar-AE">
                                         <a:latin typeface="Cambria Math" panose="02040503050406030204" pitchFamily="18" charset="0"/>
                                       </a:rPr>
                                     </m:ctrlPr>
@@ -11126,13 +11320,7 @@
                                       <a:rPr lang="ar-AE">
                                         <a:latin typeface="Cambria Math" panose="02040503050406030204" pitchFamily="18" charset="0"/>
                                       </a:rPr>
-                                      <m:t>1</m:t>
-                                    </m:r>
-                                    <m:r>
-                                      <a:rPr lang="ar-AE">
-                                        <a:latin typeface="Cambria Math" panose="02040503050406030204" pitchFamily="18" charset="0"/>
-                                      </a:rPr>
-                                      <m:t>,</m:t>
+                                      <m:t>1,</m:t>
                                     </m:r>
                                     <m:r>
                                       <a:rPr lang="ar-AE">
@@ -11149,7 +11337,7 @@
                                 <m:sSub>
                                   <m:sSubPr>
                                     <m:ctrlPr>
-                                      <a:rPr lang="ar-AE" i="1">
+                                      <a:rPr lang="ar-AE">
                                         <a:latin typeface="Cambria Math" panose="02040503050406030204" pitchFamily="18" charset="0"/>
                                       </a:rPr>
                                     </m:ctrlPr>
@@ -11167,19 +11355,7 @@
                                       <a:rPr lang="ar-AE">
                                         <a:latin typeface="Cambria Math" panose="02040503050406030204" pitchFamily="18" charset="0"/>
                                       </a:rPr>
-                                      <m:t>2</m:t>
-                                    </m:r>
-                                    <m:r>
-                                      <a:rPr lang="ar-AE">
-                                        <a:latin typeface="Cambria Math" panose="02040503050406030204" pitchFamily="18" charset="0"/>
-                                      </a:rPr>
-                                      <m:t>,</m:t>
-                                    </m:r>
-                                    <m:r>
-                                      <a:rPr lang="ar-AE">
-                                        <a:latin typeface="Cambria Math" panose="02040503050406030204" pitchFamily="18" charset="0"/>
-                                      </a:rPr>
-                                      <m:t>1</m:t>
+                                      <m:t>2,1</m:t>
                                     </m:r>
                                   </m:sub>
                                 </m:sSub>
@@ -11188,7 +11364,7 @@
                                 <m:sSub>
                                   <m:sSubPr>
                                     <m:ctrlPr>
-                                      <a:rPr lang="ar-AE" i="1">
+                                      <a:rPr lang="ar-AE">
                                         <a:latin typeface="Cambria Math" panose="02040503050406030204" pitchFamily="18" charset="0"/>
                                       </a:rPr>
                                     </m:ctrlPr>
@@ -11206,19 +11382,7 @@
                                       <a:rPr lang="ar-AE">
                                         <a:latin typeface="Cambria Math" panose="02040503050406030204" pitchFamily="18" charset="0"/>
                                       </a:rPr>
-                                      <m:t>2</m:t>
-                                    </m:r>
-                                    <m:r>
-                                      <a:rPr lang="ar-AE">
-                                        <a:latin typeface="Cambria Math" panose="02040503050406030204" pitchFamily="18" charset="0"/>
-                                      </a:rPr>
-                                      <m:t>,</m:t>
-                                    </m:r>
-                                    <m:r>
-                                      <a:rPr lang="ar-AE">
-                                        <a:latin typeface="Cambria Math" panose="02040503050406030204" pitchFamily="18" charset="0"/>
-                                      </a:rPr>
-                                      <m:t>2</m:t>
+                                      <m:t>2,2</m:t>
                                     </m:r>
                                   </m:sub>
                                 </m:sSub>
@@ -11235,7 +11399,7 @@
                                 <m:sSub>
                                   <m:sSubPr>
                                     <m:ctrlPr>
-                                      <a:rPr lang="ar-AE" i="1">
+                                      <a:rPr lang="ar-AE">
                                         <a:latin typeface="Cambria Math" panose="02040503050406030204" pitchFamily="18" charset="0"/>
                                       </a:rPr>
                                     </m:ctrlPr>
@@ -11253,13 +11417,7 @@
                                       <a:rPr lang="ar-AE">
                                         <a:latin typeface="Cambria Math" panose="02040503050406030204" pitchFamily="18" charset="0"/>
                                       </a:rPr>
-                                      <m:t>2</m:t>
-                                    </m:r>
-                                    <m:r>
-                                      <a:rPr lang="ar-AE">
-                                        <a:latin typeface="Cambria Math" panose="02040503050406030204" pitchFamily="18" charset="0"/>
-                                      </a:rPr>
-                                      <m:t>,</m:t>
+                                      <m:t>2,</m:t>
                                     </m:r>
                                     <m:r>
                                       <a:rPr lang="ar-AE">
@@ -11310,7 +11468,7 @@
                                 <m:sSub>
                                   <m:sSubPr>
                                     <m:ctrlPr>
-                                      <a:rPr lang="ar-AE" i="1">
+                                      <a:rPr lang="ar-AE">
                                         <a:latin typeface="Cambria Math" panose="02040503050406030204" pitchFamily="18" charset="0"/>
                                       </a:rPr>
                                     </m:ctrlPr>
@@ -11334,13 +11492,7 @@
                                       <a:rPr lang="ar-AE">
                                         <a:latin typeface="Cambria Math" panose="02040503050406030204" pitchFamily="18" charset="0"/>
                                       </a:rPr>
-                                      <m:t>,</m:t>
-                                    </m:r>
-                                    <m:r>
-                                      <a:rPr lang="ar-AE">
-                                        <a:latin typeface="Cambria Math" panose="02040503050406030204" pitchFamily="18" charset="0"/>
-                                      </a:rPr>
-                                      <m:t>1</m:t>
+                                      <m:t>,1</m:t>
                                     </m:r>
                                   </m:sub>
                                 </m:sSub>
@@ -11349,7 +11501,7 @@
                                 <m:sSub>
                                   <m:sSubPr>
                                     <m:ctrlPr>
-                                      <a:rPr lang="ar-AE" i="1">
+                                      <a:rPr lang="ar-AE">
                                         <a:latin typeface="Cambria Math" panose="02040503050406030204" pitchFamily="18" charset="0"/>
                                       </a:rPr>
                                     </m:ctrlPr>
@@ -11373,13 +11525,7 @@
                                       <a:rPr lang="ar-AE">
                                         <a:latin typeface="Cambria Math" panose="02040503050406030204" pitchFamily="18" charset="0"/>
                                       </a:rPr>
-                                      <m:t>,</m:t>
-                                    </m:r>
-                                    <m:r>
-                                      <a:rPr lang="ar-AE">
-                                        <a:latin typeface="Cambria Math" panose="02040503050406030204" pitchFamily="18" charset="0"/>
-                                      </a:rPr>
-                                      <m:t>2</m:t>
+                                      <m:t>,2</m:t>
                                     </m:r>
                                   </m:sub>
                                 </m:sSub>
@@ -11396,7 +11542,7 @@
                                 <m:sSub>
                                   <m:sSubPr>
                                     <m:ctrlPr>
-                                      <a:rPr lang="ar-AE" i="1">
+                                      <a:rPr lang="ar-AE">
                                         <a:latin typeface="Cambria Math" panose="02040503050406030204" pitchFamily="18" charset="0"/>
                                       </a:rPr>
                                     </m:ctrlPr>
@@ -11453,7 +11599,7 @@
                     <m:sSub>
                       <m:sSubPr>
                         <m:ctrlPr>
-                          <a:rPr lang="ar-AE" i="1">
+                          <a:rPr lang="ar-AE">
                             <a:latin typeface="Cambria Math" panose="02040503050406030204" pitchFamily="18" charset="0"/>
                           </a:rPr>
                         </m:ctrlPr>
@@ -11518,15 +11664,13 @@
                 </a:pPr>
                 <a14:m>
                   <m:oMathPara xmlns:m="http://schemas.openxmlformats.org/officeDocument/2006/math">
-                    <m:oMathParaPr>
-                      <m:jc m:val="centerGroup"/>
-                    </m:oMathParaPr>
-                    <m:oMath xmlns:m="http://schemas.openxmlformats.org/officeDocument/2006/math">
+                    <m:oMath>
                       <m:sSub>
                         <m:sSubPr>
                           <m:ctrlPr>
                             <a:rPr lang="ar-AE" i="1" smtClean="0">
                               <a:latin typeface="Cambria Math" panose="02040503050406030204" pitchFamily="18" charset="0"/>
+                              <a:ea typeface="Cambria Math" panose="02040503050406030204" pitchFamily="18" charset="0"/>
                             </a:rPr>
                           </m:ctrlPr>
                         </m:sSubPr>
@@ -11596,7 +11740,7 @@
                                 <m:accPr>
                                   <m:chr m:val="⃗"/>
                                   <m:ctrlPr>
-                                    <a:rPr lang="en-US" b="0" i="1" smtClean="0">
+                                    <a:rPr lang="en-US" i="1">
                                       <a:latin typeface="Cambria Math" panose="02040503050406030204" pitchFamily="18" charset="0"/>
                                     </a:rPr>
                                   </m:ctrlPr>
@@ -11646,7 +11790,7 @@
                                   <m:begChr m:val="["/>
                                   <m:endChr m:val="]"/>
                                   <m:ctrlPr>
-                                    <a:rPr lang="en-US" b="0" i="1" smtClean="0">
+                                    <a:rPr lang="en-US" i="1">
                                       <a:latin typeface="Cambria Math" panose="02040503050406030204" pitchFamily="18" charset="0"/>
                                     </a:rPr>
                                   </m:ctrlPr>
@@ -11823,15 +11967,13 @@
                 </a:pPr>
                 <a14:m>
                   <m:oMathPara xmlns:m="http://schemas.openxmlformats.org/officeDocument/2006/math">
-                    <m:oMathParaPr>
-                      <m:jc m:val="centerGroup"/>
-                    </m:oMathParaPr>
-                    <m:oMath xmlns:m="http://schemas.openxmlformats.org/officeDocument/2006/math">
+                    <m:oMath>
                       <m:sSub>
                         <m:sSubPr>
                           <m:ctrlPr>
                             <a:rPr lang="ar-AE" i="1" smtClean="0">
                               <a:latin typeface="Cambria Math" panose="02040503050406030204" pitchFamily="18" charset="0"/>
+                              <a:ea typeface="Cambria Math" panose="02040503050406030204" pitchFamily="18" charset="0"/>
                             </a:rPr>
                           </m:ctrlPr>
                         </m:sSubPr>
@@ -11901,7 +12043,7 @@
                                 <m:accPr>
                                   <m:chr m:val="⃗"/>
                                   <m:ctrlPr>
-                                    <a:rPr lang="en-US" b="0" i="1" smtClean="0">
+                                    <a:rPr lang="en-US" i="1">
                                       <a:latin typeface="Cambria Math" panose="02040503050406030204" pitchFamily="18" charset="0"/>
                                     </a:rPr>
                                   </m:ctrlPr>
@@ -12090,15 +12232,13 @@
                 </a:pPr>
                 <a14:m>
                   <m:oMathPara xmlns:m="http://schemas.openxmlformats.org/officeDocument/2006/math">
-                    <m:oMathParaPr>
-                      <m:jc m:val="centerGroup"/>
-                    </m:oMathParaPr>
-                    <m:oMath xmlns:m="http://schemas.openxmlformats.org/officeDocument/2006/math">
+                    <m:oMath>
                       <m:sSub>
                         <m:sSubPr>
                           <m:ctrlPr>
                             <a:rPr lang="ar-AE" i="1">
                               <a:latin typeface="Cambria Math" panose="02040503050406030204" pitchFamily="18" charset="0"/>
+                              <a:ea typeface="Cambria Math" panose="02040503050406030204" pitchFamily="18" charset="0"/>
                             </a:rPr>
                           </m:ctrlPr>
                         </m:sSubPr>
@@ -12141,7 +12281,7 @@
                       <m:f>
                         <m:fPr>
                           <m:ctrlPr>
-                            <a:rPr lang="en-US" i="1" smtClean="0">
+                            <a:rPr lang="en-US" b="0" i="1" smtClean="0">
                               <a:latin typeface="Cambria Math" panose="02040503050406030204" pitchFamily="18" charset="0"/>
                             </a:rPr>
                           </m:ctrlPr>
@@ -12219,7 +12359,7 @@
                             <m:accPr>
                               <m:chr m:val="̅"/>
                               <m:ctrlPr>
-                                <a:rPr lang="en-US" i="1" smtClean="0">
+                                <a:rPr lang="en-US" i="1">
                                   <a:latin typeface="Cambria Math" panose="02040503050406030204" pitchFamily="18" charset="0"/>
                                 </a:rPr>
                               </m:ctrlPr>
@@ -12317,7 +12457,7 @@
                             <m:accPr>
                               <m:chr m:val="̅"/>
                               <m:ctrlPr>
-                                <a:rPr lang="en-US" i="1">
+                                <a:rPr lang="en-US" i="1" smtClean="0">
                                   <a:latin typeface="Cambria Math" panose="02040503050406030204" pitchFamily="18" charset="0"/>
                                 </a:rPr>
                               </m:ctrlPr>
@@ -12326,7 +12466,7 @@
                               <m:sSub>
                                 <m:sSubPr>
                                   <m:ctrlPr>
-                                    <a:rPr lang="en-US" i="1" smtClean="0">
+                                    <a:rPr lang="en-US" i="1">
                                       <a:latin typeface="Cambria Math" panose="02040503050406030204" pitchFamily="18" charset="0"/>
                                     </a:rPr>
                                   </m:ctrlPr>
@@ -12394,7 +12534,7 @@
                         <m:sSub>
                           <m:sSubPr>
                             <m:ctrlPr>
-                              <a:rPr lang="ar-AE" i="1">
+                              <a:rPr lang="ar-AE">
                                 <a:latin typeface="Cambria Math" panose="02040503050406030204" pitchFamily="18" charset="0"/>
                               </a:rPr>
                             </m:ctrlPr>
@@ -12443,7 +12583,7 @@
                         <m:sSub>
                           <m:sSubPr>
                             <m:ctrlPr>
-                              <a:rPr lang="ar-AE" i="1">
+                              <a:rPr lang="ar-AE">
                                 <a:latin typeface="Cambria Math" panose="02040503050406030204" pitchFamily="18" charset="0"/>
                               </a:rPr>
                             </m:ctrlPr>
@@ -12607,10 +12747,7 @@
                 </a:pPr>
                 <a14:m>
                   <m:oMathPara xmlns:m="http://schemas.openxmlformats.org/officeDocument/2006/math">
-                    <m:oMathParaPr>
-                      <m:jc m:val="centerGroup"/>
-                    </m:oMathParaPr>
-                    <m:oMath xmlns:m="http://schemas.openxmlformats.org/officeDocument/2006/math">
+                    <m:oMath>
                       <m:r>
                         <a:rPr lang="en-US" sz="2000">
                           <a:latin typeface="Cambria Math" panose="02040503050406030204" pitchFamily="18" charset="0"/>
@@ -12628,7 +12765,7 @@
                           <m:begChr m:val="["/>
                           <m:endChr m:val="]"/>
                           <m:ctrlPr>
-                            <a:rPr lang="ar-AE" sz="2000" i="1">
+                            <a:rPr lang="ar-AE" sz="2000">
                               <a:latin typeface="Cambria Math" panose="02040503050406030204" pitchFamily="18" charset="0"/>
                             </a:rPr>
                           </m:ctrlPr>
@@ -12638,19 +12775,7 @@
                             <a:rPr lang="ar-AE" sz="2000">
                               <a:latin typeface="Cambria Math" panose="02040503050406030204" pitchFamily="18" charset="0"/>
                             </a:rPr>
-                            <m:t>0</m:t>
-                          </m:r>
-                          <m:r>
-                            <a:rPr lang="ar-AE" sz="2000">
-                              <a:latin typeface="Cambria Math" panose="02040503050406030204" pitchFamily="18" charset="0"/>
-                            </a:rPr>
-                            <m:t>,</m:t>
-                          </m:r>
-                          <m:r>
-                            <a:rPr lang="ar-AE" sz="2000">
-                              <a:latin typeface="Cambria Math" panose="02040503050406030204" pitchFamily="18" charset="0"/>
-                            </a:rPr>
-                            <m:t>0</m:t>
+                            <m:t>0,0</m:t>
                           </m:r>
                         </m:e>
                       </m:d>
@@ -12665,10 +12790,7 @@
                 <a:pPr lvl="0"/>
                 <a14:m>
                   <m:oMathPara xmlns:m="http://schemas.openxmlformats.org/officeDocument/2006/math">
-                    <m:oMathParaPr>
-                      <m:jc m:val="centerGroup"/>
-                    </m:oMathParaPr>
-                    <m:oMath xmlns:m="http://schemas.openxmlformats.org/officeDocument/2006/math">
+                    <m:oMath>
                       <m:r>
                         <a:rPr lang="en-US" sz="2000">
                           <a:latin typeface="Cambria Math" panose="02040503050406030204" pitchFamily="18" charset="0"/>
@@ -12714,19 +12836,7 @@
                                   <a:rPr lang="ar-AE" sz="2000">
                                     <a:latin typeface="Cambria Math" panose="02040503050406030204" pitchFamily="18" charset="0"/>
                                   </a:rPr>
-                                  <m:t>1</m:t>
-                                </m:r>
-                                <m:r>
-                                  <a:rPr lang="ar-AE" sz="2000">
-                                    <a:latin typeface="Cambria Math" panose="02040503050406030204" pitchFamily="18" charset="0"/>
-                                  </a:rPr>
-                                  <m:t>.</m:t>
-                                </m:r>
-                                <m:r>
-                                  <a:rPr lang="ar-AE" sz="2000">
-                                    <a:latin typeface="Cambria Math" panose="02040503050406030204" pitchFamily="18" charset="0"/>
-                                  </a:rPr>
-                                  <m:t>0</m:t>
+                                  <m:t>1.0</m:t>
                                 </m:r>
                               </m:e>
                               <m:e>
@@ -12734,19 +12844,7 @@
                                   <a:rPr lang="ar-AE" sz="2000">
                                     <a:latin typeface="Cambria Math" panose="02040503050406030204" pitchFamily="18" charset="0"/>
                                   </a:rPr>
-                                  <m:t>0</m:t>
-                                </m:r>
-                                <m:r>
-                                  <a:rPr lang="ar-AE" sz="2000">
-                                    <a:latin typeface="Cambria Math" panose="02040503050406030204" pitchFamily="18" charset="0"/>
-                                  </a:rPr>
-                                  <m:t>.</m:t>
-                                </m:r>
-                                <m:r>
-                                  <a:rPr lang="ar-AE" sz="2000">
-                                    <a:latin typeface="Cambria Math" panose="02040503050406030204" pitchFamily="18" charset="0"/>
-                                  </a:rPr>
-                                  <m:t>0</m:t>
+                                  <m:t>0.0</m:t>
                                 </m:r>
                               </m:e>
                             </m:mr>
@@ -12756,19 +12854,7 @@
                                   <a:rPr lang="ar-AE" sz="2000">
                                     <a:latin typeface="Cambria Math" panose="02040503050406030204" pitchFamily="18" charset="0"/>
                                   </a:rPr>
-                                  <m:t>0</m:t>
-                                </m:r>
-                                <m:r>
-                                  <a:rPr lang="ar-AE" sz="2000">
-                                    <a:latin typeface="Cambria Math" panose="02040503050406030204" pitchFamily="18" charset="0"/>
-                                  </a:rPr>
-                                  <m:t>.</m:t>
-                                </m:r>
-                                <m:r>
-                                  <a:rPr lang="ar-AE" sz="2000">
-                                    <a:latin typeface="Cambria Math" panose="02040503050406030204" pitchFamily="18" charset="0"/>
-                                  </a:rPr>
-                                  <m:t>0</m:t>
+                                  <m:t>0.0</m:t>
                                 </m:r>
                               </m:e>
                               <m:e>
@@ -12776,19 +12862,7 @@
                                   <a:rPr lang="ar-AE" sz="2000">
                                     <a:latin typeface="Cambria Math" panose="02040503050406030204" pitchFamily="18" charset="0"/>
                                   </a:rPr>
-                                  <m:t>1</m:t>
-                                </m:r>
-                                <m:r>
-                                  <a:rPr lang="ar-AE" sz="2000">
-                                    <a:latin typeface="Cambria Math" panose="02040503050406030204" pitchFamily="18" charset="0"/>
-                                  </a:rPr>
-                                  <m:t>.</m:t>
-                                </m:r>
-                                <m:r>
-                                  <a:rPr lang="ar-AE" sz="2000">
-                                    <a:latin typeface="Cambria Math" panose="02040503050406030204" pitchFamily="18" charset="0"/>
-                                  </a:rPr>
-                                  <m:t>0</m:t>
+                                  <m:t>1.0</m:t>
                                 </m:r>
                               </m:e>
                             </m:mr>
@@ -13134,10 +13208,7 @@
                 <a:pPr/>
                 <a14:m>
                   <m:oMathPara xmlns:m="http://schemas.openxmlformats.org/officeDocument/2006/math">
-                    <m:oMathParaPr>
-                      <m:jc m:val="centerGroup"/>
-                    </m:oMathParaPr>
-                    <m:oMath xmlns:m="http://schemas.openxmlformats.org/officeDocument/2006/math">
+                    <m:oMath>
                       <m:r>
                         <a:rPr lang="en-US" sz="2000">
                           <a:latin typeface="Cambria Math" panose="02040503050406030204" pitchFamily="18" charset="0"/>
@@ -13155,7 +13226,7 @@
                           <m:begChr m:val="["/>
                           <m:endChr m:val="]"/>
                           <m:ctrlPr>
-                            <a:rPr lang="ar-AE" sz="2000" i="1">
+                            <a:rPr lang="ar-AE" sz="2000">
                               <a:latin typeface="Cambria Math" panose="02040503050406030204" pitchFamily="18" charset="0"/>
                             </a:rPr>
                           </m:ctrlPr>
@@ -13165,19 +13236,7 @@
                             <a:rPr lang="ar-AE" sz="2000">
                               <a:latin typeface="Cambria Math" panose="02040503050406030204" pitchFamily="18" charset="0"/>
                             </a:rPr>
-                            <m:t>0</m:t>
-                          </m:r>
-                          <m:r>
-                            <a:rPr lang="ar-AE" sz="2000">
-                              <a:latin typeface="Cambria Math" panose="02040503050406030204" pitchFamily="18" charset="0"/>
-                            </a:rPr>
-                            <m:t>,</m:t>
-                          </m:r>
-                          <m:r>
-                            <a:rPr lang="ar-AE" sz="2000">
-                              <a:latin typeface="Cambria Math" panose="02040503050406030204" pitchFamily="18" charset="0"/>
-                            </a:rPr>
-                            <m:t>0</m:t>
+                            <m:t>0,0</m:t>
                           </m:r>
                         </m:e>
                       </m:d>
@@ -13192,10 +13251,7 @@
                 <a:pPr/>
                 <a14:m>
                   <m:oMathPara xmlns:m="http://schemas.openxmlformats.org/officeDocument/2006/math">
-                    <m:oMathParaPr>
-                      <m:jc m:val="centerGroup"/>
-                    </m:oMathParaPr>
-                    <m:oMath xmlns:m="http://schemas.openxmlformats.org/officeDocument/2006/math">
+                    <m:oMath>
                       <m:r>
                         <a:rPr lang="ar-AE" sz="2000">
                           <a:latin typeface="Cambria Math" panose="02040503050406030204" pitchFamily="18" charset="0"/>
@@ -13241,19 +13297,7 @@
                                   <a:rPr lang="ar-AE" sz="2000">
                                     <a:latin typeface="Cambria Math" panose="02040503050406030204" pitchFamily="18" charset="0"/>
                                   </a:rPr>
-                                  <m:t>1</m:t>
-                                </m:r>
-                                <m:r>
-                                  <a:rPr lang="ar-AE" sz="2000">
-                                    <a:latin typeface="Cambria Math" panose="02040503050406030204" pitchFamily="18" charset="0"/>
-                                  </a:rPr>
-                                  <m:t>.</m:t>
-                                </m:r>
-                                <m:r>
-                                  <a:rPr lang="ar-AE" sz="2000">
-                                    <a:latin typeface="Cambria Math" panose="02040503050406030204" pitchFamily="18" charset="0"/>
-                                  </a:rPr>
-                                  <m:t>0</m:t>
+                                  <m:t>1.0</m:t>
                                 </m:r>
                               </m:e>
                               <m:e>
@@ -13261,19 +13305,7 @@
                                   <a:rPr lang="ar-AE" sz="2000">
                                     <a:latin typeface="Cambria Math" panose="02040503050406030204" pitchFamily="18" charset="0"/>
                                   </a:rPr>
-                                  <m:t>0</m:t>
-                                </m:r>
-                                <m:r>
-                                  <a:rPr lang="ar-AE" sz="2000">
-                                    <a:latin typeface="Cambria Math" panose="02040503050406030204" pitchFamily="18" charset="0"/>
-                                  </a:rPr>
-                                  <m:t>.</m:t>
-                                </m:r>
-                                <m:r>
-                                  <a:rPr lang="ar-AE" sz="2000">
-                                    <a:latin typeface="Cambria Math" panose="02040503050406030204" pitchFamily="18" charset="0"/>
-                                  </a:rPr>
-                                  <m:t>0</m:t>
+                                  <m:t>0.0</m:t>
                                 </m:r>
                               </m:e>
                             </m:mr>
@@ -13283,19 +13315,7 @@
                                   <a:rPr lang="ar-AE" sz="2000">
                                     <a:latin typeface="Cambria Math" panose="02040503050406030204" pitchFamily="18" charset="0"/>
                                   </a:rPr>
-                                  <m:t>0</m:t>
-                                </m:r>
-                                <m:r>
-                                  <a:rPr lang="ar-AE" sz="2000">
-                                    <a:latin typeface="Cambria Math" panose="02040503050406030204" pitchFamily="18" charset="0"/>
-                                  </a:rPr>
-                                  <m:t>.</m:t>
-                                </m:r>
-                                <m:r>
-                                  <a:rPr lang="ar-AE" sz="2000">
-                                    <a:latin typeface="Cambria Math" panose="02040503050406030204" pitchFamily="18" charset="0"/>
-                                  </a:rPr>
-                                  <m:t>0</m:t>
+                                  <m:t>0.0</m:t>
                                 </m:r>
                               </m:e>
                               <m:e>
@@ -13663,10 +13683,7 @@
                 <a:pPr/>
                 <a14:m>
                   <m:oMathPara xmlns:m="http://schemas.openxmlformats.org/officeDocument/2006/math">
-                    <m:oMathParaPr>
-                      <m:jc m:val="centerGroup"/>
-                    </m:oMathParaPr>
-                    <m:oMath xmlns:m="http://schemas.openxmlformats.org/officeDocument/2006/math">
+                    <m:oMath>
                       <m:r>
                         <a:rPr lang="en-US" sz="2000">
                           <a:latin typeface="Cambria Math" panose="02040503050406030204" pitchFamily="18" charset="0"/>
@@ -13684,7 +13701,7 @@
                           <m:begChr m:val="["/>
                           <m:endChr m:val="]"/>
                           <m:ctrlPr>
-                            <a:rPr lang="ar-AE" sz="2000" i="1">
+                            <a:rPr lang="ar-AE" sz="2000">
                               <a:latin typeface="Cambria Math" panose="02040503050406030204" pitchFamily="18" charset="0"/>
                             </a:rPr>
                           </m:ctrlPr>
@@ -13694,19 +13711,7 @@
                             <a:rPr lang="ar-AE" sz="2000">
                               <a:latin typeface="Cambria Math" panose="02040503050406030204" pitchFamily="18" charset="0"/>
                             </a:rPr>
-                            <m:t>0</m:t>
-                          </m:r>
-                          <m:r>
-                            <a:rPr lang="ar-AE" sz="2000">
-                              <a:latin typeface="Cambria Math" panose="02040503050406030204" pitchFamily="18" charset="0"/>
-                            </a:rPr>
-                            <m:t>,</m:t>
-                          </m:r>
-                          <m:r>
-                            <a:rPr lang="ar-AE" sz="2000">
-                              <a:latin typeface="Cambria Math" panose="02040503050406030204" pitchFamily="18" charset="0"/>
-                            </a:rPr>
-                            <m:t>0</m:t>
+                            <m:t>0,0</m:t>
                           </m:r>
                         </m:e>
                       </m:d>
@@ -13721,10 +13726,7 @@
                 <a:pPr/>
                 <a14:m>
                   <m:oMathPara xmlns:m="http://schemas.openxmlformats.org/officeDocument/2006/math">
-                    <m:oMathParaPr>
-                      <m:jc m:val="centerGroup"/>
-                    </m:oMathParaPr>
-                    <m:oMath xmlns:m="http://schemas.openxmlformats.org/officeDocument/2006/math">
+                    <m:oMath>
                       <m:r>
                         <a:rPr lang="ar-AE" sz="2000">
                           <a:latin typeface="Cambria Math" panose="02040503050406030204" pitchFamily="18" charset="0"/>
@@ -13770,19 +13772,7 @@
                                   <a:rPr lang="ar-AE" sz="2000">
                                     <a:latin typeface="Cambria Math" panose="02040503050406030204" pitchFamily="18" charset="0"/>
                                   </a:rPr>
-                                  <m:t>1</m:t>
-                                </m:r>
-                                <m:r>
-                                  <a:rPr lang="ar-AE" sz="2000">
-                                    <a:latin typeface="Cambria Math" panose="02040503050406030204" pitchFamily="18" charset="0"/>
-                                  </a:rPr>
-                                  <m:t>.</m:t>
-                                </m:r>
-                                <m:r>
-                                  <a:rPr lang="ar-AE" sz="2000">
-                                    <a:latin typeface="Cambria Math" panose="02040503050406030204" pitchFamily="18" charset="0"/>
-                                  </a:rPr>
-                                  <m:t>0</m:t>
+                                  <m:t>1.0</m:t>
                                 </m:r>
                               </m:e>
                               <m:e>
@@ -13790,13 +13780,7 @@
                                   <a:rPr lang="ar-AE" sz="2000">
                                     <a:latin typeface="Cambria Math" panose="02040503050406030204" pitchFamily="18" charset="0"/>
                                   </a:rPr>
-                                  <m:t>0</m:t>
-                                </m:r>
-                                <m:r>
-                                  <a:rPr lang="ar-AE" sz="2000">
-                                    <a:latin typeface="Cambria Math" panose="02040503050406030204" pitchFamily="18" charset="0"/>
-                                  </a:rPr>
-                                  <m:t>.</m:t>
+                                  <m:t>0.</m:t>
                                 </m:r>
                                 <m:r>
                                   <a:rPr lang="en-US" sz="2000" b="0" i="1" smtClean="0">
@@ -13812,13 +13796,7 @@
                                   <a:rPr lang="ar-AE" sz="2000">
                                     <a:latin typeface="Cambria Math" panose="02040503050406030204" pitchFamily="18" charset="0"/>
                                   </a:rPr>
-                                  <m:t>0</m:t>
-                                </m:r>
-                                <m:r>
-                                  <a:rPr lang="ar-AE" sz="2000">
-                                    <a:latin typeface="Cambria Math" panose="02040503050406030204" pitchFamily="18" charset="0"/>
-                                  </a:rPr>
-                                  <m:t>.</m:t>
+                                  <m:t>0.</m:t>
                                 </m:r>
                                 <m:r>
                                   <a:rPr lang="en-US" sz="2000" b="0" i="1" smtClean="0">
@@ -13832,19 +13810,7 @@
                                   <a:rPr lang="ar-AE" sz="2000">
                                     <a:latin typeface="Cambria Math" panose="02040503050406030204" pitchFamily="18" charset="0"/>
                                   </a:rPr>
-                                  <m:t>1</m:t>
-                                </m:r>
-                                <m:r>
-                                  <a:rPr lang="ar-AE" sz="2000">
-                                    <a:latin typeface="Cambria Math" panose="02040503050406030204" pitchFamily="18" charset="0"/>
-                                  </a:rPr>
-                                  <m:t>.</m:t>
-                                </m:r>
-                                <m:r>
-                                  <a:rPr lang="ar-AE" sz="2000">
-                                    <a:latin typeface="Cambria Math" panose="02040503050406030204" pitchFamily="18" charset="0"/>
-                                  </a:rPr>
-                                  <m:t>0</m:t>
+                                  <m:t>1.0</m:t>
                                 </m:r>
                               </m:e>
                             </m:mr>
@@ -14335,10 +14301,7 @@
                 <a:pPr/>
                 <a14:m>
                   <m:oMathPara xmlns:m="http://schemas.openxmlformats.org/officeDocument/2006/math">
-                    <m:oMathParaPr>
-                      <m:jc m:val="centerGroup"/>
-                    </m:oMathParaPr>
-                    <m:oMath xmlns:m="http://schemas.openxmlformats.org/officeDocument/2006/math">
+                    <m:oMath>
                       <m:r>
                         <a:rPr lang="en-US" sz="2000">
                           <a:latin typeface="Cambria Math" panose="02040503050406030204" pitchFamily="18" charset="0"/>
@@ -14356,7 +14319,7 @@
                           <m:begChr m:val="["/>
                           <m:endChr m:val="]"/>
                           <m:ctrlPr>
-                            <a:rPr lang="ar-AE" sz="2000" i="1">
+                            <a:rPr lang="ar-AE" sz="2000">
                               <a:latin typeface="Cambria Math" panose="02040503050406030204" pitchFamily="18" charset="0"/>
                             </a:rPr>
                           </m:ctrlPr>
@@ -14366,19 +14329,7 @@
                             <a:rPr lang="ar-AE" sz="2000">
                               <a:latin typeface="Cambria Math" panose="02040503050406030204" pitchFamily="18" charset="0"/>
                             </a:rPr>
-                            <m:t>0</m:t>
-                          </m:r>
-                          <m:r>
-                            <a:rPr lang="ar-AE" sz="2000">
-                              <a:latin typeface="Cambria Math" panose="02040503050406030204" pitchFamily="18" charset="0"/>
-                            </a:rPr>
-                            <m:t>,</m:t>
-                          </m:r>
-                          <m:r>
-                            <a:rPr lang="ar-AE" sz="2000">
-                              <a:latin typeface="Cambria Math" panose="02040503050406030204" pitchFamily="18" charset="0"/>
-                            </a:rPr>
-                            <m:t>0</m:t>
+                            <m:t>0,0</m:t>
                           </m:r>
                         </m:e>
                       </m:d>
@@ -14393,10 +14344,7 @@
                 <a:pPr/>
                 <a14:m>
                   <m:oMathPara xmlns:m="http://schemas.openxmlformats.org/officeDocument/2006/math">
-                    <m:oMathParaPr>
-                      <m:jc m:val="centerGroup"/>
-                    </m:oMathParaPr>
-                    <m:oMath xmlns:m="http://schemas.openxmlformats.org/officeDocument/2006/math">
+                    <m:oMath>
                       <m:r>
                         <a:rPr lang="ar-AE" sz="2000">
                           <a:latin typeface="Cambria Math" panose="02040503050406030204" pitchFamily="18" charset="0"/>
@@ -14442,19 +14390,7 @@
                                   <a:rPr lang="ar-AE" sz="2000">
                                     <a:latin typeface="Cambria Math" panose="02040503050406030204" pitchFamily="18" charset="0"/>
                                   </a:rPr>
-                                  <m:t>1</m:t>
-                                </m:r>
-                                <m:r>
-                                  <a:rPr lang="ar-AE" sz="2000">
-                                    <a:latin typeface="Cambria Math" panose="02040503050406030204" pitchFamily="18" charset="0"/>
-                                  </a:rPr>
-                                  <m:t>.</m:t>
-                                </m:r>
-                                <m:r>
-                                  <a:rPr lang="ar-AE" sz="2000">
-                                    <a:latin typeface="Cambria Math" panose="02040503050406030204" pitchFamily="18" charset="0"/>
-                                  </a:rPr>
-                                  <m:t>0</m:t>
+                                  <m:t>1.0</m:t>
                                 </m:r>
                               </m:e>
                               <m:e>
@@ -14468,13 +14404,7 @@
                                   <a:rPr lang="ar-AE" sz="2000">
                                     <a:latin typeface="Cambria Math" panose="02040503050406030204" pitchFamily="18" charset="0"/>
                                   </a:rPr>
-                                  <m:t>0</m:t>
-                                </m:r>
-                                <m:r>
-                                  <a:rPr lang="ar-AE" sz="2000">
-                                    <a:latin typeface="Cambria Math" panose="02040503050406030204" pitchFamily="18" charset="0"/>
-                                  </a:rPr>
-                                  <m:t>.</m:t>
+                                  <m:t>0.</m:t>
                                 </m:r>
                                 <m:r>
                                   <a:rPr lang="en-US" sz="2000" b="0" i="1" smtClean="0">
@@ -14496,13 +14426,7 @@
                                   <a:rPr lang="ar-AE" sz="2000">
                                     <a:latin typeface="Cambria Math" panose="02040503050406030204" pitchFamily="18" charset="0"/>
                                   </a:rPr>
-                                  <m:t>0</m:t>
-                                </m:r>
-                                <m:r>
-                                  <a:rPr lang="ar-AE" sz="2000">
-                                    <a:latin typeface="Cambria Math" panose="02040503050406030204" pitchFamily="18" charset="0"/>
-                                  </a:rPr>
-                                  <m:t>.</m:t>
+                                  <m:t>0.</m:t>
                                 </m:r>
                                 <m:r>
                                   <a:rPr lang="en-US" sz="2000" b="0" i="1" smtClean="0">
@@ -14516,19 +14440,7 @@
                                   <a:rPr lang="ar-AE" sz="2000">
                                     <a:latin typeface="Cambria Math" panose="02040503050406030204" pitchFamily="18" charset="0"/>
                                   </a:rPr>
-                                  <m:t>1</m:t>
-                                </m:r>
-                                <m:r>
-                                  <a:rPr lang="ar-AE" sz="2000">
-                                    <a:latin typeface="Cambria Math" panose="02040503050406030204" pitchFamily="18" charset="0"/>
-                                  </a:rPr>
-                                  <m:t>.</m:t>
-                                </m:r>
-                                <m:r>
-                                  <a:rPr lang="ar-AE" sz="2000">
-                                    <a:latin typeface="Cambria Math" panose="02040503050406030204" pitchFamily="18" charset="0"/>
-                                  </a:rPr>
-                                  <m:t>0</m:t>
+                                  <m:t>1.0</m:t>
                                 </m:r>
                               </m:e>
                             </m:mr>
@@ -14876,10 +14788,7 @@
                 <a:pPr/>
                 <a14:m>
                   <m:oMathPara xmlns:m="http://schemas.openxmlformats.org/officeDocument/2006/math">
-                    <m:oMathParaPr>
-                      <m:jc m:val="centerGroup"/>
-                    </m:oMathParaPr>
-                    <m:oMath xmlns:m="http://schemas.openxmlformats.org/officeDocument/2006/math">
+                    <m:oMath>
                       <m:r>
                         <a:rPr lang="en-US" sz="2000">
                           <a:latin typeface="Cambria Math" panose="02040503050406030204" pitchFamily="18" charset="0"/>
@@ -14897,7 +14806,7 @@
                           <m:begChr m:val="["/>
                           <m:endChr m:val="]"/>
                           <m:ctrlPr>
-                            <a:rPr lang="ar-AE" sz="2000" i="1">
+                            <a:rPr lang="ar-AE" sz="2000">
                               <a:latin typeface="Cambria Math" panose="02040503050406030204" pitchFamily="18" charset="0"/>
                             </a:rPr>
                           </m:ctrlPr>
@@ -14907,19 +14816,7 @@
                             <a:rPr lang="ar-AE" sz="2000">
                               <a:latin typeface="Cambria Math" panose="02040503050406030204" pitchFamily="18" charset="0"/>
                             </a:rPr>
-                            <m:t>0</m:t>
-                          </m:r>
-                          <m:r>
-                            <a:rPr lang="ar-AE" sz="2000">
-                              <a:latin typeface="Cambria Math" panose="02040503050406030204" pitchFamily="18" charset="0"/>
-                            </a:rPr>
-                            <m:t>,</m:t>
-                          </m:r>
-                          <m:r>
-                            <a:rPr lang="ar-AE" sz="2000">
-                              <a:latin typeface="Cambria Math" panose="02040503050406030204" pitchFamily="18" charset="0"/>
-                            </a:rPr>
-                            <m:t>0</m:t>
+                            <m:t>0,0</m:t>
                           </m:r>
                         </m:e>
                       </m:d>
@@ -14934,10 +14831,7 @@
                 <a:pPr/>
                 <a14:m>
                   <m:oMathPara xmlns:m="http://schemas.openxmlformats.org/officeDocument/2006/math">
-                    <m:oMathParaPr>
-                      <m:jc m:val="centerGroup"/>
-                    </m:oMathParaPr>
-                    <m:oMath xmlns:m="http://schemas.openxmlformats.org/officeDocument/2006/math">
+                    <m:oMath>
                       <m:r>
                         <a:rPr lang="ar-AE" sz="2000">
                           <a:latin typeface="Cambria Math" panose="02040503050406030204" pitchFamily="18" charset="0"/>
@@ -14983,19 +14877,7 @@
                                   <a:rPr lang="ar-AE" sz="2000">
                                     <a:latin typeface="Cambria Math" panose="02040503050406030204" pitchFamily="18" charset="0"/>
                                   </a:rPr>
-                                  <m:t>1</m:t>
-                                </m:r>
-                                <m:r>
-                                  <a:rPr lang="ar-AE" sz="2000">
-                                    <a:latin typeface="Cambria Math" panose="02040503050406030204" pitchFamily="18" charset="0"/>
-                                  </a:rPr>
-                                  <m:t>.</m:t>
-                                </m:r>
-                                <m:r>
-                                  <a:rPr lang="ar-AE" sz="2000">
-                                    <a:latin typeface="Cambria Math" panose="02040503050406030204" pitchFamily="18" charset="0"/>
-                                  </a:rPr>
-                                  <m:t>0</m:t>
+                                  <m:t>1.0</m:t>
                                 </m:r>
                               </m:e>
                               <m:e>
@@ -15003,13 +14885,7 @@
                                   <a:rPr lang="ar-AE" sz="2000">
                                     <a:latin typeface="Cambria Math" panose="02040503050406030204" pitchFamily="18" charset="0"/>
                                   </a:rPr>
-                                  <m:t>0</m:t>
-                                </m:r>
-                                <m:r>
-                                  <a:rPr lang="ar-AE" sz="2000">
-                                    <a:latin typeface="Cambria Math" panose="02040503050406030204" pitchFamily="18" charset="0"/>
-                                  </a:rPr>
-                                  <m:t>.</m:t>
+                                  <m:t>0.</m:t>
                                 </m:r>
                                 <m:r>
                                   <a:rPr lang="en-US" sz="2000" b="0" i="1" smtClean="0">
@@ -15025,13 +14901,7 @@
                                   <a:rPr lang="ar-AE" sz="2000">
                                     <a:latin typeface="Cambria Math" panose="02040503050406030204" pitchFamily="18" charset="0"/>
                                   </a:rPr>
-                                  <m:t>0</m:t>
-                                </m:r>
-                                <m:r>
-                                  <a:rPr lang="ar-AE" sz="2000">
-                                    <a:latin typeface="Cambria Math" panose="02040503050406030204" pitchFamily="18" charset="0"/>
-                                  </a:rPr>
-                                  <m:t>.</m:t>
+                                  <m:t>0.</m:t>
                                 </m:r>
                                 <m:r>
                                   <a:rPr lang="en-US" sz="2000" b="0" i="1" smtClean="0">
@@ -15045,19 +14915,7 @@
                                   <a:rPr lang="ar-AE" sz="2000">
                                     <a:latin typeface="Cambria Math" panose="02040503050406030204" pitchFamily="18" charset="0"/>
                                   </a:rPr>
-                                  <m:t>1</m:t>
-                                </m:r>
-                                <m:r>
-                                  <a:rPr lang="ar-AE" sz="2000">
-                                    <a:latin typeface="Cambria Math" panose="02040503050406030204" pitchFamily="18" charset="0"/>
-                                  </a:rPr>
-                                  <m:t>.</m:t>
-                                </m:r>
-                                <m:r>
-                                  <a:rPr lang="ar-AE" sz="2000">
-                                    <a:latin typeface="Cambria Math" panose="02040503050406030204" pitchFamily="18" charset="0"/>
-                                  </a:rPr>
-                                  <m:t>0</m:t>
+                                  <m:t>1.0</m:t>
                                 </m:r>
                               </m:e>
                             </m:mr>
@@ -15221,13 +15079,7 @@
                       <a:rPr lang="en-US">
                         <a:latin typeface="Cambria Math" panose="02040503050406030204" pitchFamily="18" charset="0"/>
                       </a:rPr>
-                      <m:t>0</m:t>
-                    </m:r>
-                    <m:r>
-                      <a:rPr lang="en-US">
-                        <a:latin typeface="Cambria Math" panose="02040503050406030204" pitchFamily="18" charset="0"/>
-                      </a:rPr>
-                      <m:t>&lt;</m:t>
+                      <m:t>0&lt;</m:t>
                     </m:r>
                     <m:r>
                       <a:rPr lang="en-US">
@@ -15239,13 +15091,7 @@
                       <a:rPr lang="en-US">
                         <a:latin typeface="Cambria Math" panose="02040503050406030204" pitchFamily="18" charset="0"/>
                       </a:rPr>
-                      <m:t>≤</m:t>
-                    </m:r>
-                    <m:r>
-                      <a:rPr lang="en-US">
-                        <a:latin typeface="Cambria Math" panose="02040503050406030204" pitchFamily="18" charset="0"/>
-                      </a:rPr>
-                      <m:t>∞</m:t>
+                      <m:t>≤∞</m:t>
                     </m:r>
                   </m:oMath>
                 </a14:m>
@@ -15273,7 +15119,7 @@
                     <m:oMathParaPr>
                       <m:jc m:val="center"/>
                     </m:oMathParaPr>
-                    <m:oMath xmlns:m="http://schemas.openxmlformats.org/officeDocument/2006/math">
+                    <m:oMath>
                       <m:r>
                         <a:rPr lang="en-US">
                           <a:latin typeface="Cambria Math" panose="02040503050406030204" pitchFamily="18" charset="0"/>
@@ -15283,7 +15129,7 @@
                       <m:d>
                         <m:dPr>
                           <m:ctrlPr>
-                            <a:rPr lang="ar-AE" i="1">
+                            <a:rPr lang="ar-AE">
                               <a:latin typeface="Cambria Math" panose="02040503050406030204" pitchFamily="18" charset="0"/>
                             </a:rPr>
                           </m:ctrlPr>
@@ -15306,7 +15152,7 @@
                       <m:f>
                         <m:fPr>
                           <m:ctrlPr>
-                            <a:rPr lang="ar-AE" i="1" smtClean="0">
+                            <a:rPr lang="ar-AE">
                               <a:latin typeface="Cambria Math" panose="02040503050406030204" pitchFamily="18" charset="0"/>
                             </a:rPr>
                           </m:ctrlPr>
@@ -15331,7 +15177,7 @@
                       <m:f>
                         <m:fPr>
                           <m:ctrlPr>
-                            <a:rPr lang="ar-AE" i="1">
+                            <a:rPr lang="ar-AE">
                               <a:latin typeface="Cambria Math" panose="02040503050406030204" pitchFamily="18" charset="0"/>
                             </a:rPr>
                           </m:ctrlPr>
@@ -15354,7 +15200,7 @@
                           <m:rad>
                             <m:radPr>
                               <m:ctrlPr>
-                                <a:rPr lang="ar-AE" i="1">
+                                <a:rPr lang="ar-AE" b="0" i="1" smtClean="0">
                                   <a:latin typeface="Cambria Math" panose="02040503050406030204" pitchFamily="18" charset="0"/>
                                 </a:rPr>
                               </m:ctrlPr>
@@ -15399,7 +15245,7 @@
                       <m:f>
                         <m:fPr>
                           <m:ctrlPr>
-                            <a:rPr lang="ar-AE" i="1">
+                            <a:rPr lang="ar-AE">
                               <a:latin typeface="Cambria Math" panose="02040503050406030204" pitchFamily="18" charset="0"/>
                             </a:rPr>
                           </m:ctrlPr>
@@ -15423,7 +15269,7 @@
                               <m:d>
                                 <m:dPr>
                                   <m:ctrlPr>
-                                    <a:rPr lang="ar-AE" i="1">
+                                    <a:rPr lang="ar-AE">
                                       <a:latin typeface="Cambria Math" panose="02040503050406030204" pitchFamily="18" charset="0"/>
                                     </a:rPr>
                                   </m:ctrlPr>
@@ -15438,7 +15284,7 @@
                                   <m:d>
                                     <m:dPr>
                                       <m:ctrlPr>
-                                        <a:rPr lang="ar-AE" i="1">
+                                        <a:rPr lang="ar-AE">
                                           <a:latin typeface="Cambria Math" panose="02040503050406030204" pitchFamily="18" charset="0"/>
                                         </a:rPr>
                                       </m:ctrlPr>
@@ -15487,7 +15333,7 @@
                           <m:sSup>
                             <m:sSupPr>
                               <m:ctrlPr>
-                                <a:rPr lang="ar-AE" i="1">
+                                <a:rPr lang="ar-AE">
                                   <a:latin typeface="Cambria Math" panose="02040503050406030204" pitchFamily="18" charset="0"/>
                                 </a:rPr>
                               </m:ctrlPr>
@@ -15784,10 +15630,7 @@
                 </a:pPr>
                 <a14:m>
                   <m:oMathPara xmlns:m="http://schemas.openxmlformats.org/officeDocument/2006/math">
-                    <m:oMathParaPr>
-                      <m:jc m:val="centerGroup"/>
-                    </m:oMathParaPr>
-                    <m:oMath xmlns:m="http://schemas.openxmlformats.org/officeDocument/2006/math">
+                    <m:oMath>
                       <m:r>
                         <a:rPr lang="en-US" b="0" i="1" smtClean="0">
                           <a:latin typeface="Cambria Math" panose="02040503050406030204" pitchFamily="18" charset="0"/>
@@ -15833,8 +15676,9 @@
                       <m:f>
                         <m:fPr>
                           <m:ctrlPr>
-                            <a:rPr lang="en-US" b="0" i="1" smtClean="0">
-                              <a:latin typeface="Cambria Math" panose="02040503050406030204" pitchFamily="18" charset="0"/>
+                            <a:rPr lang="el-GR" b="0" i="1" smtClean="0">
+                              <a:latin typeface="Cambria Math" panose="02040503050406030204" pitchFamily="18" charset="0"/>
+                              <a:ea typeface="Cambria Math" panose="02040503050406030204" pitchFamily="18" charset="0"/>
                             </a:rPr>
                           </m:ctrlPr>
                         </m:fPr>
@@ -15881,14 +15725,7 @@
                                       <a:latin typeface="Cambria Math" panose="02040503050406030204" pitchFamily="18" charset="0"/>
                                       <a:ea typeface="Cambria Math" panose="02040503050406030204" pitchFamily="18" charset="0"/>
                                     </a:rPr>
-                                    <m:t>+</m:t>
-                                  </m:r>
-                                  <m:r>
-                                    <a:rPr lang="en-US" b="0" i="1" smtClean="0">
-                                      <a:latin typeface="Cambria Math" panose="02040503050406030204" pitchFamily="18" charset="0"/>
-                                      <a:ea typeface="Cambria Math" panose="02040503050406030204" pitchFamily="18" charset="0"/>
-                                    </a:rPr>
-                                    <m:t>1</m:t>
+                                    <m:t>+1</m:t>
                                   </m:r>
                                 </m:num>
                                 <m:den>
@@ -15986,7 +15823,7 @@
                       <m:sSup>
                         <m:sSupPr>
                           <m:ctrlPr>
-                            <a:rPr lang="en-US" b="0" i="1" smtClean="0">
+                            <a:rPr lang="en-US" i="1">
                               <a:latin typeface="Cambria Math" panose="02040503050406030204" pitchFamily="18" charset="0"/>
                             </a:rPr>
                           </m:ctrlPr>
@@ -16005,13 +15842,7 @@
                                 <a:rPr lang="en-US" i="1">
                                   <a:latin typeface="Cambria Math" panose="02040503050406030204" pitchFamily="18" charset="0"/>
                                 </a:rPr>
-                                <m:t>1</m:t>
-                              </m:r>
-                              <m:r>
-                                <a:rPr lang="en-US" i="1">
-                                  <a:latin typeface="Cambria Math" panose="02040503050406030204" pitchFamily="18" charset="0"/>
-                                </a:rPr>
-                                <m:t>+</m:t>
+                                <m:t>1+</m:t>
                               </m:r>
                               <m:f>
                                 <m:fPr>
@@ -16073,6 +15904,7 @@
                               <m:ctrlPr>
                                 <a:rPr lang="en-US" b="0" i="1" smtClean="0">
                                   <a:latin typeface="Cambria Math" panose="02040503050406030204" pitchFamily="18" charset="0"/>
+                                  <a:ea typeface="Cambria Math" panose="02040503050406030204" pitchFamily="18" charset="0"/>
                                 </a:rPr>
                               </m:ctrlPr>
                             </m:fPr>
@@ -16089,14 +15921,7 @@
                                   <a:latin typeface="Cambria Math" panose="02040503050406030204" pitchFamily="18" charset="0"/>
                                   <a:ea typeface="Cambria Math" panose="02040503050406030204" pitchFamily="18" charset="0"/>
                                 </a:rPr>
-                                <m:t>+</m:t>
-                              </m:r>
-                              <m:r>
-                                <a:rPr lang="en-US" b="0" i="1" smtClean="0">
-                                  <a:latin typeface="Cambria Math" panose="02040503050406030204" pitchFamily="18" charset="0"/>
-                                  <a:ea typeface="Cambria Math" panose="02040503050406030204" pitchFamily="18" charset="0"/>
-                                </a:rPr>
-                                <m:t>1</m:t>
+                                <m:t>+1</m:t>
                               </m:r>
                             </m:num>
                             <m:den>
@@ -16121,27 +15946,12 @@
                 </a:pPr>
                 <a14:m>
                   <m:oMathPara xmlns:m="http://schemas.openxmlformats.org/officeDocument/2006/math">
-                    <m:oMathParaPr>
-                      <m:jc m:val="centerGroup"/>
-                    </m:oMathParaPr>
-                    <m:oMath xmlns:m="http://schemas.openxmlformats.org/officeDocument/2006/math">
+                    <m:oMath>
                       <m:r>
                         <a:rPr lang="en-US" b="0" i="1" smtClean="0">
                           <a:latin typeface="Cambria Math" panose="02040503050406030204" pitchFamily="18" charset="0"/>
                         </a:rPr>
-                        <m:t>𝑤</m:t>
-                      </m:r>
-                      <m:r>
-                        <a:rPr lang="en-US" b="0" i="1" smtClean="0">
-                          <a:latin typeface="Cambria Math" panose="02040503050406030204" pitchFamily="18" charset="0"/>
-                        </a:rPr>
-                        <m:t>h</m:t>
-                      </m:r>
-                      <m:r>
-                        <a:rPr lang="en-US" b="0" i="1" smtClean="0">
-                          <a:latin typeface="Cambria Math" panose="02040503050406030204" pitchFamily="18" charset="0"/>
-                        </a:rPr>
-                        <m:t>𝑒𝑟𝑒</m:t>
+                        <m:t>𝑤ℎ𝑒𝑟𝑒</m:t>
                       </m:r>
                       <m:r>
                         <a:rPr lang="en-US" b="0" i="1" smtClean="0">
@@ -16162,7 +15972,7 @@
                       <m:d>
                         <m:dPr>
                           <m:ctrlPr>
-                            <a:rPr lang="el-GR" i="1">
+                            <a:rPr lang="en-US" b="0" i="1" smtClean="0">
                               <a:latin typeface="Cambria Math" panose="02040503050406030204" pitchFamily="18" charset="0"/>
                               <a:ea typeface="Cambria Math" panose="02040503050406030204" pitchFamily="18" charset="0"/>
                             </a:rPr>
@@ -16379,13 +16189,7 @@
                       <a:rPr>
                         <a:latin typeface="Cambria Math" panose="02040503050406030204" pitchFamily="18" charset="0"/>
                       </a:rPr>
-                      <m:t>→</m:t>
-                    </m:r>
-                    <m:r>
-                      <a:rPr>
-                        <a:latin typeface="Cambria Math" panose="02040503050406030204" pitchFamily="18" charset="0"/>
-                      </a:rPr>
-                      <m:t>∞</m:t>
+                      <m:t>→∞</m:t>
                     </m:r>
                   </m:oMath>
                 </a14:m>
@@ -16523,8 +16327,9 @@
                     <m:sSup>
                       <m:sSupPr>
                         <m:ctrlPr>
-                          <a:rPr lang="en-US" i="1" smtClean="0">
+                          <a:rPr lang="el-GR" i="1" smtClean="0">
                             <a:latin typeface="Cambria Math" panose="02040503050406030204" pitchFamily="18" charset="0"/>
+                            <a:ea typeface="Cambria Math" panose="02040503050406030204" pitchFamily="18" charset="0"/>
                           </a:rPr>
                         </m:ctrlPr>
                       </m:sSupPr>
@@ -16700,14 +16505,7 @@
                         <a:latin typeface="Cambria Math" panose="02040503050406030204" pitchFamily="18" charset="0"/>
                         <a:ea typeface="Cambria Math" panose="02040503050406030204" pitchFamily="18" charset="0"/>
                       </a:rPr>
-                      <m:t>≤</m:t>
-                    </m:r>
-                    <m:r>
-                      <a:rPr lang="en-US" sz="2400" b="0" i="1" smtClean="0">
-                        <a:latin typeface="Cambria Math" panose="02040503050406030204" pitchFamily="18" charset="0"/>
-                        <a:ea typeface="Cambria Math" panose="02040503050406030204" pitchFamily="18" charset="0"/>
-                      </a:rPr>
-                      <m:t>∞</m:t>
+                      <m:t>≤∞</m:t>
                     </m:r>
                   </m:oMath>
                 </a14:m>
@@ -16829,8 +16627,9 @@
                     <m:sSup>
                       <m:sSupPr>
                         <m:ctrlPr>
-                          <a:rPr lang="en-US" i="1" smtClean="0">
+                          <a:rPr lang="el-GR" i="1" smtClean="0">
                             <a:latin typeface="Cambria Math" panose="02040503050406030204" pitchFamily="18" charset="0"/>
+                            <a:ea typeface="Cambria Math" panose="02040503050406030204" pitchFamily="18" charset="0"/>
                           </a:rPr>
                         </m:ctrlPr>
                       </m:sSupPr>
@@ -16975,10 +16774,7 @@
                 </a:pPr>
                 <a14:m>
                   <m:oMathPara xmlns:m="http://schemas.openxmlformats.org/officeDocument/2006/math">
-                    <m:oMathParaPr>
-                      <m:jc m:val="centerGroup"/>
-                    </m:oMathParaPr>
-                    <m:oMath xmlns:m="http://schemas.openxmlformats.org/officeDocument/2006/math">
+                    <m:oMath>
                       <m:r>
                         <a:rPr lang="en-US" b="0" i="1" smtClean="0">
                           <a:latin typeface="Cambria Math" panose="02040503050406030204" pitchFamily="18" charset="0"/>
@@ -17067,14 +16863,7 @@
                                   <a:latin typeface="Cambria Math" panose="02040503050406030204" pitchFamily="18" charset="0"/>
                                   <a:ea typeface="Cambria Math" panose="02040503050406030204" pitchFamily="18" charset="0"/>
                                 </a:rPr>
-                                <m:t>−</m:t>
-                              </m:r>
-                              <m:r>
-                                <a:rPr lang="en-US" b="0" i="1" smtClean="0">
-                                  <a:latin typeface="Cambria Math" panose="02040503050406030204" pitchFamily="18" charset="0"/>
-                                  <a:ea typeface="Cambria Math" panose="02040503050406030204" pitchFamily="18" charset="0"/>
-                                </a:rPr>
-                                <m:t>1</m:t>
+                                <m:t>−1</m:t>
                               </m:r>
                             </m:sup>
                           </m:sSup>
@@ -17208,27 +16997,12 @@
                 </a:pPr>
                 <a14:m>
                   <m:oMathPara xmlns:m="http://schemas.openxmlformats.org/officeDocument/2006/math">
-                    <m:oMathParaPr>
-                      <m:jc m:val="centerGroup"/>
-                    </m:oMathParaPr>
-                    <m:oMath xmlns:m="http://schemas.openxmlformats.org/officeDocument/2006/math">
+                    <m:oMath>
                       <m:r>
                         <a:rPr lang="en-US" b="0" i="1" smtClean="0">
                           <a:latin typeface="Cambria Math" panose="02040503050406030204" pitchFamily="18" charset="0"/>
                         </a:rPr>
-                        <m:t>𝑤</m:t>
-                      </m:r>
-                      <m:r>
-                        <a:rPr lang="en-US" b="0" i="1" smtClean="0">
-                          <a:latin typeface="Cambria Math" panose="02040503050406030204" pitchFamily="18" charset="0"/>
-                        </a:rPr>
-                        <m:t>h</m:t>
-                      </m:r>
-                      <m:r>
-                        <a:rPr lang="en-US" b="0" i="1" smtClean="0">
-                          <a:latin typeface="Cambria Math" panose="02040503050406030204" pitchFamily="18" charset="0"/>
-                        </a:rPr>
-                        <m:t>𝑒𝑟𝑒</m:t>
+                        <m:t>𝑤ℎ𝑒𝑟𝑒</m:t>
                       </m:r>
                       <m:r>
                         <a:rPr lang="en-US" b="0" i="1" smtClean="0">
@@ -17247,21 +17021,7 @@
                           <a:latin typeface="Cambria Math" panose="02040503050406030204" pitchFamily="18" charset="0"/>
                           <a:ea typeface="Cambria Math" panose="02040503050406030204" pitchFamily="18" charset="0"/>
                         </a:rPr>
-                        <m:t>≥</m:t>
-                      </m:r>
-                      <m:r>
-                        <a:rPr lang="en-US" b="0" i="1" smtClean="0">
-                          <a:latin typeface="Cambria Math" panose="02040503050406030204" pitchFamily="18" charset="0"/>
-                          <a:ea typeface="Cambria Math" panose="02040503050406030204" pitchFamily="18" charset="0"/>
-                        </a:rPr>
-                        <m:t>0</m:t>
-                      </m:r>
-                      <m:r>
-                        <a:rPr lang="en-US" b="0" i="1" smtClean="0">
-                          <a:latin typeface="Cambria Math" panose="02040503050406030204" pitchFamily="18" charset="0"/>
-                          <a:ea typeface="Cambria Math" panose="02040503050406030204" pitchFamily="18" charset="0"/>
-                        </a:rPr>
-                        <m:t>, </m:t>
+                        <m:t>≥0, </m:t>
                       </m:r>
                       <m:r>
                         <a:rPr lang="en-US" b="0" i="1" smtClean="0">
@@ -17275,21 +17035,7 @@
                           <a:latin typeface="Cambria Math" panose="02040503050406030204" pitchFamily="18" charset="0"/>
                           <a:ea typeface="Cambria Math" panose="02040503050406030204" pitchFamily="18" charset="0"/>
                         </a:rPr>
-                        <m:t>&gt;</m:t>
-                      </m:r>
-                      <m:r>
-                        <a:rPr lang="en-US" b="0" i="1" smtClean="0">
-                          <a:latin typeface="Cambria Math" panose="02040503050406030204" pitchFamily="18" charset="0"/>
-                          <a:ea typeface="Cambria Math" panose="02040503050406030204" pitchFamily="18" charset="0"/>
-                        </a:rPr>
-                        <m:t>0</m:t>
-                      </m:r>
-                      <m:r>
-                        <a:rPr lang="en-US" b="0" i="1" smtClean="0">
-                          <a:latin typeface="Cambria Math" panose="02040503050406030204" pitchFamily="18" charset="0"/>
-                          <a:ea typeface="Cambria Math" panose="02040503050406030204" pitchFamily="18" charset="0"/>
-                        </a:rPr>
-                        <m:t>,</m:t>
+                        <m:t>&gt;0,</m:t>
                       </m:r>
                       <m:r>
                         <a:rPr lang="en-US" b="0" i="1" smtClean="0">
@@ -17303,34 +17049,7 @@
                           <a:latin typeface="Cambria Math" panose="02040503050406030204" pitchFamily="18" charset="0"/>
                           <a:ea typeface="Cambria Math" panose="02040503050406030204" pitchFamily="18" charset="0"/>
                         </a:rPr>
-                        <m:t>&gt;</m:t>
-                      </m:r>
-                      <m:r>
-                        <a:rPr lang="en-US" b="0" i="1" smtClean="0">
-                          <a:latin typeface="Cambria Math" panose="02040503050406030204" pitchFamily="18" charset="0"/>
-                          <a:ea typeface="Cambria Math" panose="02040503050406030204" pitchFamily="18" charset="0"/>
-                        </a:rPr>
-                        <m:t>0</m:t>
-                      </m:r>
-                      <m:r>
-                        <a:rPr lang="en-US" b="0" i="0" smtClean="0">
-                          <a:latin typeface="Cambria Math" panose="02040503050406030204" pitchFamily="18" charset="0"/>
-                          <a:ea typeface="Cambria Math" panose="02040503050406030204" pitchFamily="18" charset="0"/>
-                        </a:rPr>
-                        <m:t>,</m:t>
-                      </m:r>
-                      <m:r>
-                        <a:rPr lang="en-US" b="0" i="1" smtClean="0">
-                          <a:latin typeface="Cambria Math" panose="02040503050406030204" pitchFamily="18" charset="0"/>
-                          <a:ea typeface="Cambria Math" panose="02040503050406030204" pitchFamily="18" charset="0"/>
-                        </a:rPr>
-                        <m:t> </m:t>
-                      </m:r>
-                      <m:r>
-                        <a:rPr lang="en-US" b="0" i="1" smtClean="0">
-                          <a:latin typeface="Cambria Math" panose="02040503050406030204" pitchFamily="18" charset="0"/>
-                        </a:rPr>
-                        <m:t> </m:t>
+                        <m:t>&gt;0,  </m:t>
                       </m:r>
                       <m:r>
                         <m:rPr>
@@ -17345,7 +17064,7 @@
                       <m:d>
                         <m:dPr>
                           <m:ctrlPr>
-                            <a:rPr lang="el-GR" i="1">
+                            <a:rPr lang="en-US" b="0" i="1" smtClean="0">
                               <a:latin typeface="Cambria Math" panose="02040503050406030204" pitchFamily="18" charset="0"/>
                               <a:ea typeface="Cambria Math" panose="02040503050406030204" pitchFamily="18" charset="0"/>
                             </a:rPr>
@@ -17413,21 +17132,7 @@
                         <a:latin typeface="Cambria Math" panose="02040503050406030204" pitchFamily="18" charset="0"/>
                         <a:ea typeface="Cambria Math" panose="02040503050406030204" pitchFamily="18" charset="0"/>
                       </a:rPr>
-                      <m:t>=</m:t>
-                    </m:r>
-                    <m:r>
-                      <a:rPr lang="en-US" b="0" i="1" smtClean="0">
-                        <a:latin typeface="Cambria Math" panose="02040503050406030204" pitchFamily="18" charset="0"/>
-                        <a:ea typeface="Cambria Math" panose="02040503050406030204" pitchFamily="18" charset="0"/>
-                      </a:rPr>
-                      <m:t>1</m:t>
-                    </m:r>
-                    <m:r>
-                      <a:rPr lang="en-US" b="0" i="1" smtClean="0">
-                        <a:latin typeface="Cambria Math" panose="02040503050406030204" pitchFamily="18" charset="0"/>
-                        <a:ea typeface="Cambria Math" panose="02040503050406030204" pitchFamily="18" charset="0"/>
-                      </a:rPr>
-                      <m:t>/</m:t>
+                      <m:t>=1/</m:t>
                     </m:r>
                     <m:r>
                       <a:rPr lang="en-US" i="1" smtClean="0">
@@ -17539,8 +17244,9 @@
                     <m:sSup>
                       <m:sSupPr>
                         <m:ctrlPr>
-                          <a:rPr lang="en-US" i="1" smtClean="0">
+                          <a:rPr lang="el-GR" i="1" smtClean="0">
                             <a:latin typeface="Cambria Math" panose="02040503050406030204" pitchFamily="18" charset="0"/>
+                            <a:ea typeface="Cambria Math" panose="02040503050406030204" pitchFamily="18" charset="0"/>
                           </a:rPr>
                         </m:ctrlPr>
                       </m:sSupPr>
@@ -17655,7 +17361,7 @@
                     <m:d>
                       <m:dPr>
                         <m:ctrlPr>
-                          <a:rPr lang="el-GR" i="1" smtClean="0">
+                          <a:rPr lang="en-US" b="0" i="1" smtClean="0">
                             <a:latin typeface="Cambria Math" panose="02040503050406030204" pitchFamily="18" charset="0"/>
                             <a:ea typeface="Cambria Math" panose="02040503050406030204" pitchFamily="18" charset="0"/>
                           </a:rPr>
@@ -17667,14 +17373,7 @@
                             <a:latin typeface="Cambria Math" panose="02040503050406030204" pitchFamily="18" charset="0"/>
                             <a:ea typeface="Cambria Math" panose="02040503050406030204" pitchFamily="18" charset="0"/>
                           </a:rPr>
-                          <m:t>1</m:t>
-                        </m:r>
-                        <m:r>
-                          <a:rPr lang="en-US" b="0" i="1" smtClean="0">
-                            <a:latin typeface="Cambria Math" panose="02040503050406030204" pitchFamily="18" charset="0"/>
-                            <a:ea typeface="Cambria Math" panose="02040503050406030204" pitchFamily="18" charset="0"/>
-                          </a:rPr>
-                          <m:t>,</m:t>
+                          <m:t>1,</m:t>
                         </m:r>
                         <m:r>
                           <a:rPr lang="en-US" b="0" i="1" smtClean="0">
@@ -17721,14 +17420,11 @@
                 </a:pPr>
                 <a14:m>
                   <m:oMathPara xmlns:m="http://schemas.openxmlformats.org/officeDocument/2006/math">
-                    <m:oMathParaPr>
-                      <m:jc m:val="centerGroup"/>
-                    </m:oMathParaPr>
-                    <m:oMath xmlns:m="http://schemas.openxmlformats.org/officeDocument/2006/math">
+                    <m:oMath>
                       <m:func>
                         <m:funcPr>
                           <m:ctrlPr>
-                            <a:rPr lang="en-US" b="0" i="1" smtClean="0">
+                            <a:rPr lang="en-US" b="0" i="0" smtClean="0">
                               <a:latin typeface="Cambria Math" panose="02040503050406030204" pitchFamily="18" charset="0"/>
                             </a:rPr>
                           </m:ctrlPr>
@@ -17773,8 +17469,9 @@
                       <m:sSup>
                         <m:sSupPr>
                           <m:ctrlPr>
-                            <a:rPr lang="en-US" b="0" i="1" smtClean="0">
-                              <a:latin typeface="Cambria Math" panose="02040503050406030204" pitchFamily="18" charset="0"/>
+                            <a:rPr lang="en-US" i="1">
+                              <a:latin typeface="Cambria Math" panose="02040503050406030204" pitchFamily="18" charset="0"/>
+                              <a:ea typeface="Cambria Math" panose="02040503050406030204" pitchFamily="18" charset="0"/>
                             </a:rPr>
                           </m:ctrlPr>
                         </m:sSupPr>
@@ -17867,28 +17564,7 @@
                             <a:latin typeface="Cambria Math" panose="02040503050406030204" pitchFamily="18" charset="0"/>
                             <a:ea typeface="Cambria Math" panose="02040503050406030204" pitchFamily="18" charset="0"/>
                           </a:rPr>
-                          <m:t>/</m:t>
-                        </m:r>
-                        <m:r>
-                          <a:rPr lang="en-US" b="0" i="1" smtClean="0">
-                            <a:latin typeface="Cambria Math" panose="02040503050406030204" pitchFamily="18" charset="0"/>
-                            <a:ea typeface="Cambria Math" panose="02040503050406030204" pitchFamily="18" charset="0"/>
-                          </a:rPr>
-                          <m:t>2</m:t>
-                        </m:r>
-                        <m:r>
-                          <a:rPr lang="en-US" b="0" i="1" smtClean="0">
-                            <a:latin typeface="Cambria Math" panose="02040503050406030204" pitchFamily="18" charset="0"/>
-                            <a:ea typeface="Cambria Math" panose="02040503050406030204" pitchFamily="18" charset="0"/>
-                          </a:rPr>
-                          <m:t>,</m:t>
-                        </m:r>
-                        <m:r>
-                          <a:rPr lang="en-US" b="0" i="1" smtClean="0">
-                            <a:latin typeface="Cambria Math" panose="02040503050406030204" pitchFamily="18" charset="0"/>
-                            <a:ea typeface="Cambria Math" panose="02040503050406030204" pitchFamily="18" charset="0"/>
-                          </a:rPr>
-                          <m:t>2</m:t>
+                          <m:t>/2,2</m:t>
                         </m:r>
                       </m:e>
                     </m:d>
@@ -17902,8 +17578,9 @@
                     <m:sSup>
                       <m:sSupPr>
                         <m:ctrlPr>
-                          <a:rPr lang="en-US" i="1">
+                          <a:rPr lang="el-GR" i="1">
                             <a:latin typeface="Cambria Math" panose="02040503050406030204" pitchFamily="18" charset="0"/>
+                            <a:ea typeface="Cambria Math" panose="02040503050406030204" pitchFamily="18" charset="0"/>
                           </a:rPr>
                         </m:ctrlPr>
                       </m:sSupPr>
@@ -17991,8 +17668,9 @@
                     <m:sSup>
                       <m:sSupPr>
                         <m:ctrlPr>
-                          <a:rPr lang="en-US" i="1" smtClean="0">
+                          <a:rPr lang="el-GR" i="1" smtClean="0">
                             <a:latin typeface="Cambria Math" panose="02040503050406030204" pitchFamily="18" charset="0"/>
+                            <a:ea typeface="Cambria Math" panose="02040503050406030204" pitchFamily="18" charset="0"/>
                           </a:rPr>
                         </m:ctrlPr>
                       </m:sSupPr>
@@ -18041,7 +17719,7 @@
                     <m:sSubSup>
                       <m:sSubSupPr>
                         <m:ctrlPr>
-                          <a:rPr lang="en-US" i="1" smtClean="0">
+                          <a:rPr lang="en-US" b="0" i="1" smtClean="0">
                             <a:latin typeface="Cambria Math" panose="02040503050406030204" pitchFamily="18" charset="0"/>
                           </a:rPr>
                         </m:ctrlPr>
@@ -18091,10 +17769,7 @@
                 </a:pPr>
                 <a14:m>
                   <m:oMathPara xmlns:m="http://schemas.openxmlformats.org/officeDocument/2006/math">
-                    <m:oMathParaPr>
-                      <m:jc m:val="centerGroup"/>
-                    </m:oMathParaPr>
-                    <m:oMath xmlns:m="http://schemas.openxmlformats.org/officeDocument/2006/math">
+                    <m:oMath>
                       <m:sSubSup>
                         <m:sSubSupPr>
                           <m:ctrlPr>
@@ -18194,14 +17869,7 @@
                                   <a:latin typeface="Cambria Math" panose="02040503050406030204" pitchFamily="18" charset="0"/>
                                   <a:ea typeface="Cambria Math" panose="02040503050406030204" pitchFamily="18" charset="0"/>
                                 </a:rPr>
-                                <m:t>−</m:t>
-                              </m:r>
-                              <m:r>
-                                <a:rPr lang="en-US" b="0" i="1" smtClean="0">
-                                  <a:latin typeface="Cambria Math" panose="02040503050406030204" pitchFamily="18" charset="0"/>
-                                  <a:ea typeface="Cambria Math" panose="02040503050406030204" pitchFamily="18" charset="0"/>
-                                </a:rPr>
-                                <m:t>1</m:t>
+                                <m:t>−1</m:t>
                               </m:r>
                             </m:sup>
                           </m:sSup>
@@ -18210,6 +17878,7 @@
                               <m:ctrlPr>
                                 <a:rPr lang="en-US" i="1">
                                   <a:latin typeface="Cambria Math" panose="02040503050406030204" pitchFamily="18" charset="0"/>
+                                  <a:ea typeface="Cambria Math" panose="02040503050406030204" pitchFamily="18" charset="0"/>
                                 </a:rPr>
                               </m:ctrlPr>
                             </m:sSupPr>
@@ -18249,7 +17918,7 @@
                           <m:sSup>
                             <m:sSupPr>
                               <m:ctrlPr>
-                                <a:rPr lang="en-US" i="1" smtClean="0">
+                                <a:rPr lang="en-US" i="1">
                                   <a:latin typeface="Cambria Math" panose="02040503050406030204" pitchFamily="18" charset="0"/>
                                   <a:ea typeface="Cambria Math" panose="02040503050406030204" pitchFamily="18" charset="0"/>
                                 </a:rPr>
@@ -18277,14 +17946,7 @@
                                   <a:latin typeface="Cambria Math" panose="02040503050406030204" pitchFamily="18" charset="0"/>
                                   <a:ea typeface="Cambria Math" panose="02040503050406030204" pitchFamily="18" charset="0"/>
                                 </a:rPr>
-                                <m:t>/</m:t>
-                              </m:r>
-                              <m:r>
-                                <a:rPr lang="en-US" b="0" i="1" smtClean="0">
-                                  <a:latin typeface="Cambria Math" panose="02040503050406030204" pitchFamily="18" charset="0"/>
-                                  <a:ea typeface="Cambria Math" panose="02040503050406030204" pitchFamily="18" charset="0"/>
-                                </a:rPr>
-                                <m:t>2</m:t>
+                                <m:t>/2</m:t>
                               </m:r>
                             </m:sup>
                           </m:sSup>
@@ -18327,14 +17989,7 @@
                                   <a:latin typeface="Cambria Math" panose="02040503050406030204" pitchFamily="18" charset="0"/>
                                   <a:ea typeface="Cambria Math" panose="02040503050406030204" pitchFamily="18" charset="0"/>
                                 </a:rPr>
-                                <m:t>/</m:t>
-                              </m:r>
-                              <m:r>
-                                <a:rPr lang="en-US" b="0" i="1" smtClean="0">
-                                  <a:latin typeface="Cambria Math" panose="02040503050406030204" pitchFamily="18" charset="0"/>
-                                  <a:ea typeface="Cambria Math" panose="02040503050406030204" pitchFamily="18" charset="0"/>
-                                </a:rPr>
-                                <m:t>2</m:t>
+                                <m:t>/2</m:t>
                               </m:r>
                             </m:e>
                           </m:d>
@@ -18515,8 +18170,9 @@
                     <m:sSup>
                       <m:sSupPr>
                         <m:ctrlPr>
-                          <a:rPr lang="en-US" i="1" smtClean="0">
+                          <a:rPr lang="el-GR" i="1" smtClean="0">
                             <a:latin typeface="Cambria Math" panose="02040503050406030204" pitchFamily="18" charset="0"/>
+                            <a:ea typeface="Cambria Math" panose="02040503050406030204" pitchFamily="18" charset="0"/>
                           </a:rPr>
                         </m:ctrlPr>
                       </m:sSupPr>
@@ -18617,8 +18273,9 @@
                     <m:sSup>
                       <m:sSupPr>
                         <m:ctrlPr>
-                          <a:rPr lang="en-US" i="1" smtClean="0">
+                          <a:rPr lang="el-GR" i="1" smtClean="0">
                             <a:latin typeface="Cambria Math" panose="02040503050406030204" pitchFamily="18" charset="0"/>
+                            <a:ea typeface="Cambria Math" panose="02040503050406030204" pitchFamily="18" charset="0"/>
                           </a:rPr>
                         </m:ctrlPr>
                       </m:sSupPr>
@@ -18862,7 +18519,7 @@
                     <m:oMathParaPr>
                       <m:jc m:val="center"/>
                     </m:oMathParaPr>
-                    <m:oMath xmlns:m="http://schemas.openxmlformats.org/officeDocument/2006/math">
+                    <m:oMath>
                       <m:r>
                         <a:rPr lang="en-US">
                           <a:latin typeface="Cambria Math" panose="02040503050406030204" pitchFamily="18" charset="0"/>
@@ -18872,7 +18529,7 @@
                       <m:d>
                         <m:dPr>
                           <m:ctrlPr>
-                            <a:rPr lang="ar-AE" i="1">
+                            <a:rPr lang="ar-AE">
                               <a:latin typeface="Cambria Math" panose="02040503050406030204" pitchFamily="18" charset="0"/>
                             </a:rPr>
                           </m:ctrlPr>
@@ -19045,8 +18702,9 @@
                     <m:sSup>
                       <m:sSupPr>
                         <m:ctrlPr>
-                          <a:rPr lang="en-US" i="1" smtClean="0">
+                          <a:rPr lang="el-GR" i="1" smtClean="0">
                             <a:latin typeface="Cambria Math" panose="02040503050406030204" pitchFamily="18" charset="0"/>
+                            <a:ea typeface="Cambria Math" panose="02040503050406030204" pitchFamily="18" charset="0"/>
                           </a:rPr>
                         </m:ctrlPr>
                       </m:sSupPr>
@@ -19147,8 +18805,9 @@
                     <m:sSup>
                       <m:sSupPr>
                         <m:ctrlPr>
-                          <a:rPr lang="en-US" i="1" smtClean="0">
+                          <a:rPr lang="el-GR" i="1" smtClean="0">
                             <a:latin typeface="Cambria Math" panose="02040503050406030204" pitchFamily="18" charset="0"/>
+                            <a:ea typeface="Cambria Math" panose="02040503050406030204" pitchFamily="18" charset="0"/>
                           </a:rPr>
                         </m:ctrlPr>
                       </m:sSupPr>
@@ -19203,13 +18862,7 @@
                       <a:rPr lang="en-US" b="0" i="1" smtClean="0">
                         <a:latin typeface="Cambria Math" panose="02040503050406030204" pitchFamily="18" charset="0"/>
                       </a:rPr>
-                      <m:t>−</m:t>
-                    </m:r>
-                    <m:r>
-                      <a:rPr lang="en-US" b="0" i="1" smtClean="0">
-                        <a:latin typeface="Cambria Math" panose="02040503050406030204" pitchFamily="18" charset="0"/>
-                      </a:rPr>
-                      <m:t>1</m:t>
+                      <m:t>−1</m:t>
                     </m:r>
                   </m:oMath>
                 </a14:m>
@@ -19244,7 +18897,7 @@
                     <m:sSub>
                       <m:sSubPr>
                         <m:ctrlPr>
-                          <a:rPr lang="en-US" i="1" smtClean="0">
+                          <a:rPr lang="en-US" b="0" i="1" smtClean="0">
                             <a:latin typeface="Cambria Math" panose="02040503050406030204" pitchFamily="18" charset="0"/>
                           </a:rPr>
                         </m:ctrlPr>
@@ -19402,10 +19055,7 @@
                 </a:pPr>
                 <a14:m>
                   <m:oMathPara xmlns:m="http://schemas.openxmlformats.org/officeDocument/2006/math">
-                    <m:oMathParaPr>
-                      <m:jc m:val="centerGroup"/>
-                    </m:oMathParaPr>
-                    <m:oMath xmlns:m="http://schemas.openxmlformats.org/officeDocument/2006/math">
+                    <m:oMath>
                       <m:r>
                         <a:rPr lang="en-US" b="0" i="1" smtClean="0">
                           <a:latin typeface="Cambria Math" panose="02040503050406030204" pitchFamily="18" charset="0"/>
@@ -19465,7 +19115,7 @@
                           <m:sSup>
                             <m:sSupPr>
                               <m:ctrlPr>
-                                <a:rPr lang="en-US" b="0" i="1" smtClean="0">
+                                <a:rPr lang="en-US" i="1">
                                   <a:latin typeface="Cambria Math" panose="02040503050406030204" pitchFamily="18" charset="0"/>
                                 </a:rPr>
                               </m:ctrlPr>
@@ -19632,10 +19282,7 @@
                 </a:pPr>
                 <a14:m>
                   <m:oMathPara xmlns:m="http://schemas.openxmlformats.org/officeDocument/2006/math">
-                    <m:oMathParaPr>
-                      <m:jc m:val="centerGroup"/>
-                    </m:oMathParaPr>
-                    <m:oMath xmlns:m="http://schemas.openxmlformats.org/officeDocument/2006/math">
+                    <m:oMath>
                       <m:r>
                         <a:rPr lang="en-US" b="0" i="1" smtClean="0">
                           <a:latin typeface="Cambria Math" panose="02040503050406030204" pitchFamily="18" charset="0"/>
@@ -19651,8 +19298,9 @@
                       <m:sSup>
                         <m:sSupPr>
                           <m:ctrlPr>
-                            <a:rPr lang="en-US" i="1">
-                              <a:latin typeface="Cambria Math" panose="02040503050406030204" pitchFamily="18" charset="0"/>
+                            <a:rPr lang="el-GR" i="1">
+                              <a:latin typeface="Cambria Math" panose="02040503050406030204" pitchFamily="18" charset="0"/>
+                              <a:ea typeface="Cambria Math" panose="02040503050406030204" pitchFamily="18" charset="0"/>
                             </a:rPr>
                           </m:ctrlPr>
                         </m:sSupPr>
@@ -19796,8 +19444,9 @@
                     <m:sSup>
                       <m:sSupPr>
                         <m:ctrlPr>
-                          <a:rPr lang="en-US" i="1" smtClean="0">
+                          <a:rPr lang="el-GR" i="1" smtClean="0">
                             <a:latin typeface="Cambria Math" panose="02040503050406030204" pitchFamily="18" charset="0"/>
+                            <a:ea typeface="Cambria Math" panose="02040503050406030204" pitchFamily="18" charset="0"/>
                           </a:rPr>
                         </m:ctrlPr>
                       </m:sSupPr>
@@ -19903,8 +19552,9 @@
                     <m:sSup>
                       <m:sSupPr>
                         <m:ctrlPr>
-                          <a:rPr lang="en-US" i="1" smtClean="0">
+                          <a:rPr lang="el-GR" i="1" smtClean="0">
                             <a:latin typeface="Cambria Math" panose="02040503050406030204" pitchFamily="18" charset="0"/>
+                            <a:ea typeface="Cambria Math" panose="02040503050406030204" pitchFamily="18" charset="0"/>
                           </a:rPr>
                         </m:ctrlPr>
                       </m:sSupPr>
@@ -19967,31 +19617,7 @@
                       <a:rPr lang="en-US" b="0" i="1" dirty="0" smtClean="0">
                         <a:latin typeface="Cambria Math" panose="02040503050406030204" pitchFamily="18" charset="0"/>
                       </a:rPr>
-                      <m:t>=</m:t>
-                    </m:r>
-                    <m:r>
-                      <a:rPr lang="en-US" b="0" i="1" dirty="0" smtClean="0">
-                        <a:latin typeface="Cambria Math" panose="02040503050406030204" pitchFamily="18" charset="0"/>
-                      </a:rPr>
-                      <m:t>1</m:t>
-                    </m:r>
-                    <m:r>
-                      <a:rPr lang="en-US" b="0" i="1" dirty="0" smtClean="0">
-                        <a:latin typeface="Cambria Math" panose="02040503050406030204" pitchFamily="18" charset="0"/>
-                      </a:rPr>
-                      <m:t>, </m:t>
-                    </m:r>
-                    <m:r>
-                      <a:rPr lang="en-US" b="0" i="1" dirty="0" smtClean="0">
-                        <a:latin typeface="Cambria Math" panose="02040503050406030204" pitchFamily="18" charset="0"/>
-                      </a:rPr>
-                      <m:t>2</m:t>
-                    </m:r>
-                    <m:r>
-                      <a:rPr lang="en-US" i="1" dirty="0">
-                        <a:latin typeface="Cambria Math" panose="02040503050406030204" pitchFamily="18" charset="0"/>
-                      </a:rPr>
-                      <m:t> </m:t>
+                      <m:t>=1, 2 </m:t>
                     </m:r>
                   </m:oMath>
                 </a14:m>
@@ -20004,8 +19630,9 @@
                     <m:sSup>
                       <m:sSupPr>
                         <m:ctrlPr>
-                          <a:rPr lang="en-US" i="1" smtClean="0">
+                          <a:rPr lang="el-GR" i="1" smtClean="0">
                             <a:latin typeface="Cambria Math" panose="02040503050406030204" pitchFamily="18" charset="0"/>
+                            <a:ea typeface="Cambria Math" panose="02040503050406030204" pitchFamily="18" charset="0"/>
                           </a:rPr>
                         </m:ctrlPr>
                       </m:sSupPr>
@@ -20054,13 +19681,7 @@
                       <a:rPr lang="en-US" b="0" i="1" dirty="0" smtClean="0">
                         <a:latin typeface="Cambria Math" panose="02040503050406030204" pitchFamily="18" charset="0"/>
                       </a:rPr>
-                      <m:t>=</m:t>
-                    </m:r>
-                    <m:r>
-                      <a:rPr lang="en-US" b="0" i="1" dirty="0" smtClean="0">
-                        <a:latin typeface="Cambria Math" panose="02040503050406030204" pitchFamily="18" charset="0"/>
-                      </a:rPr>
-                      <m:t>0</m:t>
+                      <m:t>=0</m:t>
                     </m:r>
                   </m:oMath>
                 </a14:m>
@@ -20196,8 +19817,9 @@
                     <m:sSup>
                       <m:sSupPr>
                         <m:ctrlPr>
-                          <a:rPr lang="en-US" i="1" smtClean="0">
+                          <a:rPr lang="el-GR" i="1" smtClean="0">
                             <a:latin typeface="Cambria Math" panose="02040503050406030204" pitchFamily="18" charset="0"/>
+                            <a:ea typeface="Cambria Math" panose="02040503050406030204" pitchFamily="18" charset="0"/>
                           </a:rPr>
                         </m:ctrlPr>
                       </m:sSupPr>
@@ -20303,8 +19925,9 @@
                     <m:sSup>
                       <m:sSupPr>
                         <m:ctrlPr>
-                          <a:rPr lang="en-US" i="1" smtClean="0">
+                          <a:rPr lang="el-GR" i="1" smtClean="0">
                             <a:latin typeface="Cambria Math" panose="02040503050406030204" pitchFamily="18" charset="0"/>
+                            <a:ea typeface="Cambria Math" panose="02040503050406030204" pitchFamily="18" charset="0"/>
                           </a:rPr>
                         </m:ctrlPr>
                       </m:sSupPr>
@@ -20379,14 +20002,7 @@
                         <a:latin typeface="Cambria Math" panose="02040503050406030204" pitchFamily="18" charset="0"/>
                         <a:ea typeface="Cambria Math" panose="02040503050406030204" pitchFamily="18" charset="0"/>
                       </a:rPr>
-                      <m:t>&gt;</m:t>
-                    </m:r>
-                    <m:r>
-                      <a:rPr lang="en-US" b="0" i="1" smtClean="0">
-                        <a:latin typeface="Cambria Math" panose="02040503050406030204" pitchFamily="18" charset="0"/>
-                        <a:ea typeface="Cambria Math" panose="02040503050406030204" pitchFamily="18" charset="0"/>
-                      </a:rPr>
-                      <m:t>2</m:t>
+                      <m:t>&gt;2</m:t>
                     </m:r>
                   </m:oMath>
                 </a14:m>
@@ -20526,8 +20142,9 @@
                     <m:sSup>
                       <m:sSupPr>
                         <m:ctrlPr>
-                          <a:rPr lang="en-US" i="1" smtClean="0">
+                          <a:rPr lang="el-GR" i="1" smtClean="0">
                             <a:latin typeface="Cambria Math" panose="02040503050406030204" pitchFamily="18" charset="0"/>
+                            <a:ea typeface="Cambria Math" panose="02040503050406030204" pitchFamily="18" charset="0"/>
                           </a:rPr>
                         </m:ctrlPr>
                       </m:sSupPr>
@@ -20633,8 +20250,9 @@
                     <m:sSup>
                       <m:sSupPr>
                         <m:ctrlPr>
-                          <a:rPr lang="en-US" i="1" smtClean="0">
+                          <a:rPr lang="el-GR" i="1" smtClean="0">
                             <a:latin typeface="Cambria Math" panose="02040503050406030204" pitchFamily="18" charset="0"/>
+                            <a:ea typeface="Cambria Math" panose="02040503050406030204" pitchFamily="18" charset="0"/>
                           </a:rPr>
                         </m:ctrlPr>
                       </m:sSupPr>
@@ -20698,8 +20316,9 @@
                     <m:sSup>
                       <m:sSupPr>
                         <m:ctrlPr>
-                          <a:rPr lang="en-US" i="1" smtClean="0">
+                          <a:rPr lang="el-GR" i="1" smtClean="0">
                             <a:latin typeface="Cambria Math" panose="02040503050406030204" pitchFamily="18" charset="0"/>
+                            <a:ea typeface="Cambria Math" panose="02040503050406030204" pitchFamily="18" charset="0"/>
                           </a:rPr>
                         </m:ctrlPr>
                       </m:sSupPr>
@@ -20923,19 +20542,7 @@
                       <a:rPr>
                         <a:latin typeface="Cambria Math" panose="02040503050406030204" pitchFamily="18" charset="0"/>
                       </a:rPr>
-                      <m:t>1</m:t>
-                    </m:r>
-                    <m:r>
-                      <a:rPr>
-                        <a:latin typeface="Cambria Math" panose="02040503050406030204" pitchFamily="18" charset="0"/>
-                      </a:rPr>
-                      <m:t>:</m:t>
-                    </m:r>
-                    <m:r>
-                      <a:rPr>
-                        <a:latin typeface="Cambria Math" panose="02040503050406030204" pitchFamily="18" charset="0"/>
-                      </a:rPr>
-                      <m:t>1</m:t>
+                      <m:t>1:1</m:t>
                     </m:r>
                   </m:oMath>
                 </a14:m>
@@ -20958,19 +20565,7 @@
                       <a:rPr>
                         <a:latin typeface="Cambria Math" panose="02040503050406030204" pitchFamily="18" charset="0"/>
                       </a:rPr>
-                      <m:t>1</m:t>
-                    </m:r>
-                    <m:r>
-                      <a:rPr>
-                        <a:latin typeface="Cambria Math" panose="02040503050406030204" pitchFamily="18" charset="0"/>
-                      </a:rPr>
-                      <m:t>:</m:t>
-                    </m:r>
-                    <m:r>
-                      <a:rPr>
-                        <a:latin typeface="Cambria Math" panose="02040503050406030204" pitchFamily="18" charset="0"/>
-                      </a:rPr>
-                      <m:t>5</m:t>
+                      <m:t>1:5</m:t>
                     </m:r>
                   </m:oMath>
                 </a14:m>
@@ -21176,10 +20771,7 @@
                 </a:pPr>
                 <a14:m>
                   <m:oMathPara xmlns:m="http://schemas.openxmlformats.org/officeDocument/2006/math">
-                    <m:oMathParaPr>
-                      <m:jc m:val="centerGroup"/>
-                    </m:oMathParaPr>
-                    <m:oMath xmlns:m="http://schemas.openxmlformats.org/officeDocument/2006/math">
+                    <m:oMath>
                       <m:r>
                         <a:rPr lang="en-US" b="0" i="1" smtClean="0">
                           <a:latin typeface="Cambria Math" panose="02040503050406030204" pitchFamily="18" charset="0"/>
@@ -21304,7 +20896,7 @@
                       <m:f>
                         <m:fPr>
                           <m:ctrlPr>
-                            <a:rPr lang="en-US" i="1">
+                            <a:rPr lang="en-US" b="0" i="1">
                               <a:latin typeface="Cambria Math" panose="02040503050406030204" pitchFamily="18" charset="0"/>
                             </a:rPr>
                           </m:ctrlPr>
@@ -21347,7 +20939,7 @@
                       <m:f>
                         <m:fPr>
                           <m:ctrlPr>
-                            <a:rPr lang="en-US" i="1" smtClean="0">
+                            <a:rPr lang="en-US" b="0" i="1" smtClean="0">
                               <a:latin typeface="Cambria Math" panose="02040503050406030204" pitchFamily="18" charset="0"/>
                             </a:rPr>
                           </m:ctrlPr>
@@ -21594,19 +21186,7 @@
                       <a:rPr lang="en-US">
                         <a:latin typeface="Cambria Math" panose="02040503050406030204" pitchFamily="18" charset="0"/>
                       </a:rPr>
-                      <m:t>1</m:t>
-                    </m:r>
-                    <m:r>
-                      <a:rPr lang="en-US">
-                        <a:latin typeface="Cambria Math" panose="02040503050406030204" pitchFamily="18" charset="0"/>
-                      </a:rPr>
-                      <m:t>:</m:t>
-                    </m:r>
-                    <m:r>
-                      <a:rPr lang="en-US">
-                        <a:latin typeface="Cambria Math" panose="02040503050406030204" pitchFamily="18" charset="0"/>
-                      </a:rPr>
-                      <m:t>1</m:t>
+                      <m:t>1:1</m:t>
                     </m:r>
                   </m:oMath>
                 </a14:m>
@@ -21624,7 +21204,7 @@
                     <m:oMathParaPr>
                       <m:jc m:val="center"/>
                     </m:oMathParaPr>
-                    <m:oMath xmlns:m="http://schemas.openxmlformats.org/officeDocument/2006/math">
+                    <m:oMath>
                       <m:r>
                         <a:rPr lang="en-US">
                           <a:latin typeface="Cambria Math" panose="02040503050406030204" pitchFamily="18" charset="0"/>
@@ -21634,7 +21214,7 @@
                       <m:d>
                         <m:dPr>
                           <m:ctrlPr>
-                            <a:rPr lang="ar-AE" i="1">
+                            <a:rPr lang="ar-AE">
                               <a:latin typeface="Cambria Math" panose="02040503050406030204" pitchFamily="18" charset="0"/>
                             </a:rPr>
                           </m:ctrlPr>
@@ -21657,7 +21237,7 @@
                       <m:f>
                         <m:fPr>
                           <m:ctrlPr>
-                            <a:rPr lang="ar-AE" i="1">
+                            <a:rPr lang="ar-AE">
                               <a:latin typeface="Cambria Math" panose="02040503050406030204" pitchFamily="18" charset="0"/>
                             </a:rPr>
                           </m:ctrlPr>
@@ -21675,19 +21255,7 @@
                             <a:rPr lang="ar-AE">
                               <a:latin typeface="Cambria Math" panose="02040503050406030204" pitchFamily="18" charset="0"/>
                             </a:rPr>
-                            <m:t>1</m:t>
-                          </m:r>
-                          <m:r>
-                            <a:rPr lang="ar-AE">
-                              <a:latin typeface="Cambria Math" panose="02040503050406030204" pitchFamily="18" charset="0"/>
-                            </a:rPr>
-                            <m:t>+</m:t>
-                          </m:r>
-                          <m:r>
-                            <a:rPr lang="ar-AE">
-                              <a:latin typeface="Cambria Math" panose="02040503050406030204" pitchFamily="18" charset="0"/>
-                            </a:rPr>
-                            <m:t>1</m:t>
+                            <m:t>1+1</m:t>
                           </m:r>
                         </m:den>
                       </m:f>
@@ -21700,7 +21268,7 @@
                       <m:f>
                         <m:fPr>
                           <m:ctrlPr>
-                            <a:rPr lang="ar-AE" i="1">
+                            <a:rPr lang="ar-AE">
                               <a:latin typeface="Cambria Math" panose="02040503050406030204" pitchFamily="18" charset="0"/>
                             </a:rPr>
                           </m:ctrlPr>
@@ -21752,7 +21320,7 @@
                     <m:f>
                       <m:fPr>
                         <m:ctrlPr>
-                          <a:rPr lang="ar-AE" i="1">
+                          <a:rPr lang="ar-AE">
                             <a:latin typeface="Cambria Math" panose="02040503050406030204" pitchFamily="18" charset="0"/>
                           </a:rPr>
                         </m:ctrlPr>
@@ -21770,13 +21338,7 @@
                           <a:rPr lang="ar-AE">
                             <a:latin typeface="Cambria Math" panose="02040503050406030204" pitchFamily="18" charset="0"/>
                           </a:rPr>
-                          <m:t>1</m:t>
-                        </m:r>
-                        <m:r>
-                          <a:rPr lang="ar-AE">
-                            <a:latin typeface="Cambria Math" panose="02040503050406030204" pitchFamily="18" charset="0"/>
-                          </a:rPr>
-                          <m:t>−</m:t>
+                          <m:t>1−</m:t>
                         </m:r>
                         <m:r>
                           <a:rPr lang="ar-AE">
@@ -21922,18 +21484,12 @@
                     <m:oMathParaPr>
                       <m:jc m:val="center"/>
                     </m:oMathParaPr>
-                    <m:oMath xmlns:m="http://schemas.openxmlformats.org/officeDocument/2006/math">
+                    <m:oMath>
                       <m:r>
                         <a:rPr>
                           <a:latin typeface="Cambria Math" panose="02040503050406030204" pitchFamily="18" charset="0"/>
                         </a:rPr>
-                        <m:t>0</m:t>
-                      </m:r>
-                      <m:r>
-                        <a:rPr>
-                          <a:latin typeface="Cambria Math" panose="02040503050406030204" pitchFamily="18" charset="0"/>
-                        </a:rPr>
-                        <m:t>&lt;</m:t>
+                        <m:t>0&lt;</m:t>
                       </m:r>
                       <m:r>
                         <a:rPr>
@@ -21944,7 +21500,7 @@
                       <m:d>
                         <m:dPr>
                           <m:ctrlPr>
-                            <a:rPr i="1">
+                            <a:rPr>
                               <a:latin typeface="Cambria Math" panose="02040503050406030204" pitchFamily="18" charset="0"/>
                             </a:rPr>
                           </m:ctrlPr>
@@ -21962,13 +21518,7 @@
                         <a:rPr>
                           <a:latin typeface="Cambria Math" panose="02040503050406030204" pitchFamily="18" charset="0"/>
                         </a:rPr>
-                        <m:t>≤</m:t>
-                      </m:r>
-                      <m:r>
-                        <a:rPr>
-                          <a:latin typeface="Cambria Math" panose="02040503050406030204" pitchFamily="18" charset="0"/>
-                        </a:rPr>
-                        <m:t>1</m:t>
+                        <m:t>≤1</m:t>
                       </m:r>
                     </m:oMath>
                   </m:oMathPara>
@@ -21984,7 +21534,7 @@
                     <m:oMathParaPr>
                       <m:jc m:val="center"/>
                     </m:oMathParaPr>
-                    <m:oMath xmlns:m="http://schemas.openxmlformats.org/officeDocument/2006/math">
+                    <m:oMath>
                       <m:r>
                         <a:rPr>
                           <a:latin typeface="Cambria Math" panose="02040503050406030204" pitchFamily="18" charset="0"/>
@@ -21994,7 +21544,7 @@
                       <m:d>
                         <m:dPr>
                           <m:ctrlPr>
-                            <a:rPr i="1">
+                            <a:rPr>
                               <a:latin typeface="Cambria Math" panose="02040503050406030204" pitchFamily="18" charset="0"/>
                             </a:rPr>
                           </m:ctrlPr>
@@ -22028,7 +21578,7 @@
                           <m:sSub>
                             <m:sSubPr>
                               <m:ctrlPr>
-                                <a:rPr i="1">
+                                <a:rPr>
                                   <a:latin typeface="Cambria Math" panose="02040503050406030204" pitchFamily="18" charset="0"/>
                                 </a:rPr>
                               </m:ctrlPr>
@@ -22092,7 +21642,7 @@
                           <m:sSub>
                             <m:sSubPr>
                               <m:ctrlPr>
-                                <a:rPr i="1">
+                                <a:rPr>
                                   <a:latin typeface="Cambria Math" panose="02040503050406030204" pitchFamily="18" charset="0"/>
                                 </a:rPr>
                               </m:ctrlPr>
@@ -22120,13 +21670,7 @@
                         <a:rPr>
                           <a:latin typeface="Cambria Math" panose="02040503050406030204" pitchFamily="18" charset="0"/>
                         </a:rPr>
-                        <m:t>=</m:t>
-                      </m:r>
-                      <m:r>
-                        <a:rPr>
-                          <a:latin typeface="Cambria Math" panose="02040503050406030204" pitchFamily="18" charset="0"/>
-                        </a:rPr>
-                        <m:t>1</m:t>
+                        <m:t>=1</m:t>
                       </m:r>
                     </m:oMath>
                   </m:oMathPara>
@@ -22139,10 +21683,7 @@
                 </a:pPr>
                 <a14:m>
                   <m:oMathPara xmlns:m="http://schemas.openxmlformats.org/officeDocument/2006/math">
-                    <m:oMathParaPr>
-                      <m:jc m:val="centerGroup"/>
-                    </m:oMathParaPr>
-                    <m:oMath xmlns:m="http://schemas.openxmlformats.org/officeDocument/2006/math">
+                    <m:oMath>
                       <m:r>
                         <a:rPr lang="en-US" b="0" i="1" smtClean="0">
                           <a:latin typeface="Cambria Math" panose="02040503050406030204" pitchFamily="18" charset="0"/>
@@ -22297,7 +21838,7 @@
                     <m:oMathParaPr>
                       <m:jc m:val="center"/>
                     </m:oMathParaPr>
-                    <m:oMath xmlns:m="http://schemas.openxmlformats.org/officeDocument/2006/math">
+                    <m:oMath>
                       <m:r>
                         <m:rPr>
                           <m:sty m:val="p"/>
@@ -22312,7 +21853,7 @@
                           <m:begChr m:val="["/>
                           <m:endChr m:val="]"/>
                           <m:ctrlPr>
-                            <a:rPr i="1">
+                            <a:rPr>
                               <a:latin typeface="Cambria Math" panose="02040503050406030204" pitchFamily="18" charset="0"/>
                             </a:rPr>
                           </m:ctrlPr>
@@ -22337,7 +21878,7 @@
                           <m:chr m:val="∑"/>
                           <m:limLoc m:val="undOvr"/>
                           <m:ctrlPr>
-                            <a:rPr i="1">
+                            <a:rPr>
                               <a:latin typeface="Cambria Math" panose="02040503050406030204" pitchFamily="18" charset="0"/>
                             </a:rPr>
                           </m:ctrlPr>
@@ -22353,13 +21894,7 @@
                             <a:rPr>
                               <a:latin typeface="Cambria Math" panose="02040503050406030204" pitchFamily="18" charset="0"/>
                             </a:rPr>
-                            <m:t>=</m:t>
-                          </m:r>
-                          <m:r>
-                            <a:rPr>
-                              <a:latin typeface="Cambria Math" panose="02040503050406030204" pitchFamily="18" charset="0"/>
-                            </a:rPr>
-                            <m:t>1</m:t>
+                            <m:t>=1</m:t>
                           </m:r>
                         </m:sub>
                         <m:sup>
@@ -22374,7 +21909,7 @@
                           <m:sSub>
                             <m:sSubPr>
                               <m:ctrlPr>
-                                <a:rPr i="1">
+                                <a:rPr>
                                   <a:latin typeface="Cambria Math" panose="02040503050406030204" pitchFamily="18" charset="0"/>
                                 </a:rPr>
                               </m:ctrlPr>
@@ -22422,7 +21957,7 @@
                           <m:sSub>
                             <m:sSubPr>
                               <m:ctrlPr>
-                                <a:rPr i="1">
+                                <a:rPr>
                                   <a:latin typeface="Cambria Math" panose="02040503050406030204" pitchFamily="18" charset="0"/>
                                 </a:rPr>
                               </m:ctrlPr>
@@ -22603,7 +22138,7 @@
                     <m:sSub>
                       <m:sSubPr>
                         <m:ctrlPr>
-                          <a:rPr lang="ar-AE" i="1">
+                          <a:rPr lang="ar-AE">
                             <a:latin typeface="Cambria Math" panose="02040503050406030204" pitchFamily="18" charset="0"/>
                           </a:rPr>
                         </m:ctrlPr>
@@ -22634,7 +22169,7 @@
                     <m:d>
                       <m:dPr>
                         <m:ctrlPr>
-                          <a:rPr lang="ar-AE" i="1">
+                          <a:rPr lang="ar-AE">
                             <a:latin typeface="Cambria Math" panose="02040503050406030204" pitchFamily="18" charset="0"/>
                           </a:rPr>
                         </m:ctrlPr>
@@ -22644,43 +22179,7 @@
                           <a:rPr lang="ar-AE">
                             <a:latin typeface="Cambria Math" panose="02040503050406030204" pitchFamily="18" charset="0"/>
                           </a:rPr>
-                          <m:t>0</m:t>
-                        </m:r>
-                        <m:r>
-                          <a:rPr lang="ar-AE">
-                            <a:latin typeface="Cambria Math" panose="02040503050406030204" pitchFamily="18" charset="0"/>
-                          </a:rPr>
-                          <m:t>,</m:t>
-                        </m:r>
-                        <m:r>
-                          <a:rPr lang="ar-AE">
-                            <a:latin typeface="Cambria Math" panose="02040503050406030204" pitchFamily="18" charset="0"/>
-                          </a:rPr>
-                          <m:t>0</m:t>
-                        </m:r>
-                        <m:r>
-                          <a:rPr lang="ar-AE">
-                            <a:latin typeface="Cambria Math" panose="02040503050406030204" pitchFamily="18" charset="0"/>
-                          </a:rPr>
-                          <m:t>,…,</m:t>
-                        </m:r>
-                        <m:r>
-                          <a:rPr lang="ar-AE">
-                            <a:latin typeface="Cambria Math" panose="02040503050406030204" pitchFamily="18" charset="0"/>
-                          </a:rPr>
-                          <m:t>1</m:t>
-                        </m:r>
-                        <m:r>
-                          <a:rPr lang="ar-AE">
-                            <a:latin typeface="Cambria Math" panose="02040503050406030204" pitchFamily="18" charset="0"/>
-                          </a:rPr>
-                          <m:t>,…,</m:t>
-                        </m:r>
-                        <m:r>
-                          <a:rPr lang="ar-AE">
-                            <a:latin typeface="Cambria Math" panose="02040503050406030204" pitchFamily="18" charset="0"/>
-                          </a:rPr>
-                          <m:t>0</m:t>
+                          <m:t>0,0,…,1,…,0</m:t>
                         </m:r>
                       </m:e>
                     </m:d>
@@ -22737,7 +22236,7 @@
                         <m:sSub>
                           <m:sSubPr>
                             <m:ctrlPr>
-                              <a:rPr lang="ar-AE" i="1">
+                              <a:rPr lang="ar-AE">
                                 <a:latin typeface="Cambria Math" panose="02040503050406030204" pitchFamily="18" charset="0"/>
                               </a:rPr>
                             </m:ctrlPr>
@@ -22768,7 +22267,7 @@
                         <m:sSub>
                           <m:sSubPr>
                             <m:ctrlPr>
-                              <a:rPr lang="ar-AE" i="1">
+                              <a:rPr lang="ar-AE">
                                 <a:latin typeface="Cambria Math" panose="02040503050406030204" pitchFamily="18" charset="0"/>
                               </a:rPr>
                             </m:ctrlPr>
@@ -22799,7 +22298,7 @@
                         <m:sSub>
                           <m:sSubPr>
                             <m:ctrlPr>
-                              <a:rPr lang="ar-AE" i="1">
+                              <a:rPr lang="ar-AE">
                                 <a:latin typeface="Cambria Math" panose="02040503050406030204" pitchFamily="18" charset="0"/>
                               </a:rPr>
                             </m:ctrlPr>
@@ -22843,7 +22342,7 @@
                     <m:oMathParaPr>
                       <m:jc m:val="center"/>
                     </m:oMathParaPr>
-                    <m:oMath xmlns:m="http://schemas.openxmlformats.org/officeDocument/2006/math">
+                    <m:oMath>
                       <m:r>
                         <a:rPr lang="en-US">
                           <a:latin typeface="Cambria Math" panose="02040503050406030204" pitchFamily="18" charset="0"/>
@@ -22862,7 +22361,7 @@
                           <m:sSub>
                             <m:sSubPr>
                               <m:ctrlPr>
-                                <a:rPr lang="ar-AE" i="1">
+                                <a:rPr lang="ar-AE">
                                   <a:latin typeface="Cambria Math" panose="02040503050406030204" pitchFamily="18" charset="0"/>
                                 </a:rPr>
                               </m:ctrlPr>
@@ -22907,7 +22406,7 @@
                       <m:sSub>
                         <m:sSubPr>
                           <m:ctrlPr>
-                            <a:rPr lang="ar-AE" i="1">
+                            <a:rPr lang="ar-AE">
                               <a:latin typeface="Cambria Math" panose="02040503050406030204" pitchFamily="18" charset="0"/>
                             </a:rPr>
                           </m:ctrlPr>
@@ -22954,7 +22453,7 @@
                       <m:accPr>
                         <m:chr m:val="⃗"/>
                         <m:ctrlPr>
-                          <a:rPr lang="ar-AE" i="1">
+                          <a:rPr lang="ar-AE">
                             <a:latin typeface="Cambria Math" panose="02040503050406030204" pitchFamily="18" charset="0"/>
                           </a:rPr>
                         </m:ctrlPr>
@@ -23031,7 +22530,7 @@
                     <m:oMathParaPr>
                       <m:jc m:val="center"/>
                     </m:oMathParaPr>
-                    <m:oMath xmlns:m="http://schemas.openxmlformats.org/officeDocument/2006/math">
+                    <m:oMath>
                       <m:r>
                         <a:rPr lang="en-US">
                           <a:latin typeface="Cambria Math" panose="02040503050406030204" pitchFamily="18" charset="0"/>
@@ -23051,7 +22550,7 @@
                             <m:accPr>
                               <m:chr m:val="⃗"/>
                               <m:ctrlPr>
-                                <a:rPr lang="ar-AE" i="1">
+                                <a:rPr lang="ar-AE">
                                   <a:latin typeface="Cambria Math" panose="02040503050406030204" pitchFamily="18" charset="0"/>
                                 </a:rPr>
                               </m:ctrlPr>
@@ -23076,7 +22575,7 @@
                       <m:f>
                         <m:fPr>
                           <m:ctrlPr>
-                            <a:rPr lang="ar-AE" i="1">
+                            <a:rPr lang="ar-AE">
                               <a:latin typeface="Cambria Math" panose="02040503050406030204" pitchFamily="18" charset="0"/>
                             </a:rPr>
                           </m:ctrlPr>
@@ -23093,7 +22592,7 @@
                           <m:rad>
                             <m:radPr>
                               <m:ctrlPr>
-                                <a:rPr lang="ar-AE" i="1">
+                                <a:rPr lang="ar-AE" b="0" i="1" smtClean="0">
                                   <a:latin typeface="Cambria Math" panose="02040503050406030204" pitchFamily="18" charset="0"/>
                                 </a:rPr>
                               </m:ctrlPr>
@@ -23122,7 +22621,7 @@
                                   <m:d>
                                     <m:dPr>
                                       <m:ctrlPr>
-                                        <a:rPr lang="ar-AE" i="1">
+                                        <a:rPr lang="ar-AE">
                                           <a:latin typeface="Cambria Math" panose="02040503050406030204" pitchFamily="18" charset="0"/>
                                         </a:rPr>
                                       </m:ctrlPr>
@@ -23157,7 +22656,7 @@
                                   <m:begChr m:val="|"/>
                                   <m:endChr m:val="|"/>
                                   <m:ctrlPr>
-                                    <a:rPr lang="ar-AE" i="1">
+                                    <a:rPr lang="ar-AE">
                                       <a:latin typeface="Cambria Math" panose="02040503050406030204" pitchFamily="18" charset="0"/>
                                     </a:rPr>
                                   </m:ctrlPr>
@@ -23193,7 +22692,7 @@
                           <m:f>
                             <m:fPr>
                               <m:ctrlPr>
-                                <a:rPr lang="ar-AE" i="1">
+                                <a:rPr lang="ar-AE">
                                   <a:latin typeface="Cambria Math" panose="02040503050406030204" pitchFamily="18" charset="0"/>
                                 </a:rPr>
                               </m:ctrlPr>
@@ -23237,7 +22736,7 @@
                                     <m:accPr>
                                       <m:chr m:val="⃗"/>
                                       <m:ctrlPr>
-                                        <a:rPr lang="ar-AE" i="1">
+                                        <a:rPr lang="ar-AE">
                                           <a:latin typeface="Cambria Math" panose="02040503050406030204" pitchFamily="18" charset="0"/>
                                         </a:rPr>
                                       </m:ctrlPr>
@@ -23261,7 +22760,7 @@
                                     <m:accPr>
                                       <m:chr m:val="⃗"/>
                                       <m:ctrlPr>
-                                        <a:rPr lang="ar-AE" i="1">
+                                        <a:rPr lang="ar-AE">
                                           <a:latin typeface="Cambria Math" panose="02040503050406030204" pitchFamily="18" charset="0"/>
                                         </a:rPr>
                                       </m:ctrlPr>
@@ -23306,7 +22805,7 @@
                                 <m:accPr>
                                   <m:chr m:val="⃗"/>
                                   <m:ctrlPr>
-                                    <a:rPr lang="ar-AE" i="1">
+                                    <a:rPr lang="ar-AE">
                                       <a:latin typeface="Cambria Math" panose="02040503050406030204" pitchFamily="18" charset="0"/>
                                     </a:rPr>
                                   </m:ctrlPr>
@@ -23330,7 +22829,7 @@
                                 <m:accPr>
                                   <m:chr m:val="⃗"/>
                                   <m:ctrlPr>
-                                    <a:rPr lang="ar-AE" i="1">
+                                    <a:rPr lang="ar-AE">
                                       <a:latin typeface="Cambria Math" panose="02040503050406030204" pitchFamily="18" charset="0"/>
                                     </a:rPr>
                                   </m:ctrlPr>
@@ -23633,18 +23132,12 @@
                     <m:oMathParaPr>
                       <m:jc m:val="center"/>
                     </m:oMathParaPr>
-                    <m:oMath xmlns:m="http://schemas.openxmlformats.org/officeDocument/2006/math">
+                    <m:oMath>
                       <m:r>
                         <a:rPr lang="en-US">
                           <a:latin typeface="Cambria Math" panose="02040503050406030204" pitchFamily="18" charset="0"/>
                         </a:rPr>
-                        <m:t>0</m:t>
-                      </m:r>
-                      <m:r>
-                        <a:rPr lang="en-US">
-                          <a:latin typeface="Cambria Math" panose="02040503050406030204" pitchFamily="18" charset="0"/>
-                        </a:rPr>
-                        <m:t>≤</m:t>
+                        <m:t>0≤</m:t>
                       </m:r>
                       <m:r>
                         <a:rPr lang="en-US">
@@ -23655,7 +23148,7 @@
                       <m:d>
                         <m:dPr>
                           <m:ctrlPr>
-                            <a:rPr lang="ar-AE" i="1">
+                            <a:rPr lang="ar-AE">
                               <a:latin typeface="Cambria Math" panose="02040503050406030204" pitchFamily="18" charset="0"/>
                             </a:rPr>
                           </m:ctrlPr>
@@ -23673,13 +23166,7 @@
                         <a:rPr lang="ar-AE">
                           <a:latin typeface="Cambria Math" panose="02040503050406030204" pitchFamily="18" charset="0"/>
                         </a:rPr>
-                        <m:t>≤</m:t>
-                      </m:r>
-                      <m:r>
-                        <a:rPr lang="ar-AE">
-                          <a:latin typeface="Cambria Math" panose="02040503050406030204" pitchFamily="18" charset="0"/>
-                        </a:rPr>
-                        <m:t>1</m:t>
+                        <m:t>≤1</m:t>
                       </m:r>
                     </m:oMath>
                   </m:oMathPara>
@@ -23704,7 +23191,7 @@
                     <m:oMathParaPr>
                       <m:jc m:val="center"/>
                     </m:oMathParaPr>
-                    <m:oMath xmlns:m="http://schemas.openxmlformats.org/officeDocument/2006/math">
+                    <m:oMath>
                       <m:r>
                         <a:rPr lang="en-US">
                           <a:latin typeface="Cambria Math" panose="02040503050406030204" pitchFamily="18" charset="0"/>
@@ -23714,7 +23201,7 @@
                       <m:d>
                         <m:dPr>
                           <m:ctrlPr>
-                            <a:rPr lang="ar-AE" i="1">
+                            <a:rPr lang="ar-AE">
                               <a:latin typeface="Cambria Math" panose="02040503050406030204" pitchFamily="18" charset="0"/>
                             </a:rPr>
                           </m:ctrlPr>
@@ -23748,7 +23235,7 @@
                           <m:sSub>
                             <m:sSubPr>
                               <m:ctrlPr>
-                                <a:rPr lang="ar-AE" i="1">
+                                <a:rPr lang="ar-AE">
                                   <a:latin typeface="Cambria Math" panose="02040503050406030204" pitchFamily="18" charset="0"/>
                                 </a:rPr>
                               </m:ctrlPr>
@@ -23812,7 +23299,7 @@
                           <m:sSub>
                             <m:sSubPr>
                               <m:ctrlPr>
-                                <a:rPr lang="ar-AE" i="1">
+                                <a:rPr lang="ar-AE">
                                   <a:latin typeface="Cambria Math" panose="02040503050406030204" pitchFamily="18" charset="0"/>
                                 </a:rPr>
                               </m:ctrlPr>
@@ -23840,13 +23327,7 @@
                         <a:rPr lang="ar-AE">
                           <a:latin typeface="Cambria Math" panose="02040503050406030204" pitchFamily="18" charset="0"/>
                         </a:rPr>
-                        <m:t>=</m:t>
-                      </m:r>
-                      <m:r>
-                        <a:rPr lang="ar-AE">
-                          <a:latin typeface="Cambria Math" panose="02040503050406030204" pitchFamily="18" charset="0"/>
-                        </a:rPr>
-                        <m:t>1</m:t>
+                        <m:t>=1</m:t>
                       </m:r>
                     </m:oMath>
                   </m:oMathPara>
@@ -23868,10 +23349,7 @@
                 </a:pPr>
                 <a14:m>
                   <m:oMathPara xmlns:m="http://schemas.openxmlformats.org/officeDocument/2006/math">
-                    <m:oMathParaPr>
-                      <m:jc m:val="centerGroup"/>
-                    </m:oMathParaPr>
-                    <m:oMath xmlns:m="http://schemas.openxmlformats.org/officeDocument/2006/math">
+                    <m:oMath>
                       <m:r>
                         <a:rPr lang="en-US" b="0" i="1" smtClean="0">
                           <a:latin typeface="Cambria Math" panose="02040503050406030204" pitchFamily="18" charset="0"/>
@@ -24208,7 +23686,7 @@
                     <m:sSub>
                       <m:sSubPr>
                         <m:ctrlPr>
-                          <a:rPr i="1">
+                          <a:rPr>
                             <a:latin typeface="Cambria Math" panose="02040503050406030204" pitchFamily="18" charset="0"/>
                           </a:rPr>
                         </m:ctrlPr>
@@ -24239,7 +23717,7 @@
                     <m:sSub>
                       <m:sSubPr>
                         <m:ctrlPr>
-                          <a:rPr i="1">
+                          <a:rPr>
                             <a:latin typeface="Cambria Math" panose="02040503050406030204" pitchFamily="18" charset="0"/>
                           </a:rPr>
                         </m:ctrlPr>
@@ -24270,7 +23748,7 @@
                     <m:sSub>
                       <m:sSubPr>
                         <m:ctrlPr>
-                          <a:rPr i="1">
+                          <a:rPr>
                             <a:latin typeface="Cambria Math" panose="02040503050406030204" pitchFamily="18" charset="0"/>
                           </a:rPr>
                         </m:ctrlPr>
@@ -24317,7 +23795,7 @@
                         <m:sSub>
                           <m:sSubPr>
                             <m:ctrlPr>
-                              <a:rPr i="1">
+                              <a:rPr>
                                 <a:latin typeface="Cambria Math" panose="02040503050406030204" pitchFamily="18" charset="0"/>
                               </a:rPr>
                             </m:ctrlPr>
@@ -24356,7 +23834,7 @@
                     <m:oMathParaPr>
                       <m:jc m:val="center"/>
                     </m:oMathParaPr>
-                    <m:oMath xmlns:m="http://schemas.openxmlformats.org/officeDocument/2006/math">
+                    <m:oMath>
                       <m:r>
                         <m:rPr>
                           <m:sty m:val="p"/>
@@ -24371,7 +23849,7 @@
                           <m:begChr m:val="["/>
                           <m:endChr m:val="]"/>
                           <m:ctrlPr>
-                            <a:rPr i="1">
+                            <a:rPr>
                               <a:latin typeface="Cambria Math" panose="02040503050406030204" pitchFamily="18" charset="0"/>
                             </a:rPr>
                           </m:ctrlPr>
@@ -24396,7 +23874,7 @@
                           <m:chr m:val="∑"/>
                           <m:limLoc m:val="undOvr"/>
                           <m:ctrlPr>
-                            <a:rPr i="1">
+                            <a:rPr>
                               <a:latin typeface="Cambria Math" panose="02040503050406030204" pitchFamily="18" charset="0"/>
                             </a:rPr>
                           </m:ctrlPr>
@@ -24412,13 +23890,7 @@
                             <a:rPr>
                               <a:latin typeface="Cambria Math" panose="02040503050406030204" pitchFamily="18" charset="0"/>
                             </a:rPr>
-                            <m:t>=</m:t>
-                          </m:r>
-                          <m:r>
-                            <a:rPr>
-                              <a:latin typeface="Cambria Math" panose="02040503050406030204" pitchFamily="18" charset="0"/>
-                            </a:rPr>
-                            <m:t>1</m:t>
+                            <m:t>=1</m:t>
                           </m:r>
                         </m:sub>
                         <m:sup>
@@ -24433,7 +23905,7 @@
                           <m:sSub>
                             <m:sSubPr>
                               <m:ctrlPr>
-                                <a:rPr i="1">
+                                <a:rPr>
                                   <a:latin typeface="Cambria Math" panose="02040503050406030204" pitchFamily="18" charset="0"/>
                                 </a:rPr>
                               </m:ctrlPr>
@@ -24481,7 +23953,7 @@
                           <m:sSub>
                             <m:sSubPr>
                               <m:ctrlPr>
-                                <a:rPr i="1">
+                                <a:rPr>
                                   <a:latin typeface="Cambria Math" panose="02040503050406030204" pitchFamily="18" charset="0"/>
                                 </a:rPr>
                               </m:ctrlPr>
@@ -24702,7 +24174,7 @@
                     <m:oMathParaPr>
                       <m:jc m:val="center"/>
                     </m:oMathParaPr>
-                    <m:oMath xmlns:m="http://schemas.openxmlformats.org/officeDocument/2006/math">
+                    <m:oMath>
                       <m:r>
                         <m:rPr>
                           <m:sty m:val="p"/>
@@ -24717,7 +24189,7 @@
                           <m:begChr m:val="["/>
                           <m:endChr m:val="]"/>
                           <m:ctrlPr>
-                            <a:rPr i="1">
+                            <a:rPr>
                               <a:latin typeface="Cambria Math" panose="02040503050406030204" pitchFamily="18" charset="0"/>
                             </a:rPr>
                           </m:ctrlPr>
@@ -24763,7 +24235,7 @@
                           <m:begChr m:val="["/>
                           <m:endChr m:val="]"/>
                           <m:ctrlPr>
-                            <a:rPr i="1">
+                            <a:rPr>
                               <a:latin typeface="Cambria Math" panose="02040503050406030204" pitchFamily="18" charset="0"/>
                             </a:rPr>
                           </m:ctrlPr>
@@ -24797,7 +24269,7 @@
                           <m:begChr m:val="["/>
                           <m:endChr m:val="]"/>
                           <m:ctrlPr>
-                            <a:rPr i="1">
+                            <a:rPr>
                               <a:latin typeface="Cambria Math" panose="02040503050406030204" pitchFamily="18" charset="0"/>
                             </a:rPr>
                           </m:ctrlPr>
@@ -24860,7 +24332,7 @@
                     <m:oMathParaPr>
                       <m:jc m:val="center"/>
                     </m:oMathParaPr>
-                    <m:oMath xmlns:m="http://schemas.openxmlformats.org/officeDocument/2006/math">
+                    <m:oMath>
                       <m:r>
                         <m:rPr>
                           <m:sty m:val="p"/>
@@ -24875,7 +24347,7 @@
                           <m:begChr m:val="["/>
                           <m:endChr m:val="]"/>
                           <m:ctrlPr>
-                            <a:rPr i="1">
+                            <a:rPr>
                               <a:latin typeface="Cambria Math" panose="02040503050406030204" pitchFamily="18" charset="0"/>
                             </a:rPr>
                           </m:ctrlPr>
@@ -24945,7 +24417,7 @@
                           <m:begChr m:val="["/>
                           <m:endChr m:val="]"/>
                           <m:ctrlPr>
-                            <a:rPr i="1">
+                            <a:rPr>
                               <a:latin typeface="Cambria Math" panose="02040503050406030204" pitchFamily="18" charset="0"/>
                             </a:rPr>
                           </m:ctrlPr>
@@ -25110,7 +24582,7 @@
                     <m:d>
                       <m:dPr>
                         <m:ctrlPr>
-                          <a:rPr i="1">
+                          <a:rPr>
                             <a:latin typeface="Cambria Math" panose="02040503050406030204" pitchFamily="18" charset="0"/>
                           </a:rPr>
                         </m:ctrlPr>
@@ -25147,7 +24619,7 @@
                     <m:sSub>
                       <m:sSubPr>
                         <m:ctrlPr>
-                          <a:rPr i="1">
+                          <a:rPr>
                             <a:latin typeface="Cambria Math" panose="02040503050406030204" pitchFamily="18" charset="0"/>
                           </a:rPr>
                         </m:ctrlPr>
@@ -25178,7 +24650,7 @@
                     <m:sSub>
                       <m:sSubPr>
                         <m:ctrlPr>
-                          <a:rPr i="1">
+                          <a:rPr>
                             <a:latin typeface="Cambria Math" panose="02040503050406030204" pitchFamily="18" charset="0"/>
                           </a:rPr>
                         </m:ctrlPr>
@@ -25223,7 +24695,7 @@
                     <m:d>
                       <m:dPr>
                         <m:ctrlPr>
-                          <a:rPr i="1">
+                          <a:rPr>
                             <a:latin typeface="Cambria Math" panose="02040503050406030204" pitchFamily="18" charset="0"/>
                           </a:rPr>
                         </m:ctrlPr>
@@ -25253,18 +24725,12 @@
                     <m:oMathParaPr>
                       <m:jc m:val="center"/>
                     </m:oMathParaPr>
-                    <m:oMath xmlns:m="http://schemas.openxmlformats.org/officeDocument/2006/math">
+                    <m:oMath>
                       <m:r>
                         <a:rPr>
                           <a:latin typeface="Cambria Math" panose="02040503050406030204" pitchFamily="18" charset="0"/>
                         </a:rPr>
-                        <m:t>0</m:t>
-                      </m:r>
-                      <m:r>
-                        <a:rPr>
-                          <a:latin typeface="Cambria Math" panose="02040503050406030204" pitchFamily="18" charset="0"/>
-                        </a:rPr>
-                        <m:t>≤</m:t>
+                        <m:t>0≤</m:t>
                       </m:r>
                       <m:nary>
                         <m:naryPr>
@@ -25279,7 +24745,7 @@
                           <m:sSub>
                             <m:sSubPr>
                               <m:ctrlPr>
-                                <a:rPr i="1">
+                                <a:rPr>
                                   <a:latin typeface="Cambria Math" panose="02040503050406030204" pitchFamily="18" charset="0"/>
                                 </a:rPr>
                               </m:ctrlPr>
@@ -25306,7 +24772,7 @@
                           <m:sSub>
                             <m:sSubPr>
                               <m:ctrlPr>
-                                <a:rPr i="1">
+                                <a:rPr>
                                   <a:latin typeface="Cambria Math" panose="02040503050406030204" pitchFamily="18" charset="0"/>
                                 </a:rPr>
                               </m:ctrlPr>
@@ -25341,7 +24807,7 @@
                       <m:d>
                         <m:dPr>
                           <m:ctrlPr>
-                            <a:rPr i="1">
+                            <a:rPr>
                               <a:latin typeface="Cambria Math" panose="02040503050406030204" pitchFamily="18" charset="0"/>
                             </a:rPr>
                           </m:ctrlPr>
@@ -25365,13 +24831,7 @@
                         <a:rPr>
                           <a:latin typeface="Cambria Math" panose="02040503050406030204" pitchFamily="18" charset="0"/>
                         </a:rPr>
-                        <m:t> ≤</m:t>
-                      </m:r>
-                      <m:r>
-                        <a:rPr>
-                          <a:latin typeface="Cambria Math" panose="02040503050406030204" pitchFamily="18" charset="0"/>
-                        </a:rPr>
-                        <m:t>1</m:t>
+                        <m:t> ≤1</m:t>
                       </m:r>
                     </m:oMath>
                   </m:oMathPara>
@@ -25395,7 +24855,7 @@
                     <m:sSub>
                       <m:sSubPr>
                         <m:ctrlPr>
-                          <a:rPr i="1">
+                          <a:rPr>
                             <a:latin typeface="Cambria Math" panose="02040503050406030204" pitchFamily="18" charset="0"/>
                           </a:rPr>
                         </m:ctrlPr>
@@ -25426,7 +24886,7 @@
                     <m:sSub>
                       <m:sSubPr>
                         <m:ctrlPr>
-                          <a:rPr i="1">
+                          <a:rPr>
                             <a:latin typeface="Cambria Math" panose="02040503050406030204" pitchFamily="18" charset="0"/>
                           </a:rPr>
                         </m:ctrlPr>
@@ -25473,12 +24933,12 @@
                     <m:oMathParaPr>
                       <m:jc m:val="center"/>
                     </m:oMathParaPr>
-                    <m:oMath xmlns:m="http://schemas.openxmlformats.org/officeDocument/2006/math">
+                    <m:oMath>
                       <m:nary>
                         <m:naryPr>
                           <m:limLoc m:val="subSup"/>
                           <m:ctrlPr>
-                            <a:rPr i="1">
+                            <a:rPr>
                               <a:latin typeface="Cambria Math" panose="02040503050406030204" pitchFamily="18" charset="0"/>
                             </a:rPr>
                           </m:ctrlPr>
@@ -25511,7 +24971,7 @@
                       <m:d>
                         <m:dPr>
                           <m:ctrlPr>
-                            <a:rPr i="1">
+                            <a:rPr>
                               <a:latin typeface="Cambria Math" panose="02040503050406030204" pitchFamily="18" charset="0"/>
                             </a:rPr>
                           </m:ctrlPr>
@@ -25535,13 +24995,7 @@
                         <a:rPr>
                           <a:latin typeface="Cambria Math" panose="02040503050406030204" pitchFamily="18" charset="0"/>
                         </a:rPr>
-                        <m:t>=</m:t>
-                      </m:r>
-                      <m:r>
-                        <a:rPr>
-                          <a:latin typeface="Cambria Math" panose="02040503050406030204" pitchFamily="18" charset="0"/>
-                        </a:rPr>
-                        <m:t>1</m:t>
+                        <m:t>=1</m:t>
                       </m:r>
                     </m:oMath>
                   </m:oMathPara>
@@ -25580,13 +25034,7 @@
                       <a:rPr>
                         <a:latin typeface="Cambria Math" panose="02040503050406030204" pitchFamily="18" charset="0"/>
                       </a:rPr>
-                      <m:t>−</m:t>
-                    </m:r>
-                    <m:r>
-                      <a:rPr>
-                        <a:latin typeface="Cambria Math" panose="02040503050406030204" pitchFamily="18" charset="0"/>
-                      </a:rPr>
-                      <m:t>∞</m:t>
+                      <m:t>−∞</m:t>
                     </m:r>
                   </m:oMath>
                 </a14:m>
@@ -25622,10 +25070,7 @@
                 </a:pPr>
                 <a14:m>
                   <m:oMathPara xmlns:m="http://schemas.openxmlformats.org/officeDocument/2006/math">
-                    <m:oMathParaPr>
-                      <m:jc m:val="centerGroup"/>
-                    </m:oMathParaPr>
-                    <m:oMath xmlns:m="http://schemas.openxmlformats.org/officeDocument/2006/math">
+                    <m:oMath>
                       <m:r>
                         <a:rPr lang="en-US" b="0" i="1" smtClean="0">
                           <a:latin typeface="Cambria Math" panose="02040503050406030204" pitchFamily="18" charset="0"/>
@@ -26133,6 +25578,301 @@
 </a:theme>
 </file>
 
+<file path=ppt/theme/theme2.xml><?xml version="1.0" encoding="utf-8"?>
+<a:theme xmlns:a="http://schemas.openxmlformats.org/drawingml/2006/main" name="Office Theme">
+  <a:themeElements>
+    <a:clrScheme name="Office">
+      <a:dk1>
+        <a:sysClr val="windowText" lastClr="000000"/>
+      </a:dk1>
+      <a:lt1>
+        <a:sysClr val="window" lastClr="FFFFFF"/>
+      </a:lt1>
+      <a:dk2>
+        <a:srgbClr val="44546A"/>
+      </a:dk2>
+      <a:lt2>
+        <a:srgbClr val="E7E6E6"/>
+      </a:lt2>
+      <a:accent1>
+        <a:srgbClr val="4472C4"/>
+      </a:accent1>
+      <a:accent2>
+        <a:srgbClr val="ED7D31"/>
+      </a:accent2>
+      <a:accent3>
+        <a:srgbClr val="A5A5A5"/>
+      </a:accent3>
+      <a:accent4>
+        <a:srgbClr val="FFC000"/>
+      </a:accent4>
+      <a:accent5>
+        <a:srgbClr val="5B9BD5"/>
+      </a:accent5>
+      <a:accent6>
+        <a:srgbClr val="70AD47"/>
+      </a:accent6>
+      <a:hlink>
+        <a:srgbClr val="0563C1"/>
+      </a:hlink>
+      <a:folHlink>
+        <a:srgbClr val="954F72"/>
+      </a:folHlink>
+    </a:clrScheme>
+    <a:fontScheme name="Office">
+      <a:majorFont>
+        <a:latin typeface="Calibri Light" panose="020F0302020204030204"/>
+        <a:ea typeface=""/>
+        <a:cs typeface=""/>
+        <a:font script="Jpan" typeface="游ゴシック Light"/>
+        <a:font script="Hang" typeface="맑은 고딕"/>
+        <a:font script="Hans" typeface="等线 Light"/>
+        <a:font script="Hant" typeface="新細明體"/>
+        <a:font script="Arab" typeface="Times New Roman"/>
+        <a:font script="Hebr" typeface="Times New Roman"/>
+        <a:font script="Thai" typeface="Angsana New"/>
+        <a:font script="Ethi" typeface="Nyala"/>
+        <a:font script="Beng" typeface="Vrinda"/>
+        <a:font script="Gujr" typeface="Shruti"/>
+        <a:font script="Khmr" typeface="MoolBoran"/>
+        <a:font script="Knda" typeface="Tunga"/>
+        <a:font script="Guru" typeface="Raavi"/>
+        <a:font script="Cans" typeface="Euphemia"/>
+        <a:font script="Cher" typeface="Plantagenet Cherokee"/>
+        <a:font script="Yiii" typeface="Microsoft Yi Baiti"/>
+        <a:font script="Tibt" typeface="Microsoft Himalaya"/>
+        <a:font script="Thaa" typeface="MV Boli"/>
+        <a:font script="Deva" typeface="Mangal"/>
+        <a:font script="Telu" typeface="Gautami"/>
+        <a:font script="Taml" typeface="Latha"/>
+        <a:font script="Syrc" typeface="Estrangelo Edessa"/>
+        <a:font script="Orya" typeface="Kalinga"/>
+        <a:font script="Mlym" typeface="Kartika"/>
+        <a:font script="Laoo" typeface="DokChampa"/>
+        <a:font script="Sinh" typeface="Iskoola Pota"/>
+        <a:font script="Mong" typeface="Mongolian Baiti"/>
+        <a:font script="Viet" typeface="Times New Roman"/>
+        <a:font script="Uigh" typeface="Microsoft Uighur"/>
+        <a:font script="Geor" typeface="Sylfaen"/>
+        <a:font script="Armn" typeface="Arial"/>
+        <a:font script="Bugi" typeface="Leelawadee UI"/>
+        <a:font script="Bopo" typeface="Microsoft JhengHei"/>
+        <a:font script="Java" typeface="Javanese Text"/>
+        <a:font script="Lisu" typeface="Segoe UI"/>
+        <a:font script="Mymr" typeface="Myanmar Text"/>
+        <a:font script="Nkoo" typeface="Ebrima"/>
+        <a:font script="Olck" typeface="Nirmala UI"/>
+        <a:font script="Osma" typeface="Ebrima"/>
+        <a:font script="Phag" typeface="Phagspa"/>
+        <a:font script="Syrn" typeface="Estrangelo Edessa"/>
+        <a:font script="Syrj" typeface="Estrangelo Edessa"/>
+        <a:font script="Syre" typeface="Estrangelo Edessa"/>
+        <a:font script="Sora" typeface="Nirmala UI"/>
+        <a:font script="Tale" typeface="Microsoft Tai Le"/>
+        <a:font script="Talu" typeface="Microsoft New Tai Lue"/>
+        <a:font script="Tfng" typeface="Ebrima"/>
+      </a:majorFont>
+      <a:minorFont>
+        <a:latin typeface="Calibri" panose="020F0502020204030204"/>
+        <a:ea typeface=""/>
+        <a:cs typeface=""/>
+        <a:font script="Jpan" typeface="游ゴシック"/>
+        <a:font script="Hang" typeface="맑은 고딕"/>
+        <a:font script="Hans" typeface="等线"/>
+        <a:font script="Hant" typeface="新細明體"/>
+        <a:font script="Arab" typeface="Arial"/>
+        <a:font script="Hebr" typeface="Arial"/>
+        <a:font script="Thai" typeface="Cordia New"/>
+        <a:font script="Ethi" typeface="Nyala"/>
+        <a:font script="Beng" typeface="Vrinda"/>
+        <a:font script="Gujr" typeface="Shruti"/>
+        <a:font script="Khmr" typeface="DaunPenh"/>
+        <a:font script="Knda" typeface="Tunga"/>
+        <a:font script="Guru" typeface="Raavi"/>
+        <a:font script="Cans" typeface="Euphemia"/>
+        <a:font script="Cher" typeface="Plantagenet Cherokee"/>
+        <a:font script="Yiii" typeface="Microsoft Yi Baiti"/>
+        <a:font script="Tibt" typeface="Microsoft Himalaya"/>
+        <a:font script="Thaa" typeface="MV Boli"/>
+        <a:font script="Deva" typeface="Mangal"/>
+        <a:font script="Telu" typeface="Gautami"/>
+        <a:font script="Taml" typeface="Latha"/>
+        <a:font script="Syrc" typeface="Estrangelo Edessa"/>
+        <a:font script="Orya" typeface="Kalinga"/>
+        <a:font script="Mlym" typeface="Kartika"/>
+        <a:font script="Laoo" typeface="DokChampa"/>
+        <a:font script="Sinh" typeface="Iskoola Pota"/>
+        <a:font script="Mong" typeface="Mongolian Baiti"/>
+        <a:font script="Viet" typeface="Arial"/>
+        <a:font script="Uigh" typeface="Microsoft Uighur"/>
+        <a:font script="Geor" typeface="Sylfaen"/>
+        <a:font script="Armn" typeface="Arial"/>
+        <a:font script="Bugi" typeface="Leelawadee UI"/>
+        <a:font script="Bopo" typeface="Microsoft JhengHei"/>
+        <a:font script="Java" typeface="Javanese Text"/>
+        <a:font script="Lisu" typeface="Segoe UI"/>
+        <a:font script="Mymr" typeface="Myanmar Text"/>
+        <a:font script="Nkoo" typeface="Ebrima"/>
+        <a:font script="Olck" typeface="Nirmala UI"/>
+        <a:font script="Osma" typeface="Ebrima"/>
+        <a:font script="Phag" typeface="Phagspa"/>
+        <a:font script="Syrn" typeface="Estrangelo Edessa"/>
+        <a:font script="Syrj" typeface="Estrangelo Edessa"/>
+        <a:font script="Syre" typeface="Estrangelo Edessa"/>
+        <a:font script="Sora" typeface="Nirmala UI"/>
+        <a:font script="Tale" typeface="Microsoft Tai Le"/>
+        <a:font script="Talu" typeface="Microsoft New Tai Lue"/>
+        <a:font script="Tfng" typeface="Ebrima"/>
+      </a:minorFont>
+    </a:fontScheme>
+    <a:fmtScheme name="Office">
+      <a:fillStyleLst>
+        <a:solidFill>
+          <a:schemeClr val="phClr"/>
+        </a:solidFill>
+        <a:gradFill rotWithShape="1">
+          <a:gsLst>
+            <a:gs pos="0">
+              <a:schemeClr val="phClr">
+                <a:lumMod val="110000"/>
+                <a:satMod val="105000"/>
+                <a:tint val="67000"/>
+              </a:schemeClr>
+            </a:gs>
+            <a:gs pos="50000">
+              <a:schemeClr val="phClr">
+                <a:lumMod val="105000"/>
+                <a:satMod val="103000"/>
+                <a:tint val="73000"/>
+              </a:schemeClr>
+            </a:gs>
+            <a:gs pos="100000">
+              <a:schemeClr val="phClr">
+                <a:lumMod val="105000"/>
+                <a:satMod val="109000"/>
+                <a:tint val="81000"/>
+              </a:schemeClr>
+            </a:gs>
+          </a:gsLst>
+          <a:lin ang="5400000" scaled="0"/>
+        </a:gradFill>
+        <a:gradFill rotWithShape="1">
+          <a:gsLst>
+            <a:gs pos="0">
+              <a:schemeClr val="phClr">
+                <a:satMod val="103000"/>
+                <a:lumMod val="102000"/>
+                <a:tint val="94000"/>
+              </a:schemeClr>
+            </a:gs>
+            <a:gs pos="50000">
+              <a:schemeClr val="phClr">
+                <a:satMod val="110000"/>
+                <a:lumMod val="100000"/>
+                <a:shade val="100000"/>
+              </a:schemeClr>
+            </a:gs>
+            <a:gs pos="100000">
+              <a:schemeClr val="phClr">
+                <a:lumMod val="99000"/>
+                <a:satMod val="120000"/>
+                <a:shade val="78000"/>
+              </a:schemeClr>
+            </a:gs>
+          </a:gsLst>
+          <a:lin ang="5400000" scaled="0"/>
+        </a:gradFill>
+      </a:fillStyleLst>
+      <a:lnStyleLst>
+        <a:ln w="6350" cap="flat" cmpd="sng" algn="ctr">
+          <a:solidFill>
+            <a:schemeClr val="phClr"/>
+          </a:solidFill>
+          <a:prstDash val="solid"/>
+          <a:miter lim="800000"/>
+        </a:ln>
+        <a:ln w="12700" cap="flat" cmpd="sng" algn="ctr">
+          <a:solidFill>
+            <a:schemeClr val="phClr"/>
+          </a:solidFill>
+          <a:prstDash val="solid"/>
+          <a:miter lim="800000"/>
+        </a:ln>
+        <a:ln w="19050" cap="flat" cmpd="sng" algn="ctr">
+          <a:solidFill>
+            <a:schemeClr val="phClr"/>
+          </a:solidFill>
+          <a:prstDash val="solid"/>
+          <a:miter lim="800000"/>
+        </a:ln>
+      </a:lnStyleLst>
+      <a:effectStyleLst>
+        <a:effectStyle>
+          <a:effectLst/>
+        </a:effectStyle>
+        <a:effectStyle>
+          <a:effectLst/>
+        </a:effectStyle>
+        <a:effectStyle>
+          <a:effectLst>
+            <a:outerShdw blurRad="57150" dist="19050" dir="5400000" algn="ctr" rotWithShape="0">
+              <a:srgbClr val="000000">
+                <a:alpha val="63000"/>
+              </a:srgbClr>
+            </a:outerShdw>
+          </a:effectLst>
+        </a:effectStyle>
+      </a:effectStyleLst>
+      <a:bgFillStyleLst>
+        <a:solidFill>
+          <a:schemeClr val="phClr"/>
+        </a:solidFill>
+        <a:solidFill>
+          <a:schemeClr val="phClr">
+            <a:tint val="95000"/>
+            <a:satMod val="170000"/>
+          </a:schemeClr>
+        </a:solidFill>
+        <a:gradFill rotWithShape="1">
+          <a:gsLst>
+            <a:gs pos="0">
+              <a:schemeClr val="phClr">
+                <a:tint val="93000"/>
+                <a:satMod val="150000"/>
+                <a:shade val="98000"/>
+                <a:lumMod val="102000"/>
+              </a:schemeClr>
+            </a:gs>
+            <a:gs pos="50000">
+              <a:schemeClr val="phClr">
+                <a:tint val="98000"/>
+                <a:satMod val="130000"/>
+                <a:shade val="90000"/>
+                <a:lumMod val="103000"/>
+              </a:schemeClr>
+            </a:gs>
+            <a:gs pos="100000">
+              <a:schemeClr val="phClr">
+                <a:shade val="63000"/>
+                <a:satMod val="120000"/>
+              </a:schemeClr>
+            </a:gs>
+          </a:gsLst>
+          <a:lin ang="5400000" scaled="0"/>
+        </a:gradFill>
+      </a:bgFillStyleLst>
+    </a:fmtScheme>
+  </a:themeElements>
+  <a:objectDefaults/>
+  <a:extraClrSchemeLst/>
+  <a:extLst>
+    <a:ext uri="{05A4C25C-085E-4340-85A3-A5531E510DB2}">
+      <thm15:themeFamily xmlns:thm15="http://schemas.microsoft.com/office/thememl/2012/main" name="Office Theme" id="{62F939B6-93AF-4DB8-9C6B-D6C7DFDC589F}" vid="{4A3C46E8-61CC-4603-A589-7422A47A8E4A}"/>
+    </a:ext>
+  </a:extLst>
+</a:theme>
+</file>
+
 <file path=ppt/webextensions/taskpanes.xml><?xml version="1.0" encoding="utf-8"?>
 <wetp:taskpanes xmlns:wetp="http://schemas.microsoft.com/office/webextensions/taskpanes/2010/11">
   <wetp:taskpane dockstate="right" visibility="0" width="875" row="1">

--- a/LectureSlides/03a_ReviewOfProbability.pptx
+++ b/LectureSlides/03a_ReviewOfProbability.pptx
@@ -254,7 +254,7 @@
           <a:p>
             <a:fld id="{68C00587-1FB2-4AD6-90E2-FCB188A5CAEA}" type="datetimeFigureOut">
               <a:rPr lang="en-US" smtClean="0"/>
-              <a:t>9/14/2026</a:t>
+              <a:t>9/15/2026</a:t>
             </a:fld>
             <a:endParaRPr lang="en-US"/>
           </a:p>
@@ -784,7 +784,7 @@
           <a:p>
             <a:fld id="{241EB5C9-1307-BA42-ABA2-0BC069CD8E7F}" type="datetimeFigureOut">
               <a:rPr lang="en-US" smtClean="0"/>
-              <a:t>9/14/2026</a:t>
+              <a:t>9/15/2026</a:t>
             </a:fld>
             <a:endParaRPr lang="en-US"/>
           </a:p>
@@ -952,7 +952,7 @@
           <a:p>
             <a:fld id="{241EB5C9-1307-BA42-ABA2-0BC069CD8E7F}" type="datetimeFigureOut">
               <a:rPr lang="en-US" smtClean="0"/>
-              <a:t>9/14/2026</a:t>
+              <a:t>9/15/2026</a:t>
             </a:fld>
             <a:endParaRPr lang="en-US"/>
           </a:p>
@@ -1130,7 +1130,7 @@
           <a:p>
             <a:fld id="{241EB5C9-1307-BA42-ABA2-0BC069CD8E7F}" type="datetimeFigureOut">
               <a:rPr lang="en-US" smtClean="0"/>
-              <a:t>9/14/2026</a:t>
+              <a:t>9/15/2026</a:t>
             </a:fld>
             <a:endParaRPr lang="en-US"/>
           </a:p>
@@ -1298,7 +1298,7 @@
           <a:p>
             <a:fld id="{241EB5C9-1307-BA42-ABA2-0BC069CD8E7F}" type="datetimeFigureOut">
               <a:rPr lang="en-US" smtClean="0"/>
-              <a:t>9/14/2026</a:t>
+              <a:t>9/15/2026</a:t>
             </a:fld>
             <a:endParaRPr lang="en-US"/>
           </a:p>
@@ -1543,7 +1543,7 @@
           <a:p>
             <a:fld id="{241EB5C9-1307-BA42-ABA2-0BC069CD8E7F}" type="datetimeFigureOut">
               <a:rPr lang="en-US" smtClean="0"/>
-              <a:t>9/14/2026</a:t>
+              <a:t>9/15/2026</a:t>
             </a:fld>
             <a:endParaRPr lang="en-US"/>
           </a:p>
@@ -1828,7 +1828,7 @@
           <a:p>
             <a:fld id="{241EB5C9-1307-BA42-ABA2-0BC069CD8E7F}" type="datetimeFigureOut">
               <a:rPr lang="en-US" smtClean="0"/>
-              <a:t>9/14/2026</a:t>
+              <a:t>9/15/2026</a:t>
             </a:fld>
             <a:endParaRPr lang="en-US"/>
           </a:p>
@@ -2247,7 +2247,7 @@
           <a:p>
             <a:fld id="{241EB5C9-1307-BA42-ABA2-0BC069CD8E7F}" type="datetimeFigureOut">
               <a:rPr lang="en-US" smtClean="0"/>
-              <a:t>9/14/2026</a:t>
+              <a:t>9/15/2026</a:t>
             </a:fld>
             <a:endParaRPr lang="en-US"/>
           </a:p>
@@ -2364,7 +2364,7 @@
           <a:p>
             <a:fld id="{241EB5C9-1307-BA42-ABA2-0BC069CD8E7F}" type="datetimeFigureOut">
               <a:rPr lang="en-US" smtClean="0"/>
-              <a:t>9/14/2026</a:t>
+              <a:t>9/15/2026</a:t>
             </a:fld>
             <a:endParaRPr lang="en-US"/>
           </a:p>
@@ -2459,7 +2459,7 @@
           <a:p>
             <a:fld id="{241EB5C9-1307-BA42-ABA2-0BC069CD8E7F}" type="datetimeFigureOut">
               <a:rPr lang="en-US" smtClean="0"/>
-              <a:t>9/14/2026</a:t>
+              <a:t>9/15/2026</a:t>
             </a:fld>
             <a:endParaRPr lang="en-US"/>
           </a:p>
@@ -2734,7 +2734,7 @@
           <a:p>
             <a:fld id="{241EB5C9-1307-BA42-ABA2-0BC069CD8E7F}" type="datetimeFigureOut">
               <a:rPr lang="en-US" smtClean="0"/>
-              <a:t>9/14/2026</a:t>
+              <a:t>9/15/2026</a:t>
             </a:fld>
             <a:endParaRPr lang="en-US"/>
           </a:p>
@@ -2986,7 +2986,7 @@
           <a:p>
             <a:fld id="{241EB5C9-1307-BA42-ABA2-0BC069CD8E7F}" type="datetimeFigureOut">
               <a:rPr lang="en-US" smtClean="0"/>
-              <a:t>9/14/2026</a:t>
+              <a:t>9/15/2026</a:t>
             </a:fld>
             <a:endParaRPr lang="en-US"/>
           </a:p>
@@ -3197,7 +3197,7 @@
           <a:p>
             <a:fld id="{241EB5C9-1307-BA42-ABA2-0BC069CD8E7F}" type="datetimeFigureOut">
               <a:rPr lang="en-US" smtClean="0"/>
-              <a:t>9/14/2026</a:t>
+              <a:t>9/15/2026</a:t>
             </a:fld>
             <a:endParaRPr lang="en-US"/>
           </a:p>
@@ -4489,7 +4489,7 @@
                       <m:sSup>
                         <m:sSupPr>
                           <m:ctrlPr>
-                            <a:rPr lang="en-US" i="1" smtClean="0">
+                            <a:rPr lang="en-US" b="0" i="1" smtClean="0">
                               <a:latin typeface="Cambria Math" panose="02040503050406030204" pitchFamily="18" charset="0"/>
                             </a:rPr>
                           </m:ctrlPr>
@@ -7204,8 +7204,8 @@
           </a:prstGeom>
         </p:spPr>
       </p:pic>
-      <mc:AlternateContent xmlns:mc="http://schemas.openxmlformats.org/markup-compatibility/2006">
-        <mc:Choice xmlns:a14="http://schemas.microsoft.com/office/drawing/2010/main" Requires="a14">
+      <mc:AlternateContent xmlns:mc="http://schemas.openxmlformats.org/markup-compatibility/2006" xmlns:a14="http://schemas.microsoft.com/office/drawing/2010/main">
+        <mc:Choice Requires="a14">
           <p:sp>
             <p:nvSpPr>
               <p:cNvPr id="10" name="TextBox 9">
@@ -7297,7 +7297,7 @@
                     <m:d>
                       <m:dPr>
                         <m:ctrlPr>
-                          <a:rPr lang="el-GR" sz="2400" i="1">
+                          <a:rPr lang="en-US" sz="2400" i="1">
                             <a:latin typeface="Cambria Math" panose="02040503050406030204" pitchFamily="18" charset="0"/>
                             <a:ea typeface="Cambria Math" panose="02040503050406030204" pitchFamily="18" charset="0"/>
                           </a:rPr>
@@ -7384,7 +7384,7 @@
                         <m:sSub>
                           <m:sSubPr>
                             <m:ctrlPr>
-                              <a:rPr lang="el-GR" sz="2400" i="1">
+                              <a:rPr lang="en-US" sz="2400" b="0" i="1" smtClean="0">
                                 <a:latin typeface="Cambria Math" panose="02040503050406030204" pitchFamily="18" charset="0"/>
                                 <a:ea typeface="Cambria Math" panose="02040503050406030204" pitchFamily="18" charset="0"/>
                               </a:rPr>
@@ -7551,7 +7551,7 @@
             </p:txBody>
           </p:sp>
         </mc:Choice>
-        <mc:Fallback>
+        <mc:Fallback xmlns="">
           <p:sp>
             <p:nvSpPr>
               <p:cNvPr id="10" name="TextBox 9">
@@ -11730,7 +11730,7 @@
                           <m:d>
                             <m:dPr>
                               <m:ctrlPr>
-                                <a:rPr lang="en-US" b="0" i="1" smtClean="0">
+                                <a:rPr lang="en-US" i="1">
                                   <a:latin typeface="Cambria Math" panose="02040503050406030204" pitchFamily="18" charset="0"/>
                                 </a:rPr>
                               </m:ctrlPr>
@@ -12033,7 +12033,7 @@
                           <m:d>
                             <m:dPr>
                               <m:ctrlPr>
-                                <a:rPr lang="en-US" b="0" i="1" smtClean="0">
+                                <a:rPr lang="en-US" i="1">
                                   <a:latin typeface="Cambria Math" panose="02040503050406030204" pitchFamily="18" charset="0"/>
                                 </a:rPr>
                               </m:ctrlPr>
@@ -12457,7 +12457,7 @@
                             <m:accPr>
                               <m:chr m:val="̅"/>
                               <m:ctrlPr>
-                                <a:rPr lang="en-US" i="1" smtClean="0">
+                                <a:rPr lang="en-US" i="1">
                                   <a:latin typeface="Cambria Math" panose="02040503050406030204" pitchFamily="18" charset="0"/>
                                 </a:rPr>
                               </m:ctrlPr>
@@ -18774,8 +18774,8 @@
           </p:sp>
         </mc:Fallback>
       </mc:AlternateContent>
-      <mc:AlternateContent xmlns:mc="http://schemas.openxmlformats.org/markup-compatibility/2006" xmlns:a14="http://schemas.microsoft.com/office/drawing/2010/main">
-        <mc:Choice Requires="a14">
+      <mc:AlternateContent xmlns:mc="http://schemas.openxmlformats.org/markup-compatibility/2006">
+        <mc:Choice xmlns:a14="http://schemas.microsoft.com/office/drawing/2010/main" Requires="a14">
           <p:sp>
             <p:nvSpPr>
               <p:cNvPr id="3" name="Content Placeholder 2"/>
@@ -19293,7 +19293,7 @@
                         <a:rPr lang="en-US" b="0" i="1" smtClean="0">
                           <a:latin typeface="Cambria Math" panose="02040503050406030204" pitchFamily="18" charset="0"/>
                         </a:rPr>
-                        <m:t>=</m:t>
+                        <m:t>~</m:t>
                       </m:r>
                       <m:sSup>
                         <m:sSupPr>
@@ -19351,7 +19351,7 @@
             </p:txBody>
           </p:sp>
         </mc:Choice>
-        <mc:Fallback xmlns="">
+        <mc:Fallback>
           <p:sp>
             <p:nvSpPr>
               <p:cNvPr id="3" name="Content Placeholder 2"/>
@@ -23066,8 +23066,8 @@
           </a:p>
         </p:txBody>
       </p:sp>
-      <mc:AlternateContent xmlns:mc="http://schemas.openxmlformats.org/markup-compatibility/2006" xmlns:a14="http://schemas.microsoft.com/office/drawing/2010/main">
-        <mc:Choice Requires="a14">
+      <mc:AlternateContent xmlns:mc="http://schemas.openxmlformats.org/markup-compatibility/2006">
+        <mc:Choice xmlns:a14="http://schemas.microsoft.com/office/drawing/2010/main" Requires="a14">
           <p:sp>
             <p:nvSpPr>
               <p:cNvPr id="3" name="Content Placeholder 2"/>
@@ -23120,7 +23120,7 @@
                 </a:pPr>
                 <a:r>
                   <a:rPr lang="en-US" dirty="0"/>
-                  <a:t>Probability for any set of events, A, is greater than 0 and less than or equal to 1</a:t>
+                  <a:t>Probability for any set of events, A, is greater than or equal to 0 and less than or equal to 1</a:t>
                 </a:r>
               </a:p>
               <a:p>
@@ -23491,7 +23491,7 @@
             </p:txBody>
           </p:sp>
         </mc:Choice>
-        <mc:Fallback xmlns="">
+        <mc:Fallback>
           <p:sp>
             <p:nvSpPr>
               <p:cNvPr id="3" name="Content Placeholder 2"/>
@@ -23510,7 +23510,7 @@
               <a:blipFill>
                 <a:blip r:embed="rId2"/>
                 <a:stretch>
-                  <a:fillRect l="-815" t="-2479" r="-1037"/>
+                  <a:fillRect l="-815" t="-2479"/>
                 </a:stretch>
               </a:blipFill>
             </p:spPr>
